--- a/resources and slides/SPL-01 presentation.pptx
+++ b/resources and slides/SPL-01 presentation.pptx
@@ -1,35 +1,51 @@
 
 <file path=ppt/presentation.xml><?xml version="1.0" encoding="utf-8"?>
-<p:presentation xmlns:a="http://schemas.openxmlformats.org/drawingml/2006/main" xmlns:r="http://schemas.openxmlformats.org/officeDocument/2006/relationships" xmlns:p="http://schemas.openxmlformats.org/presentationml/2006/main" saveSubsetFonts="1" embedTrueTypeFonts="true">
+<p:presentation xmlns:a="http://schemas.openxmlformats.org/drawingml/2006/main" xmlns:r="http://schemas.openxmlformats.org/officeDocument/2006/relationships" xmlns:p="http://schemas.openxmlformats.org/presentationml/2006/main" embedTrueTypeFonts="1" saveSubsetFonts="1">
   <p:sldMasterIdLst>
     <p:sldMasterId id="2147483648" r:id="rId1"/>
   </p:sldMasterIdLst>
   <p:sldIdLst>
-    <p:sldId id="256" r:id="rId6"/>
-    <p:sldId id="257" r:id="rId7"/>
-    <p:sldId id="258" r:id="rId8"/>
-    <p:sldId id="259" r:id="rId9"/>
-    <p:sldId id="260" r:id="rId10"/>
-    <p:sldId id="261" r:id="rId11"/>
-    <p:sldId id="262" r:id="rId12"/>
-    <p:sldId id="263" r:id="rId13"/>
-    <p:sldId id="264" r:id="rId14"/>
-    <p:sldId id="265" r:id="rId15"/>
+    <p:sldId id="256" r:id="rId3"/>
+    <p:sldId id="257" r:id="rId4"/>
+    <p:sldId id="258" r:id="rId5"/>
+    <p:sldId id="259" r:id="rId6"/>
+    <p:sldId id="260" r:id="rId7"/>
+    <p:sldId id="261" r:id="rId8"/>
+    <p:sldId id="262" r:id="rId9"/>
+    <p:sldId id="263" r:id="rId10"/>
+    <p:sldId id="264" r:id="rId11"/>
+    <p:sldId id="265" r:id="rId12"/>
+    <p:sldId id="266" r:id="rId13"/>
   </p:sldIdLst>
   <p:sldSz cx="18288000" cy="10287000"/>
   <p:notesSz cx="6858000" cy="9144000"/>
   <p:embeddedFontLst>
     <p:embeddedFont>
-      <p:font typeface="Oswald" charset="1" panose="00000500000000000000"/>
-      <p:regular r:id="rId16"/>
-    </p:embeddedFont>
-    <p:embeddedFont>
-      <p:font typeface="TT Hoves" charset="1" panose="02000003020000060003"/>
+      <p:font typeface="Oswald" panose="00000500000000000000"/>
       <p:regular r:id="rId17"/>
     </p:embeddedFont>
     <p:embeddedFont>
-      <p:font typeface="TT Hoves Bold" charset="1" panose="02000003020000060003"/>
+      <p:font typeface="TT Hoves" panose="02000003020000060003"/>
       <p:regular r:id="rId18"/>
+    </p:embeddedFont>
+    <p:embeddedFont>
+      <p:font typeface="TT Hoves Bold" panose="02000003020000060003"/>
+      <p:bold r:id="rId19"/>
+    </p:embeddedFont>
+    <p:embeddedFont>
+      <p:font typeface="Roboto Bold" panose="02000000000000000000"/>
+      <p:bold r:id="rId20"/>
+    </p:embeddedFont>
+    <p:embeddedFont>
+      <p:font typeface="Roboto" panose="02000000000000000000"/>
+      <p:regular r:id="rId21"/>
+    </p:embeddedFont>
+    <p:embeddedFont>
+      <p:font typeface="Calibri" panose="020F0502020204030204" charset="0"/>
+      <p:regular r:id="rId22"/>
+      <p:bold r:id="rId23"/>
+      <p:italic r:id="rId24"/>
+      <p:boldItalic r:id="rId25"/>
     </p:embeddedFont>
   </p:embeddedFontLst>
   <p:defaultTextStyle>
@@ -127,6 +143,22 @@
       </a:defRPr>
     </a:lvl9pPr>
   </p:defaultTextStyle>
+  <p:extLst>
+    <p:ext uri="{EFAFB233-063F-42B5-8137-9DF3F51BA10A}">
+      <p15:sldGuideLst xmlns:p15="http://schemas.microsoft.com/office/powerpoint/2012/main">
+        <p15:guide id="1" orient="horz" pos="2160" userDrawn="1">
+          <p15:clr>
+            <a:srgbClr val="A4A3A4"/>
+          </p15:clr>
+        </p15:guide>
+        <p15:guide id="2" pos="2880" userDrawn="1">
+          <p15:clr>
+            <a:srgbClr val="A4A3A4"/>
+          </p15:clr>
+        </p15:guide>
+      </p15:sldGuideLst>
+    </p:ext>
+  </p:extLst>
 </p:presentation>
 </file>
 
@@ -311,8 +343,6 @@
           <a:p>
             <a:fld id="{1D8BD707-D9CF-40AE-B4C6-C98DA3205C09}" type="datetimeFigureOut">
               <a:rPr lang="en-US" smtClean="0"/>
-              <a:pPr/>
-              <a:t>8/1/2011</a:t>
             </a:fld>
             <a:endParaRPr lang="en-US"/>
           </a:p>
@@ -354,8 +384,6 @@
           <a:p>
             <a:fld id="{B6F15528-21DE-4FAA-801E-634DDDAF4B2B}" type="slidenum">
               <a:rPr lang="en-US" smtClean="0"/>
-              <a:pPr/>
-              <a:t>‹#›</a:t>
             </a:fld>
             <a:endParaRPr lang="en-US"/>
           </a:p>
@@ -429,6 +457,7 @@
               <a:rPr lang="en-US" smtClean="0"/>
               <a:t>Click to edit Master text styles</a:t>
             </a:r>
+            <a:endParaRPr lang="en-US" smtClean="0"/>
           </a:p>
           <a:p>
             <a:pPr lvl="1"/>
@@ -436,6 +465,7 @@
               <a:rPr lang="en-US" smtClean="0"/>
               <a:t>Second level</a:t>
             </a:r>
+            <a:endParaRPr lang="en-US" smtClean="0"/>
           </a:p>
           <a:p>
             <a:pPr lvl="2"/>
@@ -443,6 +473,7 @@
               <a:rPr lang="en-US" smtClean="0"/>
               <a:t>Third level</a:t>
             </a:r>
+            <a:endParaRPr lang="en-US" smtClean="0"/>
           </a:p>
           <a:p>
             <a:pPr lvl="3"/>
@@ -450,6 +481,7 @@
               <a:rPr lang="en-US" smtClean="0"/>
               <a:t>Fourth level</a:t>
             </a:r>
+            <a:endParaRPr lang="en-US" smtClean="0"/>
           </a:p>
           <a:p>
             <a:pPr lvl="4"/>
@@ -478,8 +510,6 @@
           <a:p>
             <a:fld id="{1D8BD707-D9CF-40AE-B4C6-C98DA3205C09}" type="datetimeFigureOut">
               <a:rPr lang="en-US" smtClean="0"/>
-              <a:pPr/>
-              <a:t>8/1/2011</a:t>
             </a:fld>
             <a:endParaRPr lang="en-US"/>
           </a:p>
@@ -521,8 +551,6 @@
           <a:p>
             <a:fld id="{B6F15528-21DE-4FAA-801E-634DDDAF4B2B}" type="slidenum">
               <a:rPr lang="en-US" smtClean="0"/>
-              <a:pPr/>
-              <a:t>‹#›</a:t>
             </a:fld>
             <a:endParaRPr lang="en-US"/>
           </a:p>
@@ -606,6 +634,7 @@
               <a:rPr lang="en-US" smtClean="0"/>
               <a:t>Click to edit Master text styles</a:t>
             </a:r>
+            <a:endParaRPr lang="en-US" smtClean="0"/>
           </a:p>
           <a:p>
             <a:pPr lvl="1"/>
@@ -613,6 +642,7 @@
               <a:rPr lang="en-US" smtClean="0"/>
               <a:t>Second level</a:t>
             </a:r>
+            <a:endParaRPr lang="en-US" smtClean="0"/>
           </a:p>
           <a:p>
             <a:pPr lvl="2"/>
@@ -620,6 +650,7 @@
               <a:rPr lang="en-US" smtClean="0"/>
               <a:t>Third level</a:t>
             </a:r>
+            <a:endParaRPr lang="en-US" smtClean="0"/>
           </a:p>
           <a:p>
             <a:pPr lvl="3"/>
@@ -627,6 +658,7 @@
               <a:rPr lang="en-US" smtClean="0"/>
               <a:t>Fourth level</a:t>
             </a:r>
+            <a:endParaRPr lang="en-US" smtClean="0"/>
           </a:p>
           <a:p>
             <a:pPr lvl="4"/>
@@ -655,8 +687,6 @@
           <a:p>
             <a:fld id="{1D8BD707-D9CF-40AE-B4C6-C98DA3205C09}" type="datetimeFigureOut">
               <a:rPr lang="en-US" smtClean="0"/>
-              <a:pPr/>
-              <a:t>8/1/2011</a:t>
             </a:fld>
             <a:endParaRPr lang="en-US"/>
           </a:p>
@@ -698,8 +728,6 @@
           <a:p>
             <a:fld id="{B6F15528-21DE-4FAA-801E-634DDDAF4B2B}" type="slidenum">
               <a:rPr lang="en-US" smtClean="0"/>
-              <a:pPr/>
-              <a:t>‹#›</a:t>
             </a:fld>
             <a:endParaRPr lang="en-US"/>
           </a:p>
@@ -773,6 +801,7 @@
               <a:rPr lang="en-US" smtClean="0"/>
               <a:t>Click to edit Master text styles</a:t>
             </a:r>
+            <a:endParaRPr lang="en-US" smtClean="0"/>
           </a:p>
           <a:p>
             <a:pPr lvl="1"/>
@@ -780,6 +809,7 @@
               <a:rPr lang="en-US" smtClean="0"/>
               <a:t>Second level</a:t>
             </a:r>
+            <a:endParaRPr lang="en-US" smtClean="0"/>
           </a:p>
           <a:p>
             <a:pPr lvl="2"/>
@@ -787,6 +817,7 @@
               <a:rPr lang="en-US" smtClean="0"/>
               <a:t>Third level</a:t>
             </a:r>
+            <a:endParaRPr lang="en-US" smtClean="0"/>
           </a:p>
           <a:p>
             <a:pPr lvl="3"/>
@@ -794,6 +825,7 @@
               <a:rPr lang="en-US" smtClean="0"/>
               <a:t>Fourth level</a:t>
             </a:r>
+            <a:endParaRPr lang="en-US" smtClean="0"/>
           </a:p>
           <a:p>
             <a:pPr lvl="4"/>
@@ -822,8 +854,6 @@
           <a:p>
             <a:fld id="{1D8BD707-D9CF-40AE-B4C6-C98DA3205C09}" type="datetimeFigureOut">
               <a:rPr lang="en-US" smtClean="0"/>
-              <a:pPr/>
-              <a:t>8/1/2011</a:t>
             </a:fld>
             <a:endParaRPr lang="en-US"/>
           </a:p>
@@ -865,8 +895,6 @@
           <a:p>
             <a:fld id="{B6F15528-21DE-4FAA-801E-634DDDAF4B2B}" type="slidenum">
               <a:rPr lang="en-US" smtClean="0"/>
-              <a:pPr/>
-              <a:t>‹#›</a:t>
             </a:fld>
             <a:endParaRPr lang="en-US"/>
           </a:p>
@@ -1045,6 +1073,7 @@
               <a:rPr lang="en-US" smtClean="0"/>
               <a:t>Click to edit Master text styles</a:t>
             </a:r>
+            <a:endParaRPr lang="en-US" smtClean="0"/>
           </a:p>
         </p:txBody>
       </p:sp>
@@ -1065,8 +1094,6 @@
           <a:p>
             <a:fld id="{1D8BD707-D9CF-40AE-B4C6-C98DA3205C09}" type="datetimeFigureOut">
               <a:rPr lang="en-US" smtClean="0"/>
-              <a:pPr/>
-              <a:t>8/1/2011</a:t>
             </a:fld>
             <a:endParaRPr lang="en-US"/>
           </a:p>
@@ -1108,8 +1135,6 @@
           <a:p>
             <a:fld id="{B6F15528-21DE-4FAA-801E-634DDDAF4B2B}" type="slidenum">
               <a:rPr lang="en-US" smtClean="0"/>
-              <a:pPr/>
-              <a:t>‹#›</a:t>
             </a:fld>
             <a:endParaRPr lang="en-US"/>
           </a:p>
@@ -1216,6 +1241,7 @@
               <a:rPr lang="en-US" smtClean="0"/>
               <a:t>Click to edit Master text styles</a:t>
             </a:r>
+            <a:endParaRPr lang="en-US" smtClean="0"/>
           </a:p>
           <a:p>
             <a:pPr lvl="1"/>
@@ -1223,6 +1249,7 @@
               <a:rPr lang="en-US" smtClean="0"/>
               <a:t>Second level</a:t>
             </a:r>
+            <a:endParaRPr lang="en-US" smtClean="0"/>
           </a:p>
           <a:p>
             <a:pPr lvl="2"/>
@@ -1230,6 +1257,7 @@
               <a:rPr lang="en-US" smtClean="0"/>
               <a:t>Third level</a:t>
             </a:r>
+            <a:endParaRPr lang="en-US" smtClean="0"/>
           </a:p>
           <a:p>
             <a:pPr lvl="3"/>
@@ -1237,6 +1265,7 @@
               <a:rPr lang="en-US" smtClean="0"/>
               <a:t>Fourth level</a:t>
             </a:r>
+            <a:endParaRPr lang="en-US" smtClean="0"/>
           </a:p>
           <a:p>
             <a:pPr lvl="4"/>
@@ -1301,6 +1330,7 @@
               <a:rPr lang="en-US" smtClean="0"/>
               <a:t>Click to edit Master text styles</a:t>
             </a:r>
+            <a:endParaRPr lang="en-US" smtClean="0"/>
           </a:p>
           <a:p>
             <a:pPr lvl="1"/>
@@ -1308,6 +1338,7 @@
               <a:rPr lang="en-US" smtClean="0"/>
               <a:t>Second level</a:t>
             </a:r>
+            <a:endParaRPr lang="en-US" smtClean="0"/>
           </a:p>
           <a:p>
             <a:pPr lvl="2"/>
@@ -1315,6 +1346,7 @@
               <a:rPr lang="en-US" smtClean="0"/>
               <a:t>Third level</a:t>
             </a:r>
+            <a:endParaRPr lang="en-US" smtClean="0"/>
           </a:p>
           <a:p>
             <a:pPr lvl="3"/>
@@ -1322,6 +1354,7 @@
               <a:rPr lang="en-US" smtClean="0"/>
               <a:t>Fourth level</a:t>
             </a:r>
+            <a:endParaRPr lang="en-US" smtClean="0"/>
           </a:p>
           <a:p>
             <a:pPr lvl="4"/>
@@ -1350,8 +1383,6 @@
           <a:p>
             <a:fld id="{1D8BD707-D9CF-40AE-B4C6-C98DA3205C09}" type="datetimeFigureOut">
               <a:rPr lang="en-US" smtClean="0"/>
-              <a:pPr/>
-              <a:t>8/1/2011</a:t>
             </a:fld>
             <a:endParaRPr lang="en-US"/>
           </a:p>
@@ -1393,8 +1424,6 @@
           <a:p>
             <a:fld id="{B6F15528-21DE-4FAA-801E-634DDDAF4B2B}" type="slidenum">
               <a:rPr lang="en-US" smtClean="0"/>
-              <a:pPr/>
-              <a:t>‹#›</a:t>
             </a:fld>
             <a:endParaRPr lang="en-US"/>
           </a:p>
@@ -1514,6 +1543,7 @@
               <a:rPr lang="en-US" smtClean="0"/>
               <a:t>Click to edit Master text styles</a:t>
             </a:r>
+            <a:endParaRPr lang="en-US" smtClean="0"/>
           </a:p>
         </p:txBody>
       </p:sp>
@@ -1570,6 +1600,7 @@
               <a:rPr lang="en-US" smtClean="0"/>
               <a:t>Click to edit Master text styles</a:t>
             </a:r>
+            <a:endParaRPr lang="en-US" smtClean="0"/>
           </a:p>
           <a:p>
             <a:pPr lvl="1"/>
@@ -1577,6 +1608,7 @@
               <a:rPr lang="en-US" smtClean="0"/>
               <a:t>Second level</a:t>
             </a:r>
+            <a:endParaRPr lang="en-US" smtClean="0"/>
           </a:p>
           <a:p>
             <a:pPr lvl="2"/>
@@ -1584,6 +1616,7 @@
               <a:rPr lang="en-US" smtClean="0"/>
               <a:t>Third level</a:t>
             </a:r>
+            <a:endParaRPr lang="en-US" smtClean="0"/>
           </a:p>
           <a:p>
             <a:pPr lvl="3"/>
@@ -1591,6 +1624,7 @@
               <a:rPr lang="en-US" smtClean="0"/>
               <a:t>Fourth level</a:t>
             </a:r>
+            <a:endParaRPr lang="en-US" smtClean="0"/>
           </a:p>
           <a:p>
             <a:pPr lvl="4"/>
@@ -1664,6 +1698,7 @@
               <a:rPr lang="en-US" smtClean="0"/>
               <a:t>Click to edit Master text styles</a:t>
             </a:r>
+            <a:endParaRPr lang="en-US" smtClean="0"/>
           </a:p>
         </p:txBody>
       </p:sp>
@@ -1720,6 +1755,7 @@
               <a:rPr lang="en-US" smtClean="0"/>
               <a:t>Click to edit Master text styles</a:t>
             </a:r>
+            <a:endParaRPr lang="en-US" smtClean="0"/>
           </a:p>
           <a:p>
             <a:pPr lvl="1"/>
@@ -1727,6 +1763,7 @@
               <a:rPr lang="en-US" smtClean="0"/>
               <a:t>Second level</a:t>
             </a:r>
+            <a:endParaRPr lang="en-US" smtClean="0"/>
           </a:p>
           <a:p>
             <a:pPr lvl="2"/>
@@ -1734,6 +1771,7 @@
               <a:rPr lang="en-US" smtClean="0"/>
               <a:t>Third level</a:t>
             </a:r>
+            <a:endParaRPr lang="en-US" smtClean="0"/>
           </a:p>
           <a:p>
             <a:pPr lvl="3"/>
@@ -1741,6 +1779,7 @@
               <a:rPr lang="en-US" smtClean="0"/>
               <a:t>Fourth level</a:t>
             </a:r>
+            <a:endParaRPr lang="en-US" smtClean="0"/>
           </a:p>
           <a:p>
             <a:pPr lvl="4"/>
@@ -1769,8 +1808,6 @@
           <a:p>
             <a:fld id="{1D8BD707-D9CF-40AE-B4C6-C98DA3205C09}" type="datetimeFigureOut">
               <a:rPr lang="en-US" smtClean="0"/>
-              <a:pPr/>
-              <a:t>8/1/2011</a:t>
             </a:fld>
             <a:endParaRPr lang="en-US"/>
           </a:p>
@@ -1812,8 +1849,6 @@
           <a:p>
             <a:fld id="{B6F15528-21DE-4FAA-801E-634DDDAF4B2B}" type="slidenum">
               <a:rPr lang="en-US" smtClean="0"/>
-              <a:pPr/>
-              <a:t>‹#›</a:t>
             </a:fld>
             <a:endParaRPr lang="en-US"/>
           </a:p>
@@ -1884,8 +1919,6 @@
           <a:p>
             <a:fld id="{1D8BD707-D9CF-40AE-B4C6-C98DA3205C09}" type="datetimeFigureOut">
               <a:rPr lang="en-US" smtClean="0"/>
-              <a:pPr/>
-              <a:t>8/1/2011</a:t>
             </a:fld>
             <a:endParaRPr lang="en-US"/>
           </a:p>
@@ -1927,8 +1960,6 @@
           <a:p>
             <a:fld id="{B6F15528-21DE-4FAA-801E-634DDDAF4B2B}" type="slidenum">
               <a:rPr lang="en-US" smtClean="0"/>
-              <a:pPr/>
-              <a:t>‹#›</a:t>
             </a:fld>
             <a:endParaRPr lang="en-US"/>
           </a:p>
@@ -1976,8 +2007,6 @@
           <a:p>
             <a:fld id="{1D8BD707-D9CF-40AE-B4C6-C98DA3205C09}" type="datetimeFigureOut">
               <a:rPr lang="en-US" smtClean="0"/>
-              <a:pPr/>
-              <a:t>8/1/2011</a:t>
             </a:fld>
             <a:endParaRPr lang="en-US"/>
           </a:p>
@@ -2019,8 +2048,6 @@
           <a:p>
             <a:fld id="{B6F15528-21DE-4FAA-801E-634DDDAF4B2B}" type="slidenum">
               <a:rPr lang="en-US" smtClean="0"/>
-              <a:pPr/>
-              <a:t>‹#›</a:t>
             </a:fld>
             <a:endParaRPr lang="en-US"/>
           </a:p>
@@ -2136,6 +2163,7 @@
               <a:rPr lang="en-US" smtClean="0"/>
               <a:t>Click to edit Master text styles</a:t>
             </a:r>
+            <a:endParaRPr lang="en-US" smtClean="0"/>
           </a:p>
           <a:p>
             <a:pPr lvl="1"/>
@@ -2143,6 +2171,7 @@
               <a:rPr lang="en-US" smtClean="0"/>
               <a:t>Second level</a:t>
             </a:r>
+            <a:endParaRPr lang="en-US" smtClean="0"/>
           </a:p>
           <a:p>
             <a:pPr lvl="2"/>
@@ -2150,6 +2179,7 @@
               <a:rPr lang="en-US" smtClean="0"/>
               <a:t>Third level</a:t>
             </a:r>
+            <a:endParaRPr lang="en-US" smtClean="0"/>
           </a:p>
           <a:p>
             <a:pPr lvl="3"/>
@@ -2157,6 +2187,7 @@
               <a:rPr lang="en-US" smtClean="0"/>
               <a:t>Fourth level</a:t>
             </a:r>
+            <a:endParaRPr lang="en-US" smtClean="0"/>
           </a:p>
           <a:p>
             <a:pPr lvl="4"/>
@@ -2230,6 +2261,7 @@
               <a:rPr lang="en-US" smtClean="0"/>
               <a:t>Click to edit Master text styles</a:t>
             </a:r>
+            <a:endParaRPr lang="en-US" smtClean="0"/>
           </a:p>
         </p:txBody>
       </p:sp>
@@ -2250,8 +2282,6 @@
           <a:p>
             <a:fld id="{1D8BD707-D9CF-40AE-B4C6-C98DA3205C09}" type="datetimeFigureOut">
               <a:rPr lang="en-US" smtClean="0"/>
-              <a:pPr/>
-              <a:t>8/1/2011</a:t>
             </a:fld>
             <a:endParaRPr lang="en-US"/>
           </a:p>
@@ -2293,8 +2323,6 @@
           <a:p>
             <a:fld id="{B6F15528-21DE-4FAA-801E-634DDDAF4B2B}" type="slidenum">
               <a:rPr lang="en-US" smtClean="0"/>
-              <a:pPr/>
-              <a:t>‹#›</a:t>
             </a:fld>
             <a:endParaRPr lang="en-US"/>
           </a:p>
@@ -2480,6 +2508,7 @@
               <a:rPr lang="en-US" smtClean="0"/>
               <a:t>Click to edit Master text styles</a:t>
             </a:r>
+            <a:endParaRPr lang="en-US" smtClean="0"/>
           </a:p>
         </p:txBody>
       </p:sp>
@@ -2500,8 +2529,6 @@
           <a:p>
             <a:fld id="{1D8BD707-D9CF-40AE-B4C6-C98DA3205C09}" type="datetimeFigureOut">
               <a:rPr lang="en-US" smtClean="0"/>
-              <a:pPr/>
-              <a:t>8/1/2011</a:t>
             </a:fld>
             <a:endParaRPr lang="en-US"/>
           </a:p>
@@ -2543,8 +2570,6 @@
           <a:p>
             <a:fld id="{B6F15528-21DE-4FAA-801E-634DDDAF4B2B}" type="slidenum">
               <a:rPr lang="en-US" smtClean="0"/>
-              <a:pPr/>
-              <a:t>‹#›</a:t>
             </a:fld>
             <a:endParaRPr lang="en-US"/>
           </a:p>
@@ -2562,9 +2587,12 @@
 <p:sldMaster xmlns:a="http://schemas.openxmlformats.org/drawingml/2006/main" xmlns:r="http://schemas.openxmlformats.org/officeDocument/2006/relationships" xmlns:p="http://schemas.openxmlformats.org/presentationml/2006/main">
   <p:cSld>
     <p:bg>
-      <p:bgRef idx="1001">
-        <a:schemeClr val="bg1"/>
-      </p:bgRef>
+      <p:bgPr>
+        <a:solidFill>
+          <a:srgbClr val="F4EEEB"/>
+        </a:solidFill>
+        <a:effectLst/>
+      </p:bgPr>
     </p:bg>
     <p:spTree>
       <p:nvGrpSpPr>
@@ -2643,6 +2671,7 @@
               <a:rPr lang="en-US" smtClean="0"/>
               <a:t>Click to edit Master text styles</a:t>
             </a:r>
+            <a:endParaRPr lang="en-US" smtClean="0"/>
           </a:p>
           <a:p>
             <a:pPr lvl="1"/>
@@ -2650,6 +2679,7 @@
               <a:rPr lang="en-US" smtClean="0"/>
               <a:t>Second level</a:t>
             </a:r>
+            <a:endParaRPr lang="en-US" smtClean="0"/>
           </a:p>
           <a:p>
             <a:pPr lvl="2"/>
@@ -2657,6 +2687,7 @@
               <a:rPr lang="en-US" smtClean="0"/>
               <a:t>Third level</a:t>
             </a:r>
+            <a:endParaRPr lang="en-US" smtClean="0"/>
           </a:p>
           <a:p>
             <a:pPr lvl="3"/>
@@ -2664,6 +2695,7 @@
               <a:rPr lang="en-US" smtClean="0"/>
               <a:t>Fourth level</a:t>
             </a:r>
+            <a:endParaRPr lang="en-US" smtClean="0"/>
           </a:p>
           <a:p>
             <a:pPr lvl="4"/>
@@ -2710,8 +2742,6 @@
           <a:p>
             <a:fld id="{1D8BD707-D9CF-40AE-B4C6-C98DA3205C09}" type="datetimeFigureOut">
               <a:rPr lang="en-US" smtClean="0"/>
-              <a:pPr/>
-              <a:t>8/1/2011</a:t>
             </a:fld>
             <a:endParaRPr lang="en-US"/>
           </a:p>
@@ -2789,8 +2819,6 @@
           <a:p>
             <a:fld id="{B6F15528-21DE-4FAA-801E-634DDDAF4B2B}" type="slidenum">
               <a:rPr lang="en-US" smtClean="0"/>
-              <a:pPr/>
-              <a:t>‹#›</a:t>
             </a:fld>
             <a:endParaRPr lang="en-US"/>
           </a:p>
@@ -2834,7 +2862,7 @@
         <a:spcBef>
           <a:spcPct val="20000"/>
         </a:spcBef>
-        <a:buFont typeface="Arial" pitchFamily="34" charset="0"/>
+        <a:buFont typeface="Arial" panose="020B0604020202020204" pitchFamily="34" charset="0"/>
         <a:buChar char="•"/>
         <a:defRPr sz="3200" kern="1200">
           <a:solidFill>
@@ -2849,7 +2877,7 @@
         <a:spcBef>
           <a:spcPct val="20000"/>
         </a:spcBef>
-        <a:buFont typeface="Arial" pitchFamily="34" charset="0"/>
+        <a:buFont typeface="Arial" panose="020B0604020202020204" pitchFamily="34" charset="0"/>
         <a:buChar char="–"/>
         <a:defRPr sz="2800" kern="1200">
           <a:solidFill>
@@ -2864,7 +2892,7 @@
         <a:spcBef>
           <a:spcPct val="20000"/>
         </a:spcBef>
-        <a:buFont typeface="Arial" pitchFamily="34" charset="0"/>
+        <a:buFont typeface="Arial" panose="020B0604020202020204" pitchFamily="34" charset="0"/>
         <a:buChar char="•"/>
         <a:defRPr sz="2400" kern="1200">
           <a:solidFill>
@@ -2879,7 +2907,7 @@
         <a:spcBef>
           <a:spcPct val="20000"/>
         </a:spcBef>
-        <a:buFont typeface="Arial" pitchFamily="34" charset="0"/>
+        <a:buFont typeface="Arial" panose="020B0604020202020204" pitchFamily="34" charset="0"/>
         <a:buChar char="–"/>
         <a:defRPr sz="2000" kern="1200">
           <a:solidFill>
@@ -2894,7 +2922,7 @@
         <a:spcBef>
           <a:spcPct val="20000"/>
         </a:spcBef>
-        <a:buFont typeface="Arial" pitchFamily="34" charset="0"/>
+        <a:buFont typeface="Arial" panose="020B0604020202020204" pitchFamily="34" charset="0"/>
         <a:buChar char="»"/>
         <a:defRPr sz="2000" kern="1200">
           <a:solidFill>
@@ -2909,7 +2937,7 @@
         <a:spcBef>
           <a:spcPct val="20000"/>
         </a:spcBef>
-        <a:buFont typeface="Arial" pitchFamily="34" charset="0"/>
+        <a:buFont typeface="Arial" panose="020B0604020202020204" pitchFamily="34" charset="0"/>
         <a:buChar char="•"/>
         <a:defRPr sz="2000" kern="1200">
           <a:solidFill>
@@ -2924,7 +2952,7 @@
         <a:spcBef>
           <a:spcPct val="20000"/>
         </a:spcBef>
-        <a:buFont typeface="Arial" pitchFamily="34" charset="0"/>
+        <a:buFont typeface="Arial" panose="020B0604020202020204" pitchFamily="34" charset="0"/>
         <a:buChar char="•"/>
         <a:defRPr sz="2000" kern="1200">
           <a:solidFill>
@@ -2939,7 +2967,7 @@
         <a:spcBef>
           <a:spcPct val="20000"/>
         </a:spcBef>
-        <a:buFont typeface="Arial" pitchFamily="34" charset="0"/>
+        <a:buFont typeface="Arial" panose="020B0604020202020204" pitchFamily="34" charset="0"/>
         <a:buChar char="•"/>
         <a:defRPr sz="2000" kern="1200">
           <a:solidFill>
@@ -2954,7 +2982,7 @@
         <a:spcBef>
           <a:spcPct val="20000"/>
         </a:spcBef>
-        <a:buFont typeface="Arial" pitchFamily="34" charset="0"/>
+        <a:buFont typeface="Arial" panose="020B0604020202020204" pitchFamily="34" charset="0"/>
         <a:buChar char="•"/>
         <a:defRPr sz="2000" kern="1200">
           <a:solidFill>
@@ -3066,15 +3094,8 @@
 </file>
 
 <file path=ppt/slides/slide1.xml><?xml version="1.0" encoding="utf-8"?>
-<p:sld xmlns:p="http://schemas.openxmlformats.org/presentationml/2006/main" xmlns:a="http://schemas.openxmlformats.org/drawingml/2006/main" xmlns:r="http://schemas.openxmlformats.org/officeDocument/2006/relationships">
+<p:sld xmlns:a="http://schemas.openxmlformats.org/drawingml/2006/main" xmlns:r="http://schemas.openxmlformats.org/officeDocument/2006/relationships" xmlns:p="http://schemas.openxmlformats.org/presentationml/2006/main">
   <p:cSld>
-    <p:bg>
-      <p:bgPr>
-        <a:solidFill>
-          <a:srgbClr val="F4EEEB"/>
-        </a:solidFill>
-      </p:bgPr>
-    </p:bg>
     <p:spTree>
       <p:nvGrpSpPr>
         <p:cNvPr id="1" name=""/>
@@ -3091,12 +3112,12 @@
       </p:grpSpPr>
       <p:sp>
         <p:nvSpPr>
-          <p:cNvPr name="Freeform 2" id="2"/>
+          <p:cNvPr id="2" name="Freeform 2"/>
           <p:cNvSpPr/>
           <p:nvPr/>
         </p:nvSpPr>
         <p:spPr>
-          <a:xfrm flipH="false" flipV="false" rot="0">
+          <a:xfrm>
             <a:off x="-5072328" y="-1099342"/>
             <a:ext cx="10863067" cy="12485684"/>
           </a:xfrm>
@@ -3105,9 +3126,9 @@
             <a:gdLst/>
             <a:ahLst/>
             <a:cxnLst/>
-            <a:rect r="r" b="b" t="t" l="l"/>
+            <a:rect l="l" t="t" r="r" b="b"/>
             <a:pathLst>
-              <a:path h="12485684" w="10863067">
+              <a:path w="10863067" h="12485684">
                 <a:moveTo>
                   <a:pt x="0" y="0"/>
                 </a:moveTo>
@@ -3128,22 +3149,22 @@
             </a:pathLst>
           </a:custGeom>
           <a:blipFill>
-            <a:blip r:embed="rId2">
+            <a:blip r:embed="rId1">
               <a:extLst>
                 <a:ext uri="{96DAC541-7B7A-43D3-8B79-37D633B846F1}">
-                  <asvg:svgBlip xmlns:asvg="http://schemas.microsoft.com/office/drawing/2016/SVG/main" r:embed="rId3"/>
+                  <asvg:svgBlip xmlns:asvg="http://schemas.microsoft.com/office/drawing/2016/SVG/main" r:embed="rId2"/>
                 </a:ext>
               </a:extLst>
             </a:blip>
             <a:stretch>
-              <a:fillRect l="0" t="0" r="-16821" b="-2278"/>
+              <a:fillRect r="-16821" b="-2278"/>
             </a:stretch>
           </a:blipFill>
         </p:spPr>
       </p:sp>
       <p:grpSp>
         <p:nvGrpSpPr>
-          <p:cNvPr name="Group 3" id="3"/>
+          <p:cNvPr id="3" name="Group 3"/>
           <p:cNvGrpSpPr/>
           <p:nvPr/>
         </p:nvGrpSpPr>
@@ -3157,12 +3178,12 @@
         </p:grpSpPr>
         <p:sp>
           <p:nvSpPr>
-            <p:cNvPr name="Freeform 4" id="4"/>
+            <p:cNvPr id="4" name="Freeform 4"/>
             <p:cNvSpPr/>
             <p:nvPr/>
           </p:nvSpPr>
           <p:spPr>
-            <a:xfrm flipH="false" flipV="false" rot="0">
+            <a:xfrm>
               <a:off x="0" y="0"/>
               <a:ext cx="812800" cy="812800"/>
             </a:xfrm>
@@ -3171,9 +3192,9 @@
               <a:gdLst/>
               <a:ahLst/>
               <a:cxnLst/>
-              <a:rect r="r" b="b" t="t" l="l"/>
+              <a:rect l="l" t="t" r="r" b="b"/>
               <a:pathLst>
-                <a:path h="812800" w="812800">
+                <a:path w="812800" h="812800">
                   <a:moveTo>
                     <a:pt x="406400" y="0"/>
                   </a:moveTo>
@@ -3208,8 +3229,8 @@
         </p:sp>
         <p:sp>
           <p:nvSpPr>
-            <p:cNvPr name="TextBox 5" id="5"/>
-            <p:cNvSpPr txBox="true"/>
+            <p:cNvPr id="5" name="TextBox 5"/>
+            <p:cNvSpPr txBox="1"/>
             <p:nvPr/>
           </p:nvSpPr>
           <p:spPr>
@@ -3222,12 +3243,12 @@
             </a:prstGeom>
           </p:spPr>
           <p:txBody>
-            <a:bodyPr anchor="ctr" rtlCol="false" tIns="50800" lIns="50800" bIns="50800" rIns="50800"/>
+            <a:bodyPr lIns="50800" tIns="50800" rIns="50800" bIns="50800" rtlCol="0" anchor="ctr"/>
             <a:lstStyle/>
             <a:p>
               <a:pPr algn="ctr">
                 <a:lnSpc>
-                  <a:spcPts val="2659"/>
+                  <a:spcPts val="2660"/>
                 </a:lnSpc>
                 <a:spcBef>
                   <a:spcPct val="0"/>
@@ -3239,12 +3260,12 @@
       </p:grpSp>
       <p:sp>
         <p:nvSpPr>
-          <p:cNvPr name="Freeform 6" id="6"/>
+          <p:cNvPr id="6" name="Freeform 6"/>
           <p:cNvSpPr/>
           <p:nvPr/>
         </p:nvSpPr>
         <p:spPr>
-          <a:xfrm flipH="false" flipV="false" rot="0">
+          <a:xfrm>
             <a:off x="2730072" y="1883970"/>
             <a:ext cx="2329715" cy="2245263"/>
           </a:xfrm>
@@ -3253,9 +3274,9 @@
             <a:gdLst/>
             <a:ahLst/>
             <a:cxnLst/>
-            <a:rect r="r" b="b" t="t" l="l"/>
+            <a:rect l="l" t="t" r="r" b="b"/>
             <a:pathLst>
-              <a:path h="2245263" w="2329715">
+              <a:path w="2329715" h="2245263">
                 <a:moveTo>
                   <a:pt x="0" y="0"/>
                 </a:moveTo>
@@ -3276,21 +3297,21 @@
             </a:pathLst>
           </a:custGeom>
           <a:blipFill>
-            <a:blip r:embed="rId4"/>
+            <a:blip r:embed="rId3"/>
             <a:stretch>
-              <a:fillRect l="0" t="0" r="0" b="0"/>
+              <a:fillRect/>
             </a:stretch>
           </a:blipFill>
         </p:spPr>
       </p:sp>
       <p:sp>
         <p:nvSpPr>
-          <p:cNvPr name="Freeform 7" id="7"/>
+          <p:cNvPr id="7" name="Freeform 7"/>
           <p:cNvSpPr/>
           <p:nvPr/>
         </p:nvSpPr>
         <p:spPr>
-          <a:xfrm flipH="false" flipV="false" rot="0">
+          <a:xfrm>
             <a:off x="2858656" y="6428789"/>
             <a:ext cx="2072547" cy="2190274"/>
           </a:xfrm>
@@ -3299,9 +3320,9 @@
             <a:gdLst/>
             <a:ahLst/>
             <a:cxnLst/>
-            <a:rect r="r" b="b" t="t" l="l"/>
+            <a:rect l="l" t="t" r="r" b="b"/>
             <a:pathLst>
-              <a:path h="2190274" w="2072547">
+              <a:path w="2072547" h="2190274">
                 <a:moveTo>
                   <a:pt x="0" y="0"/>
                 </a:moveTo>
@@ -3322,21 +3343,21 @@
             </a:pathLst>
           </a:custGeom>
           <a:blipFill>
-            <a:blip r:embed="rId5"/>
+            <a:blip r:embed="rId4"/>
             <a:stretch>
-              <a:fillRect l="0" t="0" r="0" b="0"/>
+              <a:fillRect/>
             </a:stretch>
           </a:blipFill>
         </p:spPr>
       </p:sp>
       <p:sp>
         <p:nvSpPr>
-          <p:cNvPr name="TextBox 8" id="8"/>
-          <p:cNvSpPr txBox="true"/>
+          <p:cNvPr id="8" name="TextBox 8"/>
+          <p:cNvSpPr txBox="1"/>
           <p:nvPr/>
         </p:nvSpPr>
         <p:spPr>
-          <a:xfrm rot="0">
+          <a:xfrm>
             <a:off x="6266556" y="2342477"/>
             <a:ext cx="12021444" cy="4833518"/>
           </a:xfrm>
@@ -3345,7 +3366,7 @@
           </a:prstGeom>
         </p:spPr>
         <p:txBody>
-          <a:bodyPr anchor="t" rtlCol="false" tIns="0" lIns="0" bIns="0" rIns="0">
+          <a:bodyPr lIns="0" tIns="0" rIns="0" bIns="0" rtlCol="0" anchor="t">
             <a:spAutoFit/>
           </a:bodyPr>
           <a:lstStyle/>
@@ -3356,17 +3377,26 @@
               </a:lnSpc>
             </a:pPr>
             <a:r>
-              <a:rPr lang="en-US" sz="5407">
+              <a:rPr lang="en-US" sz="5405">
                 <a:solidFill>
                   <a:srgbClr val="000000"/>
                 </a:solidFill>
-                <a:latin typeface="Oswald"/>
-                <a:ea typeface="Oswald"/>
-                <a:cs typeface="Oswald"/>
-                <a:sym typeface="Oswald"/>
+                <a:latin typeface="Oswald" panose="00000500000000000000"/>
+                <a:ea typeface="Oswald" panose="00000500000000000000"/>
+                <a:cs typeface="Oswald" panose="00000500000000000000"/>
+                <a:sym typeface="Oswald" panose="00000500000000000000"/>
               </a:rPr>
               <a:t>Project Title: Combinatorial Optimization Solver</a:t>
             </a:r>
+            <a:endParaRPr lang="en-US" sz="5405">
+              <a:solidFill>
+                <a:srgbClr val="000000"/>
+              </a:solidFill>
+              <a:latin typeface="Oswald" panose="00000500000000000000"/>
+              <a:ea typeface="Oswald" panose="00000500000000000000"/>
+              <a:cs typeface="Oswald" panose="00000500000000000000"/>
+              <a:sym typeface="Oswald" panose="00000500000000000000"/>
+            </a:endParaRPr>
           </a:p>
           <a:p>
             <a:pPr algn="l">
@@ -3375,17 +3405,26 @@
               </a:lnSpc>
             </a:pPr>
             <a:r>
-              <a:rPr lang="en-US" sz="4707">
+              <a:rPr lang="en-US" sz="4705">
                 <a:solidFill>
                   <a:srgbClr val="000000"/>
                 </a:solidFill>
-                <a:latin typeface="Oswald"/>
-                <a:ea typeface="Oswald"/>
-                <a:cs typeface="Oswald"/>
-                <a:sym typeface="Oswald"/>
+                <a:latin typeface="Oswald" panose="00000500000000000000"/>
+                <a:ea typeface="Oswald" panose="00000500000000000000"/>
+                <a:cs typeface="Oswald" panose="00000500000000000000"/>
+                <a:sym typeface="Oswald" panose="00000500000000000000"/>
               </a:rPr>
               <a:t>Subtitle: Part 1-Traveling Salesperson Problem (TSP)</a:t>
             </a:r>
+            <a:endParaRPr lang="en-US" sz="4705">
+              <a:solidFill>
+                <a:srgbClr val="000000"/>
+              </a:solidFill>
+              <a:latin typeface="Oswald" panose="00000500000000000000"/>
+              <a:ea typeface="Oswald" panose="00000500000000000000"/>
+              <a:cs typeface="Oswald" panose="00000500000000000000"/>
+              <a:sym typeface="Oswald" panose="00000500000000000000"/>
+            </a:endParaRPr>
           </a:p>
           <a:p>
             <a:pPr algn="l">
@@ -3394,17 +3433,26 @@
               </a:lnSpc>
             </a:pPr>
             <a:r>
-              <a:rPr lang="en-US" sz="4707">
+              <a:rPr lang="en-US" sz="4705">
                 <a:solidFill>
                   <a:srgbClr val="000000"/>
                 </a:solidFill>
-                <a:latin typeface="Oswald"/>
-                <a:ea typeface="Oswald"/>
-                <a:cs typeface="Oswald"/>
-                <a:sym typeface="Oswald"/>
+                <a:latin typeface="Oswald" panose="00000500000000000000"/>
+                <a:ea typeface="Oswald" panose="00000500000000000000"/>
+                <a:cs typeface="Oswald" panose="00000500000000000000"/>
+                <a:sym typeface="Oswald" panose="00000500000000000000"/>
               </a:rPr>
               <a:t>Name:  Prottoy Paul</a:t>
             </a:r>
+            <a:endParaRPr lang="en-US" sz="4705">
+              <a:solidFill>
+                <a:srgbClr val="000000"/>
+              </a:solidFill>
+              <a:latin typeface="Oswald" panose="00000500000000000000"/>
+              <a:ea typeface="Oswald" panose="00000500000000000000"/>
+              <a:cs typeface="Oswald" panose="00000500000000000000"/>
+              <a:sym typeface="Oswald" panose="00000500000000000000"/>
+            </a:endParaRPr>
           </a:p>
           <a:p>
             <a:pPr algn="l">
@@ -3413,17 +3461,26 @@
               </a:lnSpc>
             </a:pPr>
             <a:r>
-              <a:rPr lang="en-US" sz="4707">
+              <a:rPr lang="en-US" sz="4705">
                 <a:solidFill>
                   <a:srgbClr val="000000"/>
                 </a:solidFill>
-                <a:latin typeface="Oswald"/>
-                <a:ea typeface="Oswald"/>
-                <a:cs typeface="Oswald"/>
-                <a:sym typeface="Oswald"/>
+                <a:latin typeface="Oswald" panose="00000500000000000000"/>
+                <a:ea typeface="Oswald" panose="00000500000000000000"/>
+                <a:cs typeface="Oswald" panose="00000500000000000000"/>
+                <a:sym typeface="Oswald" panose="00000500000000000000"/>
               </a:rPr>
               <a:t>Roll: 1613</a:t>
             </a:r>
+            <a:endParaRPr lang="en-US" sz="4705">
+              <a:solidFill>
+                <a:srgbClr val="000000"/>
+              </a:solidFill>
+              <a:latin typeface="Oswald" panose="00000500000000000000"/>
+              <a:ea typeface="Oswald" panose="00000500000000000000"/>
+              <a:cs typeface="Oswald" panose="00000500000000000000"/>
+              <a:sym typeface="Oswald" panose="00000500000000000000"/>
+            </a:endParaRPr>
           </a:p>
           <a:p>
             <a:pPr algn="l">
@@ -3432,17 +3489,26 @@
               </a:lnSpc>
             </a:pPr>
             <a:r>
-              <a:rPr lang="en-US" sz="4707">
+              <a:rPr lang="en-US" sz="4705">
                 <a:solidFill>
                   <a:srgbClr val="000000"/>
                 </a:solidFill>
-                <a:latin typeface="Oswald"/>
-                <a:ea typeface="Oswald"/>
-                <a:cs typeface="Oswald"/>
-                <a:sym typeface="Oswald"/>
+                <a:latin typeface="Oswald" panose="00000500000000000000"/>
+                <a:ea typeface="Oswald" panose="00000500000000000000"/>
+                <a:cs typeface="Oswald" panose="00000500000000000000"/>
+                <a:sym typeface="Oswald" panose="00000500000000000000"/>
               </a:rPr>
               <a:t>Course: SE 2105</a:t>
             </a:r>
+            <a:endParaRPr lang="en-US" sz="4705">
+              <a:solidFill>
+                <a:srgbClr val="000000"/>
+              </a:solidFill>
+              <a:latin typeface="Oswald" panose="00000500000000000000"/>
+              <a:ea typeface="Oswald" panose="00000500000000000000"/>
+              <a:cs typeface="Oswald" panose="00000500000000000000"/>
+              <a:sym typeface="Oswald" panose="00000500000000000000"/>
+            </a:endParaRPr>
           </a:p>
           <a:p>
             <a:pPr algn="l">
@@ -3455,12 +3521,12 @@
       </p:sp>
       <p:sp>
         <p:nvSpPr>
-          <p:cNvPr name="TextBox 9" id="9"/>
-          <p:cNvSpPr txBox="true"/>
+          <p:cNvPr id="9" name="TextBox 9"/>
+          <p:cNvSpPr txBox="1"/>
           <p:nvPr/>
         </p:nvSpPr>
         <p:spPr>
-          <a:xfrm rot="0">
+          <a:xfrm>
             <a:off x="5528454" y="3676147"/>
             <a:ext cx="524570" cy="1467353"/>
           </a:xfrm>
@@ -3469,14 +3535,14 @@
           </a:prstGeom>
         </p:spPr>
         <p:txBody>
-          <a:bodyPr anchor="t" rtlCol="false" tIns="0" lIns="0" bIns="0" rIns="0">
+          <a:bodyPr lIns="0" tIns="0" rIns="0" bIns="0" rtlCol="0" anchor="t">
             <a:spAutoFit/>
           </a:bodyPr>
           <a:lstStyle/>
           <a:p>
             <a:pPr algn="ctr">
               <a:lnSpc>
-                <a:spcPts val="12047"/>
+                <a:spcPts val="12045"/>
               </a:lnSpc>
             </a:pPr>
             <a:r>
@@ -3484,24 +3550,33 @@
                 <a:solidFill>
                   <a:srgbClr val="000000"/>
                 </a:solidFill>
-                <a:latin typeface="TT Hoves"/>
-                <a:ea typeface="TT Hoves"/>
-                <a:cs typeface="TT Hoves"/>
-                <a:sym typeface="TT Hoves"/>
+                <a:latin typeface="TT Hoves" panose="02000003020000060003"/>
+                <a:ea typeface="TT Hoves" panose="02000003020000060003"/>
+                <a:cs typeface="TT Hoves" panose="02000003020000060003"/>
+                <a:sym typeface="TT Hoves" panose="02000003020000060003"/>
               </a:rPr>
               <a:t>x</a:t>
             </a:r>
-          </a:p>
-        </p:txBody>
-      </p:sp>
-      <p:sp>
-        <p:nvSpPr>
-          <p:cNvPr name="TextBox 10" id="10"/>
-          <p:cNvSpPr txBox="true"/>
+            <a:endParaRPr lang="en-US" sz="8605">
+              <a:solidFill>
+                <a:srgbClr val="000000"/>
+              </a:solidFill>
+              <a:latin typeface="TT Hoves" panose="02000003020000060003"/>
+              <a:ea typeface="TT Hoves" panose="02000003020000060003"/>
+              <a:cs typeface="TT Hoves" panose="02000003020000060003"/>
+              <a:sym typeface="TT Hoves" panose="02000003020000060003"/>
+            </a:endParaRPr>
+          </a:p>
+        </p:txBody>
+      </p:sp>
+      <p:sp>
+        <p:nvSpPr>
+          <p:cNvPr id="10" name="TextBox 10"/>
+          <p:cNvSpPr txBox="1"/>
           <p:nvPr/>
         </p:nvSpPr>
         <p:spPr>
-          <a:xfrm rot="0">
+          <a:xfrm>
             <a:off x="1996484" y="-161925"/>
             <a:ext cx="541040" cy="1467353"/>
           </a:xfrm>
@@ -3510,14 +3585,14 @@
           </a:prstGeom>
         </p:spPr>
         <p:txBody>
-          <a:bodyPr anchor="t" rtlCol="false" tIns="0" lIns="0" bIns="0" rIns="0">
+          <a:bodyPr lIns="0" tIns="0" rIns="0" bIns="0" rtlCol="0" anchor="t">
             <a:spAutoFit/>
           </a:bodyPr>
           <a:lstStyle/>
           <a:p>
             <a:pPr algn="ctr">
               <a:lnSpc>
-                <a:spcPts val="12047"/>
+                <a:spcPts val="12045"/>
               </a:lnSpc>
             </a:pPr>
             <a:r>
@@ -3525,25 +3600,84 @@
                 <a:solidFill>
                   <a:srgbClr val="000000"/>
                 </a:solidFill>
-                <a:latin typeface="TT Hoves"/>
-                <a:ea typeface="TT Hoves"/>
-                <a:cs typeface="TT Hoves"/>
-                <a:sym typeface="TT Hoves"/>
+                <a:latin typeface="TT Hoves" panose="02000003020000060003"/>
+                <a:ea typeface="TT Hoves" panose="02000003020000060003"/>
+                <a:cs typeface="TT Hoves" panose="02000003020000060003"/>
+                <a:sym typeface="TT Hoves" panose="02000003020000060003"/>
               </a:rPr>
               <a:t>y</a:t>
             </a:r>
-          </a:p>
-        </p:txBody>
-      </p:sp>
-      <p:sp>
-        <p:nvSpPr>
-          <p:cNvPr name="TextBox 11" id="11"/>
-          <p:cNvSpPr txBox="true"/>
+            <a:endParaRPr lang="en-US" sz="8605">
+              <a:solidFill>
+                <a:srgbClr val="000000"/>
+              </a:solidFill>
+              <a:latin typeface="TT Hoves" panose="02000003020000060003"/>
+              <a:ea typeface="TT Hoves" panose="02000003020000060003"/>
+              <a:cs typeface="TT Hoves" panose="02000003020000060003"/>
+              <a:sym typeface="TT Hoves" panose="02000003020000060003"/>
+            </a:endParaRPr>
+          </a:p>
+        </p:txBody>
+      </p:sp>
+      <p:sp>
+        <p:nvSpPr>
+          <p:cNvPr id="11" name="TextBox 11"/>
+          <p:cNvSpPr txBox="1"/>
           <p:nvPr/>
         </p:nvSpPr>
         <p:spPr>
-          <a:xfrm rot="0">
-            <a:off x="6266556" y="7419151"/>
+          <a:xfrm>
+            <a:off x="6266556" y="6703060"/>
+            <a:ext cx="12021444" cy="820866"/>
+          </a:xfrm>
+          <a:prstGeom prst="rect">
+            <a:avLst/>
+          </a:prstGeom>
+        </p:spPr>
+        <p:txBody>
+          <a:bodyPr lIns="0" tIns="0" rIns="0" bIns="0" rtlCol="0" anchor="t">
+            <a:spAutoFit/>
+          </a:bodyPr>
+          <a:lstStyle/>
+          <a:p>
+            <a:pPr algn="l">
+              <a:lnSpc>
+                <a:spcPts val="6730"/>
+              </a:lnSpc>
+            </a:pPr>
+            <a:r>
+              <a:rPr lang="en-US" sz="4805">
+                <a:solidFill>
+                  <a:srgbClr val="000000"/>
+                </a:solidFill>
+                <a:latin typeface="Oswald" panose="00000500000000000000"/>
+                <a:ea typeface="Oswald" panose="00000500000000000000"/>
+                <a:cs typeface="Oswald" panose="00000500000000000000"/>
+                <a:sym typeface="Oswald" panose="00000500000000000000"/>
+              </a:rPr>
+              <a:t>Supervisor: Shah Mostafa Khaled , PhD</a:t>
+            </a:r>
+            <a:endParaRPr lang="en-US" sz="4805">
+              <a:solidFill>
+                <a:srgbClr val="000000"/>
+              </a:solidFill>
+              <a:latin typeface="Oswald" panose="00000500000000000000"/>
+              <a:ea typeface="Oswald" panose="00000500000000000000"/>
+              <a:cs typeface="Oswald" panose="00000500000000000000"/>
+              <a:sym typeface="Oswald" panose="00000500000000000000"/>
+            </a:endParaRPr>
+          </a:p>
+        </p:txBody>
+      </p:sp>
+      <p:sp>
+        <p:nvSpPr>
+          <p:cNvPr id="12" name="TextBox 12"/>
+          <p:cNvSpPr txBox="1"/>
+          <p:nvPr/>
+        </p:nvSpPr>
+        <p:spPr>
+          <a:xfrm>
+            <a:off x="6458713" y="9153525"/>
             <a:ext cx="12021444" cy="919927"/>
           </a:xfrm>
           <a:prstGeom prst="rect">
@@ -3551,7 +3685,7 @@
           </a:prstGeom>
         </p:spPr>
         <p:txBody>
-          <a:bodyPr anchor="t" rtlCol="false" tIns="0" lIns="0" bIns="0" rIns="0">
+          <a:bodyPr lIns="0" tIns="0" rIns="0" bIns="0" rtlCol="0" anchor="t">
             <a:spAutoFit/>
           </a:bodyPr>
           <a:lstStyle/>
@@ -3562,17 +3696,26 @@
               </a:lnSpc>
             </a:pPr>
             <a:r>
-              <a:rPr lang="en-US" sz="5407">
+              <a:rPr lang="en-US" sz="5405">
                 <a:solidFill>
                   <a:srgbClr val="000000"/>
                 </a:solidFill>
-                <a:latin typeface="Oswald"/>
-                <a:ea typeface="Oswald"/>
-                <a:cs typeface="Oswald"/>
-                <a:sym typeface="Oswald"/>
-              </a:rPr>
-              <a:t>Supervisor: Shah Mostafa Khaled , PhD</a:t>
-            </a:r>
+                <a:latin typeface="Oswald" panose="00000500000000000000"/>
+                <a:ea typeface="Oswald" panose="00000500000000000000"/>
+                <a:cs typeface="Oswald" panose="00000500000000000000"/>
+                <a:sym typeface="Oswald" panose="00000500000000000000"/>
+              </a:rPr>
+              <a:t>Institute of Information Technology,DU</a:t>
+            </a:r>
+            <a:endParaRPr lang="en-US" sz="5405">
+              <a:solidFill>
+                <a:srgbClr val="000000"/>
+              </a:solidFill>
+              <a:latin typeface="Oswald" panose="00000500000000000000"/>
+              <a:ea typeface="Oswald" panose="00000500000000000000"/>
+              <a:cs typeface="Oswald" panose="00000500000000000000"/>
+              <a:sym typeface="Oswald" panose="00000500000000000000"/>
+            </a:endParaRPr>
           </a:p>
         </p:txBody>
       </p:sp>
@@ -3585,15 +3728,8 @@
 </file>
 
 <file path=ppt/slides/slide10.xml><?xml version="1.0" encoding="utf-8"?>
-<p:sld xmlns:p="http://schemas.openxmlformats.org/presentationml/2006/main" xmlns:a="http://schemas.openxmlformats.org/drawingml/2006/main">
+<p:sld xmlns:a="http://schemas.openxmlformats.org/drawingml/2006/main" xmlns:r="http://schemas.openxmlformats.org/officeDocument/2006/relationships" xmlns:p="http://schemas.openxmlformats.org/presentationml/2006/main">
   <p:cSld>
-    <p:bg>
-      <p:bgPr>
-        <a:solidFill>
-          <a:srgbClr val="F4EEEB"/>
-        </a:solidFill>
-      </p:bgPr>
-    </p:bg>
     <p:spTree>
       <p:nvGrpSpPr>
         <p:cNvPr id="1" name=""/>
@@ -3610,180 +3746,173 @@
       </p:grpSpPr>
       <p:sp>
         <p:nvSpPr>
-          <p:cNvPr name="TextBox 2" id="2"/>
-          <p:cNvSpPr txBox="true"/>
+          <p:cNvPr id="2" name="TextBox 2"/>
+          <p:cNvSpPr txBox="1"/>
           <p:nvPr/>
         </p:nvSpPr>
         <p:spPr>
-          <a:xfrm rot="0">
+          <a:xfrm>
             <a:off x="1240433" y="2202597"/>
-            <a:ext cx="16018867" cy="5794375"/>
+            <a:ext cx="16018867" cy="7737475"/>
           </a:xfrm>
           <a:prstGeom prst="rect">
             <a:avLst/>
           </a:prstGeom>
         </p:spPr>
         <p:txBody>
-          <a:bodyPr anchor="t" rtlCol="false" tIns="0" lIns="0" bIns="0" rIns="0">
+          <a:bodyPr lIns="0" tIns="0" rIns="0" bIns="0" rtlCol="0" anchor="t">
             <a:spAutoFit/>
           </a:bodyPr>
           <a:lstStyle/>
           <a:p>
+            <a:pPr marL="1187450" lvl="1" indent="-593725" algn="l">
+              <a:lnSpc>
+                <a:spcPts val="7700"/>
+              </a:lnSpc>
+              <a:buFont typeface="Arial" panose="020B0604020202020204"/>
+              <a:buChar char="•"/>
+            </a:pPr>
+            <a:r>
+              <a:rPr lang="en-US" sz="5500">
+                <a:solidFill>
+                  <a:srgbClr val="171C24"/>
+                </a:solidFill>
+                <a:latin typeface="TT Hoves" panose="02000003020000060003"/>
+                <a:ea typeface="TT Hoves" panose="02000003020000060003"/>
+                <a:cs typeface="TT Hoves" panose="02000003020000060003"/>
+                <a:sym typeface="TT Hoves" panose="02000003020000060003"/>
+              </a:rPr>
+              <a:t>Status: Upcoming (Phase 2).</a:t>
+            </a:r>
+            <a:endParaRPr lang="en-US" sz="5500">
+              <a:solidFill>
+                <a:srgbClr val="171C24"/>
+              </a:solidFill>
+              <a:latin typeface="TT Hoves" panose="02000003020000060003"/>
+              <a:ea typeface="TT Hoves" panose="02000003020000060003"/>
+              <a:cs typeface="TT Hoves" panose="02000003020000060003"/>
+              <a:sym typeface="TT Hoves" panose="02000003020000060003"/>
+            </a:endParaRPr>
+          </a:p>
+          <a:p>
+            <a:pPr marL="1187450" lvl="1" indent="-593725" algn="l">
+              <a:lnSpc>
+                <a:spcPts val="7700"/>
+              </a:lnSpc>
+              <a:buFont typeface="Arial" panose="020B0604020202020204"/>
+              <a:buChar char="•"/>
+            </a:pPr>
+            <a:r>
+              <a:rPr lang="en-US" sz="5500">
+                <a:solidFill>
+                  <a:srgbClr val="171C24"/>
+                </a:solidFill>
+                <a:latin typeface="TT Hoves" panose="02000003020000060003"/>
+                <a:ea typeface="TT Hoves" panose="02000003020000060003"/>
+                <a:cs typeface="TT Hoves" panose="02000003020000060003"/>
+                <a:sym typeface="TT Hoves" panose="02000003020000060003"/>
+              </a:rPr>
+              <a:t>Problem: 0/1 Knapsack.</a:t>
+            </a:r>
+            <a:endParaRPr lang="en-US" sz="5500">
+              <a:solidFill>
+                <a:srgbClr val="171C24"/>
+              </a:solidFill>
+              <a:latin typeface="TT Hoves" panose="02000003020000060003"/>
+              <a:ea typeface="TT Hoves" panose="02000003020000060003"/>
+              <a:cs typeface="TT Hoves" panose="02000003020000060003"/>
+              <a:sym typeface="TT Hoves" panose="02000003020000060003"/>
+            </a:endParaRPr>
+          </a:p>
+          <a:p>
+            <a:pPr marL="1187450" lvl="1" indent="-593725" algn="l">
+              <a:lnSpc>
+                <a:spcPts val="7700"/>
+              </a:lnSpc>
+              <a:buFont typeface="Arial" panose="020B0604020202020204"/>
+              <a:buChar char="•"/>
+            </a:pPr>
+            <a:r>
+              <a:rPr lang="en-US" sz="5500">
+                <a:solidFill>
+                  <a:srgbClr val="171C24"/>
+                </a:solidFill>
+                <a:latin typeface="TT Hoves" panose="02000003020000060003"/>
+                <a:ea typeface="TT Hoves" panose="02000003020000060003"/>
+                <a:cs typeface="TT Hoves" panose="02000003020000060003"/>
+                <a:sym typeface="TT Hoves" panose="02000003020000060003"/>
+              </a:rPr>
+              <a:t>Goal: Select items to maximize profit without breaking the bag.</a:t>
+            </a:r>
+            <a:endParaRPr lang="en-US" sz="5500">
+              <a:solidFill>
+                <a:srgbClr val="171C24"/>
+              </a:solidFill>
+              <a:latin typeface="TT Hoves" panose="02000003020000060003"/>
+              <a:ea typeface="TT Hoves" panose="02000003020000060003"/>
+              <a:cs typeface="TT Hoves" panose="02000003020000060003"/>
+              <a:sym typeface="TT Hoves" panose="02000003020000060003"/>
+            </a:endParaRPr>
+          </a:p>
+          <a:p>
+            <a:pPr marL="1187450" lvl="1" indent="-593725" algn="l">
+              <a:lnSpc>
+                <a:spcPts val="7700"/>
+              </a:lnSpc>
+              <a:buFont typeface="Arial" panose="020B0604020202020204"/>
+              <a:buChar char="•"/>
+            </a:pPr>
+            <a:r>
+              <a:rPr lang="en-US" sz="5500">
+                <a:solidFill>
+                  <a:srgbClr val="171C24"/>
+                </a:solidFill>
+                <a:latin typeface="TT Hoves" panose="02000003020000060003"/>
+                <a:ea typeface="TT Hoves" panose="02000003020000060003"/>
+                <a:cs typeface="TT Hoves" panose="02000003020000060003"/>
+                <a:sym typeface="TT Hoves" panose="02000003020000060003"/>
+              </a:rPr>
+              <a:t>Plan: Implement using Branch &amp; Bound and Dynamic</a:t>
+            </a:r>
+            <a:r>
+              <a:rPr lang="en-US" sz="5500">
+                <a:solidFill>
+                  <a:srgbClr val="171C24"/>
+                </a:solidFill>
+                <a:latin typeface="TT Hoves" panose="02000003020000060003"/>
+                <a:ea typeface="TT Hoves" panose="02000003020000060003"/>
+                <a:cs typeface="TT Hoves" panose="02000003020000060003"/>
+                <a:sym typeface="TT Hoves" panose="02000003020000060003"/>
+              </a:rPr>
+              <a:t> Programming (DP) in the same C backend.</a:t>
+            </a:r>
+            <a:endParaRPr lang="en-US" sz="5500">
+              <a:solidFill>
+                <a:srgbClr val="171C24"/>
+              </a:solidFill>
+              <a:latin typeface="TT Hoves" panose="02000003020000060003"/>
+              <a:ea typeface="TT Hoves" panose="02000003020000060003"/>
+              <a:cs typeface="TT Hoves" panose="02000003020000060003"/>
+              <a:sym typeface="TT Hoves" panose="02000003020000060003"/>
+            </a:endParaRPr>
+          </a:p>
+          <a:p>
             <a:pPr algn="l">
               <a:lnSpc>
-                <a:spcPts val="7699"/>
+                <a:spcPts val="7700"/>
               </a:lnSpc>
             </a:pPr>
-            <a:r>
-              <a:rPr lang="en-US" sz="5499">
-                <a:solidFill>
-                  <a:srgbClr val="171C24"/>
-                </a:solidFill>
-                <a:latin typeface="TT Hoves"/>
-                <a:ea typeface="TT Hoves"/>
-                <a:cs typeface="TT Hoves"/>
-                <a:sym typeface="TT Hoves"/>
-              </a:rPr>
-              <a:t>Summary:</a:t>
-            </a:r>
-          </a:p>
-          <a:p>
-            <a:pPr algn="l" marL="1187449" indent="-593725" lvl="1">
-              <a:lnSpc>
-                <a:spcPts val="7699"/>
-              </a:lnSpc>
-              <a:buFont typeface="Arial"/>
-              <a:buChar char="•"/>
-            </a:pPr>
-            <a:r>
-              <a:rPr lang="en-US" sz="5499">
-                <a:solidFill>
-                  <a:srgbClr val="171C24"/>
-                </a:solidFill>
-                <a:latin typeface="TT Hoves"/>
-                <a:ea typeface="TT Hoves"/>
-                <a:cs typeface="TT Hoves"/>
-                <a:sym typeface="TT Hoves"/>
-              </a:rPr>
-              <a:t>TS</a:t>
-            </a:r>
-            <a:r>
-              <a:rPr lang="en-US" sz="5499">
-                <a:solidFill>
-                  <a:srgbClr val="171C24"/>
-                </a:solidFill>
-                <a:latin typeface="TT Hoves"/>
-                <a:ea typeface="TT Hoves"/>
-                <a:cs typeface="TT Hoves"/>
-                <a:sym typeface="TT Hoves"/>
-              </a:rPr>
-              <a:t>P Solved successfully.</a:t>
-            </a:r>
-          </a:p>
-          <a:p>
-            <a:pPr algn="l" marL="1187449" indent="-593725" lvl="1">
-              <a:lnSpc>
-                <a:spcPts val="7699"/>
-              </a:lnSpc>
-              <a:buFont typeface="Arial"/>
-              <a:buChar char="•"/>
-            </a:pPr>
-            <a:r>
-              <a:rPr lang="en-US" sz="5499">
-                <a:solidFill>
-                  <a:srgbClr val="171C24"/>
-                </a:solidFill>
-                <a:latin typeface="TT Hoves"/>
-                <a:ea typeface="TT Hoves"/>
-                <a:cs typeface="TT Hoves"/>
-                <a:sym typeface="TT Hoves"/>
-              </a:rPr>
-              <a:t>Comparison of Exact vs.</a:t>
-            </a:r>
-            <a:r>
-              <a:rPr lang="en-US" sz="5499">
-                <a:solidFill>
-                  <a:srgbClr val="171C24"/>
-                </a:solidFill>
-                <a:latin typeface="TT Hoves"/>
-                <a:ea typeface="TT Hoves"/>
-                <a:cs typeface="TT Hoves"/>
-                <a:sym typeface="TT Hoves"/>
-              </a:rPr>
-              <a:t> Heuristic done.</a:t>
-            </a:r>
-          </a:p>
-          <a:p>
-            <a:pPr algn="l" marL="1187449" indent="-593725" lvl="1">
-              <a:lnSpc>
-                <a:spcPts val="7699"/>
-              </a:lnSpc>
-              <a:buFont typeface="Arial"/>
-              <a:buChar char="•"/>
-            </a:pPr>
-            <a:r>
-              <a:rPr lang="en-US" sz="5499">
-                <a:solidFill>
-                  <a:srgbClr val="171C24"/>
-                </a:solidFill>
-                <a:latin typeface="TT Hoves"/>
-                <a:ea typeface="TT Hoves"/>
-                <a:cs typeface="TT Hoves"/>
-                <a:sym typeface="TT Hoves"/>
-              </a:rPr>
-              <a:t>Ready</a:t>
-            </a:r>
-            <a:r>
-              <a:rPr lang="en-US" sz="5499">
-                <a:solidFill>
-                  <a:srgbClr val="171C24"/>
-                </a:solidFill>
-                <a:latin typeface="TT Hoves"/>
-                <a:ea typeface="TT Hoves"/>
-                <a:cs typeface="TT Hoves"/>
-                <a:sym typeface="TT Hoves"/>
-              </a:rPr>
-              <a:t> for Phase 2 (Knapsack).</a:t>
-            </a:r>
-          </a:p>
-          <a:p>
-            <a:pPr algn="l" marL="1187449" indent="-593725" lvl="1">
-              <a:lnSpc>
-                <a:spcPts val="7699"/>
-              </a:lnSpc>
-              <a:buFont typeface="Arial"/>
-              <a:buChar char="•"/>
-            </a:pPr>
-            <a:r>
-              <a:rPr lang="en-US" sz="5499">
-                <a:solidFill>
-                  <a:srgbClr val="171C24"/>
-                </a:solidFill>
-                <a:latin typeface="TT Hoves"/>
-                <a:ea typeface="TT Hoves"/>
-                <a:cs typeface="TT Hoves"/>
-                <a:sym typeface="TT Hoves"/>
-              </a:rPr>
-              <a:t>Thank You!</a:t>
-            </a:r>
-          </a:p>
-          <a:p>
-            <a:pPr algn="l">
-              <a:lnSpc>
-                <a:spcPts val="7699"/>
-              </a:lnSpc>
-            </a:pPr>
-          </a:p>
-        </p:txBody>
-      </p:sp>
-      <p:sp>
-        <p:nvSpPr>
-          <p:cNvPr name="TextBox 3" id="3"/>
-          <p:cNvSpPr txBox="true"/>
+          </a:p>
+        </p:txBody>
+      </p:sp>
+      <p:sp>
+        <p:nvSpPr>
+          <p:cNvPr id="3" name="TextBox 3"/>
+          <p:cNvSpPr txBox="1"/>
           <p:nvPr/>
         </p:nvSpPr>
         <p:spPr>
-          <a:xfrm rot="0">
+          <a:xfrm>
             <a:off x="-434667" y="314327"/>
             <a:ext cx="19157333" cy="1285871"/>
           </a:xfrm>
@@ -3792,7 +3921,7 @@
           </a:prstGeom>
         </p:spPr>
         <p:txBody>
-          <a:bodyPr anchor="t" rtlCol="false" tIns="0" lIns="0" bIns="0" rIns="0">
+          <a:bodyPr lIns="0" tIns="0" rIns="0" bIns="0" rtlCol="0" anchor="t">
             <a:spAutoFit/>
           </a:bodyPr>
           <a:lstStyle/>
@@ -3806,17 +3935,38 @@
               </a:spcBef>
             </a:pPr>
             <a:r>
-              <a:rPr lang="en-US" b="true" sz="7500">
+              <a:rPr lang="en-US" sz="7500" b="1">
                 <a:solidFill>
                   <a:srgbClr val="171C24"/>
                 </a:solidFill>
-                <a:latin typeface="TT Hoves Bold"/>
-                <a:ea typeface="TT Hoves Bold"/>
-                <a:cs typeface="TT Hoves Bold"/>
-                <a:sym typeface="TT Hoves Bold"/>
-              </a:rPr>
-              <a:t>Conclusion</a:t>
-            </a:r>
+                <a:latin typeface="TT Hoves Bold" panose="02000003020000060003"/>
+                <a:ea typeface="TT Hoves Bold" panose="02000003020000060003"/>
+                <a:cs typeface="TT Hoves Bold" panose="02000003020000060003"/>
+                <a:sym typeface="TT Hoves Bold" panose="02000003020000060003"/>
+              </a:rPr>
+              <a:t>Future Work</a:t>
+            </a:r>
+            <a:r>
+              <a:rPr lang="en-US" sz="7500" b="1">
+                <a:solidFill>
+                  <a:srgbClr val="171C24"/>
+                </a:solidFill>
+                <a:latin typeface="TT Hoves Bold" panose="02000003020000060003"/>
+                <a:ea typeface="TT Hoves Bold" panose="02000003020000060003"/>
+                <a:cs typeface="TT Hoves Bold" panose="02000003020000060003"/>
+                <a:sym typeface="TT Hoves Bold" panose="02000003020000060003"/>
+              </a:rPr>
+              <a:t> (The Knapsack Problem)</a:t>
+            </a:r>
+            <a:endParaRPr lang="en-US" sz="7500" b="1">
+              <a:solidFill>
+                <a:srgbClr val="171C24"/>
+              </a:solidFill>
+              <a:latin typeface="TT Hoves Bold" panose="02000003020000060003"/>
+              <a:ea typeface="TT Hoves Bold" panose="02000003020000060003"/>
+              <a:cs typeface="TT Hoves Bold" panose="02000003020000060003"/>
+              <a:sym typeface="TT Hoves Bold" panose="02000003020000060003"/>
+            </a:endParaRPr>
           </a:p>
         </p:txBody>
       </p:sp>
@@ -3828,16 +3978,9 @@
 </p:sld>
 </file>
 
-<file path=ppt/slides/slide2.xml><?xml version="1.0" encoding="utf-8"?>
-<p:sld xmlns:p="http://schemas.openxmlformats.org/presentationml/2006/main" xmlns:a="http://schemas.openxmlformats.org/drawingml/2006/main" xmlns:r="http://schemas.openxmlformats.org/officeDocument/2006/relationships">
+<file path=ppt/slides/slide11.xml><?xml version="1.0" encoding="utf-8"?>
+<p:sld xmlns:a="http://schemas.openxmlformats.org/drawingml/2006/main" xmlns:r="http://schemas.openxmlformats.org/officeDocument/2006/relationships" xmlns:p="http://schemas.openxmlformats.org/presentationml/2006/main">
   <p:cSld>
-    <p:bg>
-      <p:bgPr>
-        <a:solidFill>
-          <a:srgbClr val="F4EEEB"/>
-        </a:solidFill>
-      </p:bgPr>
-    </p:bg>
     <p:spTree>
       <p:nvGrpSpPr>
         <p:cNvPr id="1" name=""/>
@@ -3854,12 +3997,303 @@
       </p:grpSpPr>
       <p:sp>
         <p:nvSpPr>
-          <p:cNvPr name="Freeform 2" id="2"/>
+          <p:cNvPr id="2" name="TextBox 2"/>
+          <p:cNvSpPr txBox="1"/>
+          <p:nvPr/>
+        </p:nvSpPr>
+        <p:spPr>
+          <a:xfrm>
+            <a:off x="1240433" y="2202597"/>
+            <a:ext cx="16018867" cy="5794375"/>
+          </a:xfrm>
+          <a:prstGeom prst="rect">
+            <a:avLst/>
+          </a:prstGeom>
+        </p:spPr>
+        <p:txBody>
+          <a:bodyPr lIns="0" tIns="0" rIns="0" bIns="0" rtlCol="0" anchor="t">
+            <a:spAutoFit/>
+          </a:bodyPr>
+          <a:lstStyle/>
+          <a:p>
+            <a:pPr algn="l">
+              <a:lnSpc>
+                <a:spcPts val="7700"/>
+              </a:lnSpc>
+            </a:pPr>
+            <a:r>
+              <a:rPr lang="en-US" sz="5500">
+                <a:solidFill>
+                  <a:srgbClr val="171C24"/>
+                </a:solidFill>
+                <a:latin typeface="TT Hoves" panose="02000003020000060003"/>
+                <a:ea typeface="TT Hoves" panose="02000003020000060003"/>
+                <a:cs typeface="TT Hoves" panose="02000003020000060003"/>
+                <a:sym typeface="TT Hoves" panose="02000003020000060003"/>
+              </a:rPr>
+              <a:t>Summary:</a:t>
+            </a:r>
+            <a:endParaRPr lang="en-US" sz="5500">
+              <a:solidFill>
+                <a:srgbClr val="171C24"/>
+              </a:solidFill>
+              <a:latin typeface="TT Hoves" panose="02000003020000060003"/>
+              <a:ea typeface="TT Hoves" panose="02000003020000060003"/>
+              <a:cs typeface="TT Hoves" panose="02000003020000060003"/>
+              <a:sym typeface="TT Hoves" panose="02000003020000060003"/>
+            </a:endParaRPr>
+          </a:p>
+          <a:p>
+            <a:pPr marL="1187450" lvl="1" indent="-593725" algn="l">
+              <a:lnSpc>
+                <a:spcPts val="7700"/>
+              </a:lnSpc>
+              <a:buFont typeface="Arial" panose="020B0604020202020204"/>
+              <a:buChar char="•"/>
+            </a:pPr>
+            <a:r>
+              <a:rPr lang="en-US" sz="5500">
+                <a:solidFill>
+                  <a:srgbClr val="171C24"/>
+                </a:solidFill>
+                <a:latin typeface="TT Hoves" panose="02000003020000060003"/>
+                <a:ea typeface="TT Hoves" panose="02000003020000060003"/>
+                <a:cs typeface="TT Hoves" panose="02000003020000060003"/>
+                <a:sym typeface="TT Hoves" panose="02000003020000060003"/>
+              </a:rPr>
+              <a:t>TS</a:t>
+            </a:r>
+            <a:r>
+              <a:rPr lang="en-US" sz="5500">
+                <a:solidFill>
+                  <a:srgbClr val="171C24"/>
+                </a:solidFill>
+                <a:latin typeface="TT Hoves" panose="02000003020000060003"/>
+                <a:ea typeface="TT Hoves" panose="02000003020000060003"/>
+                <a:cs typeface="TT Hoves" panose="02000003020000060003"/>
+                <a:sym typeface="TT Hoves" panose="02000003020000060003"/>
+              </a:rPr>
+              <a:t>P Solved successfully.</a:t>
+            </a:r>
+            <a:endParaRPr lang="en-US" sz="5500">
+              <a:solidFill>
+                <a:srgbClr val="171C24"/>
+              </a:solidFill>
+              <a:latin typeface="TT Hoves" panose="02000003020000060003"/>
+              <a:ea typeface="TT Hoves" panose="02000003020000060003"/>
+              <a:cs typeface="TT Hoves" panose="02000003020000060003"/>
+              <a:sym typeface="TT Hoves" panose="02000003020000060003"/>
+            </a:endParaRPr>
+          </a:p>
+          <a:p>
+            <a:pPr marL="1187450" lvl="1" indent="-593725" algn="l">
+              <a:lnSpc>
+                <a:spcPts val="7700"/>
+              </a:lnSpc>
+              <a:buFont typeface="Arial" panose="020B0604020202020204"/>
+              <a:buChar char="•"/>
+            </a:pPr>
+            <a:r>
+              <a:rPr lang="en-US" sz="5500">
+                <a:solidFill>
+                  <a:srgbClr val="171C24"/>
+                </a:solidFill>
+                <a:latin typeface="TT Hoves" panose="02000003020000060003"/>
+                <a:ea typeface="TT Hoves" panose="02000003020000060003"/>
+                <a:cs typeface="TT Hoves" panose="02000003020000060003"/>
+                <a:sym typeface="TT Hoves" panose="02000003020000060003"/>
+              </a:rPr>
+              <a:t>Comparison of Exact vs.</a:t>
+            </a:r>
+            <a:r>
+              <a:rPr lang="en-US" sz="5500">
+                <a:solidFill>
+                  <a:srgbClr val="171C24"/>
+                </a:solidFill>
+                <a:latin typeface="TT Hoves" panose="02000003020000060003"/>
+                <a:ea typeface="TT Hoves" panose="02000003020000060003"/>
+                <a:cs typeface="TT Hoves" panose="02000003020000060003"/>
+                <a:sym typeface="TT Hoves" panose="02000003020000060003"/>
+              </a:rPr>
+              <a:t> Heuristic done.</a:t>
+            </a:r>
+            <a:endParaRPr lang="en-US" sz="5500">
+              <a:solidFill>
+                <a:srgbClr val="171C24"/>
+              </a:solidFill>
+              <a:latin typeface="TT Hoves" panose="02000003020000060003"/>
+              <a:ea typeface="TT Hoves" panose="02000003020000060003"/>
+              <a:cs typeface="TT Hoves" panose="02000003020000060003"/>
+              <a:sym typeface="TT Hoves" panose="02000003020000060003"/>
+            </a:endParaRPr>
+          </a:p>
+          <a:p>
+            <a:pPr marL="1187450" lvl="1" indent="-593725" algn="l">
+              <a:lnSpc>
+                <a:spcPts val="7700"/>
+              </a:lnSpc>
+              <a:buFont typeface="Arial" panose="020B0604020202020204"/>
+              <a:buChar char="•"/>
+            </a:pPr>
+            <a:r>
+              <a:rPr lang="en-US" sz="5500">
+                <a:solidFill>
+                  <a:srgbClr val="171C24"/>
+                </a:solidFill>
+                <a:latin typeface="TT Hoves" panose="02000003020000060003"/>
+                <a:ea typeface="TT Hoves" panose="02000003020000060003"/>
+                <a:cs typeface="TT Hoves" panose="02000003020000060003"/>
+                <a:sym typeface="TT Hoves" panose="02000003020000060003"/>
+              </a:rPr>
+              <a:t>Ready</a:t>
+            </a:r>
+            <a:r>
+              <a:rPr lang="en-US" sz="5500">
+                <a:solidFill>
+                  <a:srgbClr val="171C24"/>
+                </a:solidFill>
+                <a:latin typeface="TT Hoves" panose="02000003020000060003"/>
+                <a:ea typeface="TT Hoves" panose="02000003020000060003"/>
+                <a:cs typeface="TT Hoves" panose="02000003020000060003"/>
+                <a:sym typeface="TT Hoves" panose="02000003020000060003"/>
+              </a:rPr>
+              <a:t> for Phase 2 (Knapsack).</a:t>
+            </a:r>
+            <a:endParaRPr lang="en-US" sz="5500">
+              <a:solidFill>
+                <a:srgbClr val="171C24"/>
+              </a:solidFill>
+              <a:latin typeface="TT Hoves" panose="02000003020000060003"/>
+              <a:ea typeface="TT Hoves" panose="02000003020000060003"/>
+              <a:cs typeface="TT Hoves" panose="02000003020000060003"/>
+              <a:sym typeface="TT Hoves" panose="02000003020000060003"/>
+            </a:endParaRPr>
+          </a:p>
+          <a:p>
+            <a:pPr marL="1187450" lvl="1" indent="-593725" algn="l">
+              <a:lnSpc>
+                <a:spcPts val="7700"/>
+              </a:lnSpc>
+              <a:buFont typeface="Arial" panose="020B0604020202020204"/>
+              <a:buChar char="•"/>
+            </a:pPr>
+            <a:r>
+              <a:rPr lang="en-US" sz="5500">
+                <a:solidFill>
+                  <a:srgbClr val="171C24"/>
+                </a:solidFill>
+                <a:latin typeface="TT Hoves" panose="02000003020000060003"/>
+                <a:ea typeface="TT Hoves" panose="02000003020000060003"/>
+                <a:cs typeface="TT Hoves" panose="02000003020000060003"/>
+                <a:sym typeface="TT Hoves" panose="02000003020000060003"/>
+              </a:rPr>
+              <a:t>Thank You!</a:t>
+            </a:r>
+            <a:endParaRPr lang="en-US" sz="5500">
+              <a:solidFill>
+                <a:srgbClr val="171C24"/>
+              </a:solidFill>
+              <a:latin typeface="TT Hoves" panose="02000003020000060003"/>
+              <a:ea typeface="TT Hoves" panose="02000003020000060003"/>
+              <a:cs typeface="TT Hoves" panose="02000003020000060003"/>
+              <a:sym typeface="TT Hoves" panose="02000003020000060003"/>
+            </a:endParaRPr>
+          </a:p>
+          <a:p>
+            <a:pPr algn="l">
+              <a:lnSpc>
+                <a:spcPts val="7700"/>
+              </a:lnSpc>
+            </a:pPr>
+          </a:p>
+        </p:txBody>
+      </p:sp>
+      <p:sp>
+        <p:nvSpPr>
+          <p:cNvPr id="3" name="TextBox 3"/>
+          <p:cNvSpPr txBox="1"/>
+          <p:nvPr/>
+        </p:nvSpPr>
+        <p:spPr>
+          <a:xfrm>
+            <a:off x="-434667" y="314327"/>
+            <a:ext cx="19157333" cy="1285871"/>
+          </a:xfrm>
+          <a:prstGeom prst="rect">
+            <a:avLst/>
+          </a:prstGeom>
+        </p:spPr>
+        <p:txBody>
+          <a:bodyPr lIns="0" tIns="0" rIns="0" bIns="0" rtlCol="0" anchor="t">
+            <a:spAutoFit/>
+          </a:bodyPr>
+          <a:lstStyle/>
+          <a:p>
+            <a:pPr algn="ctr">
+              <a:lnSpc>
+                <a:spcPts val="10500"/>
+              </a:lnSpc>
+              <a:spcBef>
+                <a:spcPct val="0"/>
+              </a:spcBef>
+            </a:pPr>
+            <a:r>
+              <a:rPr lang="en-US" sz="7500" b="1">
+                <a:solidFill>
+                  <a:srgbClr val="171C24"/>
+                </a:solidFill>
+                <a:latin typeface="TT Hoves Bold" panose="02000003020000060003"/>
+                <a:ea typeface="TT Hoves Bold" panose="02000003020000060003"/>
+                <a:cs typeface="TT Hoves Bold" panose="02000003020000060003"/>
+                <a:sym typeface="TT Hoves Bold" panose="02000003020000060003"/>
+              </a:rPr>
+              <a:t>Conclusion</a:t>
+            </a:r>
+            <a:endParaRPr lang="en-US" sz="7500" b="1">
+              <a:solidFill>
+                <a:srgbClr val="171C24"/>
+              </a:solidFill>
+              <a:latin typeface="TT Hoves Bold" panose="02000003020000060003"/>
+              <a:ea typeface="TT Hoves Bold" panose="02000003020000060003"/>
+              <a:cs typeface="TT Hoves Bold" panose="02000003020000060003"/>
+              <a:sym typeface="TT Hoves Bold" panose="02000003020000060003"/>
+            </a:endParaRPr>
+          </a:p>
+        </p:txBody>
+      </p:sp>
+    </p:spTree>
+  </p:cSld>
+  <p:clrMapOvr>
+    <a:masterClrMapping/>
+  </p:clrMapOvr>
+</p:sld>
+</file>
+
+<file path=ppt/slides/slide2.xml><?xml version="1.0" encoding="utf-8"?>
+<p:sld xmlns:a="http://schemas.openxmlformats.org/drawingml/2006/main" xmlns:r="http://schemas.openxmlformats.org/officeDocument/2006/relationships" xmlns:p="http://schemas.openxmlformats.org/presentationml/2006/main">
+  <p:cSld>
+    <p:spTree>
+      <p:nvGrpSpPr>
+        <p:cNvPr id="1" name=""/>
+        <p:cNvGrpSpPr/>
+        <p:nvPr/>
+      </p:nvGrpSpPr>
+      <p:grpSpPr>
+        <a:xfrm>
+          <a:off x="0" y="0"/>
+          <a:ext cx="0" cy="0"/>
+          <a:chOff x="0" y="0"/>
+          <a:chExt cx="0" cy="0"/>
+        </a:xfrm>
+      </p:grpSpPr>
+      <p:sp>
+        <p:nvSpPr>
+          <p:cNvPr id="2" name="Freeform 2"/>
           <p:cNvSpPr/>
           <p:nvPr/>
         </p:nvSpPr>
         <p:spPr>
-          <a:xfrm flipH="false" flipV="false" rot="0">
+          <a:xfrm>
             <a:off x="-2353190" y="-2270431"/>
             <a:ext cx="5321352" cy="5395541"/>
           </a:xfrm>
@@ -3868,9 +4302,9 @@
             <a:gdLst/>
             <a:ahLst/>
             <a:cxnLst/>
-            <a:rect r="r" b="b" t="t" l="l"/>
+            <a:rect l="l" t="t" r="r" b="b"/>
             <a:pathLst>
-              <a:path h="5395541" w="5321352">
+              <a:path w="5321352" h="5395541">
                 <a:moveTo>
                   <a:pt x="0" y="0"/>
                 </a:moveTo>
@@ -3891,21 +4325,21 @@
             </a:pathLst>
           </a:custGeom>
           <a:blipFill>
-            <a:blip r:embed="rId2"/>
+            <a:blip r:embed="rId1"/>
             <a:stretch>
-              <a:fillRect l="0" t="0" r="0" b="0"/>
+              <a:fillRect/>
             </a:stretch>
           </a:blipFill>
         </p:spPr>
       </p:sp>
       <p:sp>
         <p:nvSpPr>
-          <p:cNvPr name="TextBox 3" id="3"/>
-          <p:cNvSpPr txBox="true"/>
+          <p:cNvPr id="3" name="TextBox 3"/>
+          <p:cNvSpPr txBox="1"/>
           <p:nvPr/>
         </p:nvSpPr>
         <p:spPr>
-          <a:xfrm rot="0">
+          <a:xfrm>
             <a:off x="1240433" y="1955492"/>
             <a:ext cx="16018867" cy="7737475"/>
           </a:xfrm>
@@ -3914,140 +4348,194 @@
           </a:prstGeom>
         </p:spPr>
         <p:txBody>
-          <a:bodyPr anchor="t" rtlCol="false" tIns="0" lIns="0" bIns="0" rIns="0">
+          <a:bodyPr lIns="0" tIns="0" rIns="0" bIns="0" rtlCol="0" anchor="t">
             <a:spAutoFit/>
           </a:bodyPr>
           <a:lstStyle/>
           <a:p>
-            <a:pPr algn="l" marL="1187449" indent="-593725" lvl="1">
+            <a:pPr marL="1187450" lvl="1" indent="-593725" algn="l">
               <a:lnSpc>
-                <a:spcPts val="7699"/>
+                <a:spcPts val="7700"/>
               </a:lnSpc>
-              <a:buFont typeface="Arial"/>
+              <a:buFont typeface="Arial" panose="020B0604020202020204"/>
               <a:buChar char="•"/>
             </a:pPr>
             <a:r>
-              <a:rPr lang="en-US" sz="5499">
+              <a:rPr lang="en-US" sz="5500">
                 <a:solidFill>
                   <a:srgbClr val="171C24"/>
                 </a:solidFill>
-                <a:latin typeface="TT Hoves"/>
-                <a:ea typeface="TT Hoves"/>
-                <a:cs typeface="TT Hoves"/>
-                <a:sym typeface="TT Hoves"/>
+                <a:latin typeface="TT Hoves" panose="02000003020000060003"/>
+                <a:ea typeface="TT Hoves" panose="02000003020000060003"/>
+                <a:cs typeface="TT Hoves" panose="02000003020000060003"/>
+                <a:sym typeface="TT Hoves" panose="02000003020000060003"/>
               </a:rPr>
               <a:t>Goal: Solve complex math problems using code.</a:t>
             </a:r>
-          </a:p>
-          <a:p>
-            <a:pPr algn="l" marL="1187449" indent="-593725" lvl="1">
+            <a:endParaRPr lang="en-US" sz="5500">
+              <a:solidFill>
+                <a:srgbClr val="171C24"/>
+              </a:solidFill>
+              <a:latin typeface="TT Hoves" panose="02000003020000060003"/>
+              <a:ea typeface="TT Hoves" panose="02000003020000060003"/>
+              <a:cs typeface="TT Hoves" panose="02000003020000060003"/>
+              <a:sym typeface="TT Hoves" panose="02000003020000060003"/>
+            </a:endParaRPr>
+          </a:p>
+          <a:p>
+            <a:pPr marL="1187450" lvl="1" indent="-593725" algn="l">
               <a:lnSpc>
-                <a:spcPts val="7699"/>
+                <a:spcPts val="7700"/>
               </a:lnSpc>
-              <a:buFont typeface="Arial"/>
+              <a:buFont typeface="Arial" panose="020B0604020202020204"/>
               <a:buChar char="•"/>
             </a:pPr>
             <a:r>
-              <a:rPr lang="en-US" sz="5499">
+              <a:rPr lang="en-US" sz="5500">
                 <a:solidFill>
                   <a:srgbClr val="171C24"/>
                 </a:solidFill>
-                <a:latin typeface="TT Hoves"/>
-                <a:ea typeface="TT Hoves"/>
-                <a:cs typeface="TT Hoves"/>
-                <a:sym typeface="TT Hoves"/>
+                <a:latin typeface="TT Hoves" panose="02000003020000060003"/>
+                <a:ea typeface="TT Hoves" panose="02000003020000060003"/>
+                <a:cs typeface="TT Hoves" panose="02000003020000060003"/>
+                <a:sym typeface="TT Hoves" panose="02000003020000060003"/>
               </a:rPr>
               <a:t>Current Status: TSP Solver (Completed).</a:t>
             </a:r>
-          </a:p>
-          <a:p>
-            <a:pPr algn="l" marL="1187449" indent="-593725" lvl="1">
+            <a:endParaRPr lang="en-US" sz="5500">
+              <a:solidFill>
+                <a:srgbClr val="171C24"/>
+              </a:solidFill>
+              <a:latin typeface="TT Hoves" panose="02000003020000060003"/>
+              <a:ea typeface="TT Hoves" panose="02000003020000060003"/>
+              <a:cs typeface="TT Hoves" panose="02000003020000060003"/>
+              <a:sym typeface="TT Hoves" panose="02000003020000060003"/>
+            </a:endParaRPr>
+          </a:p>
+          <a:p>
+            <a:pPr marL="1187450" lvl="1" indent="-593725" algn="l">
               <a:lnSpc>
-                <a:spcPts val="7699"/>
+                <a:spcPts val="7700"/>
               </a:lnSpc>
-              <a:buFont typeface="Arial"/>
+              <a:buFont typeface="Arial" panose="020B0604020202020204"/>
               <a:buChar char="•"/>
             </a:pPr>
             <a:r>
-              <a:rPr lang="en-US" sz="5499">
+              <a:rPr lang="en-US" sz="5500">
                 <a:solidFill>
                   <a:srgbClr val="171C24"/>
                 </a:solidFill>
-                <a:latin typeface="TT Hoves"/>
-                <a:ea typeface="TT Hoves"/>
-                <a:cs typeface="TT Hoves"/>
-                <a:sym typeface="TT Hoves"/>
+                <a:latin typeface="TT Hoves" panose="02000003020000060003"/>
+                <a:ea typeface="TT Hoves" panose="02000003020000060003"/>
+                <a:cs typeface="TT Hoves" panose="02000003020000060003"/>
+                <a:sym typeface="TT Hoves" panose="02000003020000060003"/>
               </a:rPr>
               <a:t>Next Phase: 0/1 Knapsack Solver (Upcoming).</a:t>
             </a:r>
-          </a:p>
-          <a:p>
-            <a:pPr algn="l" marL="1187449" indent="-593725" lvl="1">
+            <a:endParaRPr lang="en-US" sz="5500">
+              <a:solidFill>
+                <a:srgbClr val="171C24"/>
+              </a:solidFill>
+              <a:latin typeface="TT Hoves" panose="02000003020000060003"/>
+              <a:ea typeface="TT Hoves" panose="02000003020000060003"/>
+              <a:cs typeface="TT Hoves" panose="02000003020000060003"/>
+              <a:sym typeface="TT Hoves" panose="02000003020000060003"/>
+            </a:endParaRPr>
+          </a:p>
+          <a:p>
+            <a:pPr marL="1187450" lvl="1" indent="-593725" algn="l">
               <a:lnSpc>
-                <a:spcPts val="7699"/>
+                <a:spcPts val="7700"/>
               </a:lnSpc>
-              <a:buFont typeface="Arial"/>
+              <a:buFont typeface="Arial" panose="020B0604020202020204"/>
               <a:buChar char="•"/>
             </a:pPr>
             <a:r>
-              <a:rPr lang="en-US" sz="5499">
+              <a:rPr lang="en-US" sz="5500">
                 <a:solidFill>
                   <a:srgbClr val="171C24"/>
                 </a:solidFill>
-                <a:latin typeface="TT Hoves"/>
-                <a:ea typeface="TT Hoves"/>
-                <a:cs typeface="TT Hoves"/>
-                <a:sym typeface="TT Hoves"/>
+                <a:latin typeface="TT Hoves" panose="02000003020000060003"/>
+                <a:ea typeface="TT Hoves" panose="02000003020000060003"/>
+                <a:cs typeface="TT Hoves" panose="02000003020000060003"/>
+                <a:sym typeface="TT Hoves" panose="02000003020000060003"/>
               </a:rPr>
               <a:t>Languages Used:</a:t>
             </a:r>
-          </a:p>
-          <a:p>
-            <a:pPr algn="l" marL="1187449" indent="-593725" lvl="1">
+            <a:endParaRPr lang="en-US" sz="5500">
+              <a:solidFill>
+                <a:srgbClr val="171C24"/>
+              </a:solidFill>
+              <a:latin typeface="TT Hoves" panose="02000003020000060003"/>
+              <a:ea typeface="TT Hoves" panose="02000003020000060003"/>
+              <a:cs typeface="TT Hoves" panose="02000003020000060003"/>
+              <a:sym typeface="TT Hoves" panose="02000003020000060003"/>
+            </a:endParaRPr>
+          </a:p>
+          <a:p>
+            <a:pPr marL="1187450" lvl="1" indent="-593725" algn="l">
               <a:lnSpc>
-                <a:spcPts val="7699"/>
+                <a:spcPts val="7700"/>
               </a:lnSpc>
-              <a:buFont typeface="Arial"/>
+              <a:buFont typeface="Arial" panose="020B0604020202020204"/>
               <a:buChar char="•"/>
             </a:pPr>
             <a:r>
-              <a:rPr lang="en-US" sz="5499">
+              <a:rPr lang="en-US" sz="5500">
                 <a:solidFill>
                   <a:srgbClr val="171C24"/>
                 </a:solidFill>
-                <a:latin typeface="TT Hoves"/>
-                <a:ea typeface="TT Hoves"/>
-                <a:cs typeface="TT Hoves"/>
-                <a:sym typeface="TT Hoves"/>
+                <a:latin typeface="TT Hoves" panose="02000003020000060003"/>
+                <a:ea typeface="TT Hoves" panose="02000003020000060003"/>
+                <a:cs typeface="TT Hoves" panose="02000003020000060003"/>
+                <a:sym typeface="TT Hoves" panose="02000003020000060003"/>
               </a:rPr>
               <a:t>Java: For the User Interface (UI).</a:t>
             </a:r>
-          </a:p>
-          <a:p>
-            <a:pPr algn="l" marL="1187449" indent="-593725" lvl="1">
+            <a:endParaRPr lang="en-US" sz="5500">
+              <a:solidFill>
+                <a:srgbClr val="171C24"/>
+              </a:solidFill>
+              <a:latin typeface="TT Hoves" panose="02000003020000060003"/>
+              <a:ea typeface="TT Hoves" panose="02000003020000060003"/>
+              <a:cs typeface="TT Hoves" panose="02000003020000060003"/>
+              <a:sym typeface="TT Hoves" panose="02000003020000060003"/>
+            </a:endParaRPr>
+          </a:p>
+          <a:p>
+            <a:pPr marL="1187450" lvl="1" indent="-593725" algn="l">
               <a:lnSpc>
-                <a:spcPts val="7699"/>
+                <a:spcPts val="7700"/>
               </a:lnSpc>
-              <a:buFont typeface="Arial"/>
+              <a:buFont typeface="Arial" panose="020B0604020202020204"/>
               <a:buChar char="•"/>
             </a:pPr>
             <a:r>
-              <a:rPr lang="en-US" sz="5499">
+              <a:rPr lang="en-US" sz="5500">
                 <a:solidFill>
                   <a:srgbClr val="171C24"/>
                 </a:solidFill>
-                <a:latin typeface="TT Hoves"/>
-                <a:ea typeface="TT Hoves"/>
-                <a:cs typeface="TT Hoves"/>
-                <a:sym typeface="TT Hoves"/>
+                <a:latin typeface="TT Hoves" panose="02000003020000060003"/>
+                <a:ea typeface="TT Hoves" panose="02000003020000060003"/>
+                <a:cs typeface="TT Hoves" panose="02000003020000060003"/>
+                <a:sym typeface="TT Hoves" panose="02000003020000060003"/>
               </a:rPr>
               <a:t>C Language: For the fast calculations (Backend).</a:t>
             </a:r>
+            <a:endParaRPr lang="en-US" sz="5500">
+              <a:solidFill>
+                <a:srgbClr val="171C24"/>
+              </a:solidFill>
+              <a:latin typeface="TT Hoves" panose="02000003020000060003"/>
+              <a:ea typeface="TT Hoves" panose="02000003020000060003"/>
+              <a:cs typeface="TT Hoves" panose="02000003020000060003"/>
+              <a:sym typeface="TT Hoves" panose="02000003020000060003"/>
+            </a:endParaRPr>
           </a:p>
           <a:p>
             <a:pPr algn="l">
               <a:lnSpc>
-                <a:spcPts val="7699"/>
+                <a:spcPts val="7700"/>
               </a:lnSpc>
             </a:pPr>
           </a:p>
@@ -4055,12 +4543,12 @@
       </p:sp>
       <p:sp>
         <p:nvSpPr>
-          <p:cNvPr name="TextBox 4" id="4"/>
-          <p:cNvSpPr txBox="true"/>
+          <p:cNvPr id="4" name="TextBox 4"/>
+          <p:cNvSpPr txBox="1"/>
           <p:nvPr/>
         </p:nvSpPr>
         <p:spPr>
-          <a:xfrm rot="0">
+          <a:xfrm>
             <a:off x="478145" y="468350"/>
             <a:ext cx="16781155" cy="1377949"/>
           </a:xfrm>
@@ -4069,7 +4557,7 @@
           </a:prstGeom>
         </p:spPr>
         <p:txBody>
-          <a:bodyPr anchor="t" rtlCol="false" tIns="0" lIns="0" bIns="0" rIns="0">
+          <a:bodyPr lIns="0" tIns="0" rIns="0" bIns="0" rtlCol="0" anchor="t">
             <a:spAutoFit/>
           </a:bodyPr>
           <a:lstStyle/>
@@ -4083,17 +4571,26 @@
               </a:spcBef>
             </a:pPr>
             <a:r>
-              <a:rPr lang="en-US" b="true" sz="8000">
+              <a:rPr lang="en-US" sz="8000" b="1">
                 <a:solidFill>
                   <a:srgbClr val="171C24"/>
                 </a:solidFill>
-                <a:latin typeface="TT Hoves Bold"/>
-                <a:ea typeface="TT Hoves Bold"/>
-                <a:cs typeface="TT Hoves Bold"/>
-                <a:sym typeface="TT Hoves Bold"/>
+                <a:latin typeface="TT Hoves Bold" panose="02000003020000060003"/>
+                <a:ea typeface="TT Hoves Bold" panose="02000003020000060003"/>
+                <a:cs typeface="TT Hoves Bold" panose="02000003020000060003"/>
+                <a:sym typeface="TT Hoves Bold" panose="02000003020000060003"/>
               </a:rPr>
               <a:t>Project Overview</a:t>
             </a:r>
+            <a:endParaRPr lang="en-US" sz="8000" b="1">
+              <a:solidFill>
+                <a:srgbClr val="171C24"/>
+              </a:solidFill>
+              <a:latin typeface="TT Hoves Bold" panose="02000003020000060003"/>
+              <a:ea typeface="TT Hoves Bold" panose="02000003020000060003"/>
+              <a:cs typeface="TT Hoves Bold" panose="02000003020000060003"/>
+              <a:sym typeface="TT Hoves Bold" panose="02000003020000060003"/>
+            </a:endParaRPr>
           </a:p>
         </p:txBody>
       </p:sp>
@@ -4106,15 +4603,8 @@
 </file>
 
 <file path=ppt/slides/slide3.xml><?xml version="1.0" encoding="utf-8"?>
-<p:sld xmlns:p="http://schemas.openxmlformats.org/presentationml/2006/main" xmlns:a="http://schemas.openxmlformats.org/drawingml/2006/main">
+<p:sld xmlns:a="http://schemas.openxmlformats.org/drawingml/2006/main" xmlns:r="http://schemas.openxmlformats.org/officeDocument/2006/relationships" xmlns:p="http://schemas.openxmlformats.org/presentationml/2006/main">
   <p:cSld>
-    <p:bg>
-      <p:bgPr>
-        <a:solidFill>
-          <a:srgbClr val="F4EEEB"/>
-        </a:solidFill>
-      </p:bgPr>
-    </p:bg>
     <p:spTree>
       <p:nvGrpSpPr>
         <p:cNvPr id="1" name=""/>
@@ -4131,12 +4621,12 @@
       </p:grpSpPr>
       <p:sp>
         <p:nvSpPr>
-          <p:cNvPr name="TextBox 2" id="2"/>
-          <p:cNvSpPr txBox="true"/>
+          <p:cNvPr id="2" name="TextBox 2"/>
+          <p:cNvSpPr txBox="1"/>
           <p:nvPr/>
         </p:nvSpPr>
         <p:spPr>
-          <a:xfrm rot="0">
+          <a:xfrm>
             <a:off x="1240433" y="2492375"/>
             <a:ext cx="16018867" cy="6765925"/>
           </a:xfrm>
@@ -4145,131 +4635,176 @@
           </a:prstGeom>
         </p:spPr>
         <p:txBody>
-          <a:bodyPr anchor="t" rtlCol="false" tIns="0" lIns="0" bIns="0" rIns="0">
+          <a:bodyPr lIns="0" tIns="0" rIns="0" bIns="0" rtlCol="0" anchor="t">
             <a:spAutoFit/>
           </a:bodyPr>
           <a:lstStyle/>
           <a:p>
-            <a:pPr algn="l" marL="1187449" indent="-593725" lvl="1">
+            <a:pPr marL="1187450" lvl="1" indent="-593725" algn="l">
               <a:lnSpc>
-                <a:spcPts val="7699"/>
+                <a:spcPts val="7700"/>
               </a:lnSpc>
-              <a:buFont typeface="Arial"/>
+              <a:buFont typeface="Arial" panose="020B0604020202020204"/>
               <a:buChar char="•"/>
             </a:pPr>
             <a:r>
-              <a:rPr lang="en-US" sz="5499">
+              <a:rPr lang="en-US" sz="5500">
                 <a:solidFill>
                   <a:srgbClr val="171C24"/>
                 </a:solidFill>
-                <a:latin typeface="TT Hoves"/>
-                <a:ea typeface="TT Hoves"/>
-                <a:cs typeface="TT Hoves"/>
-                <a:sym typeface="TT Hoves"/>
+                <a:latin typeface="TT Hoves" panose="02000003020000060003"/>
+                <a:ea typeface="TT Hoves" panose="02000003020000060003"/>
+                <a:cs typeface="TT Hoves" panose="02000003020000060003"/>
+                <a:sym typeface="TT Hoves" panose="02000003020000060003"/>
               </a:rPr>
               <a:t>Question: "How to visit N cities and return home using the shortest path?"</a:t>
             </a:r>
-          </a:p>
-          <a:p>
-            <a:pPr algn="l" marL="1187449" indent="-593725" lvl="1">
+            <a:endParaRPr lang="en-US" sz="5500">
+              <a:solidFill>
+                <a:srgbClr val="171C24"/>
+              </a:solidFill>
+              <a:latin typeface="TT Hoves" panose="02000003020000060003"/>
+              <a:ea typeface="TT Hoves" panose="02000003020000060003"/>
+              <a:cs typeface="TT Hoves" panose="02000003020000060003"/>
+              <a:sym typeface="TT Hoves" panose="02000003020000060003"/>
+            </a:endParaRPr>
+          </a:p>
+          <a:p>
+            <a:pPr marL="1187450" lvl="1" indent="-593725" algn="l">
               <a:lnSpc>
-                <a:spcPts val="7699"/>
+                <a:spcPts val="7700"/>
               </a:lnSpc>
-              <a:buFont typeface="Arial"/>
+              <a:buFont typeface="Arial" panose="020B0604020202020204"/>
               <a:buChar char="•"/>
             </a:pPr>
             <a:r>
-              <a:rPr lang="en-US" sz="5499">
+              <a:rPr lang="en-US" sz="5500">
                 <a:solidFill>
                   <a:srgbClr val="171C24"/>
                 </a:solidFill>
-                <a:latin typeface="TT Hoves"/>
-                <a:ea typeface="TT Hoves"/>
-                <a:cs typeface="TT Hoves"/>
-                <a:sym typeface="TT Hoves"/>
+                <a:latin typeface="TT Hoves" panose="02000003020000060003"/>
+                <a:ea typeface="TT Hoves" panose="02000003020000060003"/>
+                <a:cs typeface="TT Hoves" panose="02000003020000060003"/>
+                <a:sym typeface="TT Hoves" panose="02000003020000060003"/>
               </a:rPr>
               <a:t>The Challenge:</a:t>
             </a:r>
-          </a:p>
-          <a:p>
-            <a:pPr algn="l" marL="1187449" indent="-593725" lvl="1">
+            <a:endParaRPr lang="en-US" sz="5500">
+              <a:solidFill>
+                <a:srgbClr val="171C24"/>
+              </a:solidFill>
+              <a:latin typeface="TT Hoves" panose="02000003020000060003"/>
+              <a:ea typeface="TT Hoves" panose="02000003020000060003"/>
+              <a:cs typeface="TT Hoves" panose="02000003020000060003"/>
+              <a:sym typeface="TT Hoves" panose="02000003020000060003"/>
+            </a:endParaRPr>
+          </a:p>
+          <a:p>
+            <a:pPr marL="1187450" lvl="1" indent="-593725" algn="l">
               <a:lnSpc>
-                <a:spcPts val="7699"/>
+                <a:spcPts val="7700"/>
               </a:lnSpc>
-              <a:buFont typeface="Arial"/>
+              <a:buFont typeface="Arial" panose="020B0604020202020204"/>
               <a:buChar char="•"/>
             </a:pPr>
             <a:r>
-              <a:rPr lang="en-US" sz="5499">
+              <a:rPr lang="en-US" sz="5500">
                 <a:solidFill>
                   <a:srgbClr val="171C24"/>
                 </a:solidFill>
-                <a:latin typeface="TT Hoves"/>
-                <a:ea typeface="TT Hoves"/>
-                <a:cs typeface="TT Hoves"/>
-                <a:sym typeface="TT Hoves"/>
+                <a:latin typeface="TT Hoves" panose="02000003020000060003"/>
+                <a:ea typeface="TT Hoves" panose="02000003020000060003"/>
+                <a:cs typeface="TT Hoves" panose="02000003020000060003"/>
+                <a:sym typeface="TT Hoves" panose="02000003020000060003"/>
               </a:rPr>
               <a:t>10</a:t>
             </a:r>
             <a:r>
-              <a:rPr lang="en-US" sz="5499">
+              <a:rPr lang="en-US" sz="5500">
                 <a:solidFill>
                   <a:srgbClr val="171C24"/>
                 </a:solidFill>
-                <a:latin typeface="TT Hoves"/>
-                <a:ea typeface="TT Hoves"/>
-                <a:cs typeface="TT Hoves"/>
-                <a:sym typeface="TT Hoves"/>
+                <a:latin typeface="TT Hoves" panose="02000003020000060003"/>
+                <a:ea typeface="TT Hoves" panose="02000003020000060003"/>
+                <a:cs typeface="TT Hoves" panose="02000003020000060003"/>
+                <a:sym typeface="TT Hoves" panose="02000003020000060003"/>
               </a:rPr>
               <a:t> Cities = 180,000 paths.</a:t>
             </a:r>
-          </a:p>
-          <a:p>
-            <a:pPr algn="l" marL="1187449" indent="-593725" lvl="1">
+            <a:endParaRPr lang="en-US" sz="5500">
+              <a:solidFill>
+                <a:srgbClr val="171C24"/>
+              </a:solidFill>
+              <a:latin typeface="TT Hoves" panose="02000003020000060003"/>
+              <a:ea typeface="TT Hoves" panose="02000003020000060003"/>
+              <a:cs typeface="TT Hoves" panose="02000003020000060003"/>
+              <a:sym typeface="TT Hoves" panose="02000003020000060003"/>
+            </a:endParaRPr>
+          </a:p>
+          <a:p>
+            <a:pPr marL="1187450" lvl="1" indent="-593725" algn="l">
               <a:lnSpc>
-                <a:spcPts val="7699"/>
+                <a:spcPts val="7700"/>
               </a:lnSpc>
-              <a:buFont typeface="Arial"/>
+              <a:buFont typeface="Arial" panose="020B0604020202020204"/>
               <a:buChar char="•"/>
             </a:pPr>
             <a:r>
-              <a:rPr lang="en-US" sz="5499">
+              <a:rPr lang="en-US" sz="5500">
                 <a:solidFill>
                   <a:srgbClr val="171C24"/>
                 </a:solidFill>
-                <a:latin typeface="TT Hoves"/>
-                <a:ea typeface="TT Hoves"/>
-                <a:cs typeface="TT Hoves"/>
-                <a:sym typeface="TT Hoves"/>
+                <a:latin typeface="TT Hoves" panose="02000003020000060003"/>
+                <a:ea typeface="TT Hoves" panose="02000003020000060003"/>
+                <a:cs typeface="TT Hoves" panose="02000003020000060003"/>
+                <a:sym typeface="TT Hoves" panose="02000003020000060003"/>
               </a:rPr>
               <a:t>12 Cities = 479 Million paths.</a:t>
             </a:r>
-          </a:p>
-          <a:p>
-            <a:pPr algn="l" marL="1187449" indent="-593725" lvl="1">
+            <a:endParaRPr lang="en-US" sz="5500">
+              <a:solidFill>
+                <a:srgbClr val="171C24"/>
+              </a:solidFill>
+              <a:latin typeface="TT Hoves" panose="02000003020000060003"/>
+              <a:ea typeface="TT Hoves" panose="02000003020000060003"/>
+              <a:cs typeface="TT Hoves" panose="02000003020000060003"/>
+              <a:sym typeface="TT Hoves" panose="02000003020000060003"/>
+            </a:endParaRPr>
+          </a:p>
+          <a:p>
+            <a:pPr marL="1187450" lvl="1" indent="-593725" algn="l">
               <a:lnSpc>
-                <a:spcPts val="7699"/>
+                <a:spcPts val="7700"/>
               </a:lnSpc>
-              <a:buFont typeface="Arial"/>
+              <a:buFont typeface="Arial" panose="020B0604020202020204"/>
               <a:buChar char="•"/>
             </a:pPr>
             <a:r>
-              <a:rPr lang="en-US" sz="5499">
+              <a:rPr lang="en-US" sz="5500">
                 <a:solidFill>
                   <a:srgbClr val="171C24"/>
                 </a:solidFill>
-                <a:latin typeface="TT Hoves"/>
-                <a:ea typeface="TT Hoves"/>
-                <a:cs typeface="TT Hoves"/>
-                <a:sym typeface="TT Hoves"/>
+                <a:latin typeface="TT Hoves" panose="02000003020000060003"/>
+                <a:ea typeface="TT Hoves" panose="02000003020000060003"/>
+                <a:cs typeface="TT Hoves" panose="02000003020000060003"/>
+                <a:sym typeface="TT Hoves" panose="02000003020000060003"/>
               </a:rPr>
               <a:t>20 Cities = Impossible for normal computers.</a:t>
             </a:r>
+            <a:endParaRPr lang="en-US" sz="5500">
+              <a:solidFill>
+                <a:srgbClr val="171C24"/>
+              </a:solidFill>
+              <a:latin typeface="TT Hoves" panose="02000003020000060003"/>
+              <a:ea typeface="TT Hoves" panose="02000003020000060003"/>
+              <a:cs typeface="TT Hoves" panose="02000003020000060003"/>
+              <a:sym typeface="TT Hoves" panose="02000003020000060003"/>
+            </a:endParaRPr>
           </a:p>
           <a:p>
             <a:pPr algn="l">
               <a:lnSpc>
-                <a:spcPts val="7699"/>
+                <a:spcPts val="7700"/>
               </a:lnSpc>
             </a:pPr>
           </a:p>
@@ -4277,12 +4812,12 @@
       </p:sp>
       <p:sp>
         <p:nvSpPr>
-          <p:cNvPr name="TextBox 3" id="3"/>
-          <p:cNvSpPr txBox="true"/>
+          <p:cNvPr id="3" name="TextBox 3"/>
+          <p:cNvSpPr txBox="1"/>
           <p:nvPr/>
         </p:nvSpPr>
         <p:spPr>
-          <a:xfrm rot="0">
+          <a:xfrm>
             <a:off x="478145" y="468350"/>
             <a:ext cx="16781155" cy="1377949"/>
           </a:xfrm>
@@ -4291,7 +4826,7 @@
           </a:prstGeom>
         </p:spPr>
         <p:txBody>
-          <a:bodyPr anchor="t" rtlCol="false" tIns="0" lIns="0" bIns="0" rIns="0">
+          <a:bodyPr lIns="0" tIns="0" rIns="0" bIns="0" rtlCol="0" anchor="t">
             <a:spAutoFit/>
           </a:bodyPr>
           <a:lstStyle/>
@@ -4305,29 +4840,38 @@
               </a:spcBef>
             </a:pPr>
             <a:r>
-              <a:rPr lang="en-US" b="true" sz="8000">
+              <a:rPr lang="en-US" sz="8000" b="1">
                 <a:solidFill>
                   <a:srgbClr val="171C24"/>
                 </a:solidFill>
-                <a:latin typeface="TT Hoves Bold"/>
-                <a:ea typeface="TT Hoves Bold"/>
-                <a:cs typeface="TT Hoves Bold"/>
-                <a:sym typeface="TT Hoves Bold"/>
+                <a:latin typeface="TT Hoves Bold" panose="02000003020000060003"/>
+                <a:ea typeface="TT Hoves Bold" panose="02000003020000060003"/>
+                <a:cs typeface="TT Hoves Bold" panose="02000003020000060003"/>
+                <a:sym typeface="TT Hoves Bold" panose="02000003020000060003"/>
               </a:rPr>
               <a:t>T</a:t>
             </a:r>
             <a:r>
-              <a:rPr lang="en-US" b="true" sz="8000">
+              <a:rPr lang="en-US" sz="8000" b="1">
                 <a:solidFill>
                   <a:srgbClr val="171C24"/>
                 </a:solidFill>
-                <a:latin typeface="TT Hoves Bold"/>
-                <a:ea typeface="TT Hoves Bold"/>
-                <a:cs typeface="TT Hoves Bold"/>
-                <a:sym typeface="TT Hoves Bold"/>
+                <a:latin typeface="TT Hoves Bold" panose="02000003020000060003"/>
+                <a:ea typeface="TT Hoves Bold" panose="02000003020000060003"/>
+                <a:cs typeface="TT Hoves Bold" panose="02000003020000060003"/>
+                <a:sym typeface="TT Hoves Bold" panose="02000003020000060003"/>
               </a:rPr>
               <a:t>he Problem (TSP)</a:t>
             </a:r>
+            <a:endParaRPr lang="en-US" sz="8000" b="1">
+              <a:solidFill>
+                <a:srgbClr val="171C24"/>
+              </a:solidFill>
+              <a:latin typeface="TT Hoves Bold" panose="02000003020000060003"/>
+              <a:ea typeface="TT Hoves Bold" panose="02000003020000060003"/>
+              <a:cs typeface="TT Hoves Bold" panose="02000003020000060003"/>
+              <a:sym typeface="TT Hoves Bold" panose="02000003020000060003"/>
+            </a:endParaRPr>
           </a:p>
         </p:txBody>
       </p:sp>
@@ -4340,15 +4884,8 @@
 </file>
 
 <file path=ppt/slides/slide4.xml><?xml version="1.0" encoding="utf-8"?>
-<p:sld xmlns:p="http://schemas.openxmlformats.org/presentationml/2006/main" xmlns:a="http://schemas.openxmlformats.org/drawingml/2006/main">
+<p:sld xmlns:a="http://schemas.openxmlformats.org/drawingml/2006/main" xmlns:r="http://schemas.openxmlformats.org/officeDocument/2006/relationships" xmlns:p="http://schemas.openxmlformats.org/presentationml/2006/main">
   <p:cSld>
-    <p:bg>
-      <p:bgPr>
-        <a:solidFill>
-          <a:srgbClr val="F4EEEB"/>
-        </a:solidFill>
-      </p:bgPr>
-    </p:bg>
     <p:spTree>
       <p:nvGrpSpPr>
         <p:cNvPr id="1" name=""/>
@@ -4365,12 +4902,12 @@
       </p:grpSpPr>
       <p:sp>
         <p:nvSpPr>
-          <p:cNvPr name="TextBox 2" id="2"/>
-          <p:cNvSpPr txBox="true"/>
+          <p:cNvPr id="2" name="TextBox 2"/>
+          <p:cNvSpPr txBox="1"/>
           <p:nvPr/>
         </p:nvSpPr>
         <p:spPr>
-          <a:xfrm rot="0">
+          <a:xfrm>
             <a:off x="1240433" y="2492375"/>
             <a:ext cx="16018867" cy="6765925"/>
           </a:xfrm>
@@ -4379,143 +4916,188 @@
           </a:prstGeom>
         </p:spPr>
         <p:txBody>
-          <a:bodyPr anchor="t" rtlCol="false" tIns="0" lIns="0" bIns="0" rIns="0">
+          <a:bodyPr lIns="0" tIns="0" rIns="0" bIns="0" rtlCol="0" anchor="t">
             <a:spAutoFit/>
           </a:bodyPr>
           <a:lstStyle/>
           <a:p>
-            <a:pPr algn="l" marL="1187449" indent="-593725" lvl="1">
+            <a:pPr marL="1187450" lvl="1" indent="-593725" algn="l">
               <a:lnSpc>
-                <a:spcPts val="7699"/>
+                <a:spcPts val="7700"/>
               </a:lnSpc>
-              <a:buFont typeface="Arial"/>
+              <a:buFont typeface="Arial" panose="020B0604020202020204"/>
               <a:buChar char="•"/>
             </a:pPr>
             <a:r>
-              <a:rPr lang="en-US" sz="5499">
+              <a:rPr lang="en-US" sz="5500">
                 <a:solidFill>
                   <a:srgbClr val="171C24"/>
                 </a:solidFill>
-                <a:latin typeface="TT Hoves"/>
-                <a:ea typeface="TT Hoves"/>
-                <a:cs typeface="TT Hoves"/>
-                <a:sym typeface="TT Hoves"/>
+                <a:latin typeface="TT Hoves" panose="02000003020000060003"/>
+                <a:ea typeface="TT Hoves" panose="02000003020000060003"/>
+                <a:cs typeface="TT Hoves" panose="02000003020000060003"/>
+                <a:sym typeface="TT Hoves" panose="02000003020000060003"/>
               </a:rPr>
               <a:t>Type: Exact Algorithm.</a:t>
             </a:r>
-          </a:p>
-          <a:p>
-            <a:pPr algn="l" marL="1187449" indent="-593725" lvl="1">
+            <a:endParaRPr lang="en-US" sz="5500">
+              <a:solidFill>
+                <a:srgbClr val="171C24"/>
+              </a:solidFill>
+              <a:latin typeface="TT Hoves" panose="02000003020000060003"/>
+              <a:ea typeface="TT Hoves" panose="02000003020000060003"/>
+              <a:cs typeface="TT Hoves" panose="02000003020000060003"/>
+              <a:sym typeface="TT Hoves" panose="02000003020000060003"/>
+            </a:endParaRPr>
+          </a:p>
+          <a:p>
+            <a:pPr marL="1187450" lvl="1" indent="-593725" algn="l">
               <a:lnSpc>
-                <a:spcPts val="7699"/>
+                <a:spcPts val="7700"/>
               </a:lnSpc>
-              <a:buFont typeface="Arial"/>
+              <a:buFont typeface="Arial" panose="020B0604020202020204"/>
               <a:buChar char="•"/>
             </a:pPr>
             <a:r>
-              <a:rPr lang="en-US" sz="5499">
+              <a:rPr lang="en-US" sz="5500">
                 <a:solidFill>
                   <a:srgbClr val="171C24"/>
                 </a:solidFill>
-                <a:latin typeface="TT Hoves"/>
-                <a:ea typeface="TT Hoves"/>
-                <a:cs typeface="TT Hoves"/>
-                <a:sym typeface="TT Hoves"/>
+                <a:latin typeface="TT Hoves" panose="02000003020000060003"/>
+                <a:ea typeface="TT Hoves" panose="02000003020000060003"/>
+                <a:cs typeface="TT Hoves" panose="02000003020000060003"/>
+                <a:sym typeface="TT Hoves" panose="02000003020000060003"/>
               </a:rPr>
               <a:t>Acc</a:t>
             </a:r>
             <a:r>
-              <a:rPr lang="en-US" sz="5499">
+              <a:rPr lang="en-US" sz="5500">
                 <a:solidFill>
                   <a:srgbClr val="171C24"/>
                 </a:solidFill>
-                <a:latin typeface="TT Hoves"/>
-                <a:ea typeface="TT Hoves"/>
-                <a:cs typeface="TT Hoves"/>
-                <a:sym typeface="TT Hoves"/>
+                <a:latin typeface="TT Hoves" panose="02000003020000060003"/>
+                <a:ea typeface="TT Hoves" panose="02000003020000060003"/>
+                <a:cs typeface="TT Hoves" panose="02000003020000060003"/>
+                <a:sym typeface="TT Hoves" panose="02000003020000060003"/>
               </a:rPr>
               <a:t>uracy: 100% (Perfect Solution).</a:t>
             </a:r>
-          </a:p>
-          <a:p>
-            <a:pPr algn="l" marL="1187449" indent="-593725" lvl="1">
+            <a:endParaRPr lang="en-US" sz="5500">
+              <a:solidFill>
+                <a:srgbClr val="171C24"/>
+              </a:solidFill>
+              <a:latin typeface="TT Hoves" panose="02000003020000060003"/>
+              <a:ea typeface="TT Hoves" panose="02000003020000060003"/>
+              <a:cs typeface="TT Hoves" panose="02000003020000060003"/>
+              <a:sym typeface="TT Hoves" panose="02000003020000060003"/>
+            </a:endParaRPr>
+          </a:p>
+          <a:p>
+            <a:pPr marL="1187450" lvl="1" indent="-593725" algn="l">
               <a:lnSpc>
-                <a:spcPts val="7699"/>
+                <a:spcPts val="7700"/>
               </a:lnSpc>
-              <a:buFont typeface="Arial"/>
+              <a:buFont typeface="Arial" panose="020B0604020202020204"/>
               <a:buChar char="•"/>
             </a:pPr>
             <a:r>
-              <a:rPr lang="en-US" sz="5499">
+              <a:rPr lang="en-US" sz="5500">
                 <a:solidFill>
                   <a:srgbClr val="171C24"/>
                 </a:solidFill>
-                <a:latin typeface="TT Hoves"/>
-                <a:ea typeface="TT Hoves"/>
-                <a:cs typeface="TT Hoves"/>
-                <a:sym typeface="TT Hoves"/>
+                <a:latin typeface="TT Hoves" panose="02000003020000060003"/>
+                <a:ea typeface="TT Hoves" panose="02000003020000060003"/>
+                <a:cs typeface="TT Hoves" panose="02000003020000060003"/>
+                <a:sym typeface="TT Hoves" panose="02000003020000060003"/>
               </a:rPr>
               <a:t>How it works:</a:t>
             </a:r>
-          </a:p>
-          <a:p>
-            <a:pPr algn="l" marL="1187449" indent="-593725" lvl="1">
+            <a:endParaRPr lang="en-US" sz="5500">
+              <a:solidFill>
+                <a:srgbClr val="171C24"/>
+              </a:solidFill>
+              <a:latin typeface="TT Hoves" panose="02000003020000060003"/>
+              <a:ea typeface="TT Hoves" panose="02000003020000060003"/>
+              <a:cs typeface="TT Hoves" panose="02000003020000060003"/>
+              <a:sym typeface="TT Hoves" panose="02000003020000060003"/>
+            </a:endParaRPr>
+          </a:p>
+          <a:p>
+            <a:pPr marL="1187450" lvl="1" indent="-593725" algn="l">
               <a:lnSpc>
-                <a:spcPts val="7699"/>
+                <a:spcPts val="7700"/>
               </a:lnSpc>
-              <a:buFont typeface="Arial"/>
+              <a:buFont typeface="Arial" panose="020B0604020202020204"/>
               <a:buChar char="•"/>
             </a:pPr>
             <a:r>
-              <a:rPr lang="en-US" sz="5499">
+              <a:rPr lang="en-US" sz="5500">
                 <a:solidFill>
                   <a:srgbClr val="171C24"/>
                 </a:solidFill>
-                <a:latin typeface="TT Hoves"/>
-                <a:ea typeface="TT Hoves"/>
-                <a:cs typeface="TT Hoves"/>
-                <a:sym typeface="TT Hoves"/>
+                <a:latin typeface="TT Hoves" panose="02000003020000060003"/>
+                <a:ea typeface="TT Hoves" panose="02000003020000060003"/>
+                <a:cs typeface="TT Hoves" panose="02000003020000060003"/>
+                <a:sym typeface="TT Hoves" panose="02000003020000060003"/>
               </a:rPr>
               <a:t>Uses a "Lower Bound" to guess the cost.</a:t>
             </a:r>
-          </a:p>
-          <a:p>
-            <a:pPr algn="l" marL="1187449" indent="-593725" lvl="1">
+            <a:endParaRPr lang="en-US" sz="5500">
+              <a:solidFill>
+                <a:srgbClr val="171C24"/>
+              </a:solidFill>
+              <a:latin typeface="TT Hoves" panose="02000003020000060003"/>
+              <a:ea typeface="TT Hoves" panose="02000003020000060003"/>
+              <a:cs typeface="TT Hoves" panose="02000003020000060003"/>
+              <a:sym typeface="TT Hoves" panose="02000003020000060003"/>
+            </a:endParaRPr>
+          </a:p>
+          <a:p>
+            <a:pPr marL="1187450" lvl="1" indent="-593725" algn="l">
               <a:lnSpc>
-                <a:spcPts val="7699"/>
+                <a:spcPts val="7700"/>
               </a:lnSpc>
-              <a:buFont typeface="Arial"/>
+              <a:buFont typeface="Arial" panose="020B0604020202020204"/>
               <a:buChar char="•"/>
             </a:pPr>
             <a:r>
-              <a:rPr lang="en-US" sz="5499">
+              <a:rPr lang="en-US" sz="5500">
                 <a:solidFill>
                   <a:srgbClr val="171C24"/>
                 </a:solidFill>
-                <a:latin typeface="TT Hoves"/>
-                <a:ea typeface="TT Hoves"/>
-                <a:cs typeface="TT Hoves"/>
-                <a:sym typeface="TT Hoves"/>
+                <a:latin typeface="TT Hoves" panose="02000003020000060003"/>
+                <a:ea typeface="TT Hoves" panose="02000003020000060003"/>
+                <a:cs typeface="TT Hoves" panose="02000003020000060003"/>
+                <a:sym typeface="TT Hoves" panose="02000003020000060003"/>
               </a:rPr>
               <a:t>Pruni</a:t>
             </a:r>
             <a:r>
-              <a:rPr lang="en-US" sz="5499">
+              <a:rPr lang="en-US" sz="5500">
                 <a:solidFill>
                   <a:srgbClr val="171C24"/>
                 </a:solidFill>
-                <a:latin typeface="TT Hoves"/>
-                <a:ea typeface="TT Hoves"/>
-                <a:cs typeface="TT Hoves"/>
-                <a:sym typeface="TT Hoves"/>
+                <a:latin typeface="TT Hoves" panose="02000003020000060003"/>
+                <a:ea typeface="TT Hoves" panose="02000003020000060003"/>
+                <a:cs typeface="TT Hoves" panose="02000003020000060003"/>
+                <a:sym typeface="TT Hoves" panose="02000003020000060003"/>
               </a:rPr>
               <a:t>ng: If a path looks expensive, it cuts it off immediately.</a:t>
             </a:r>
+            <a:endParaRPr lang="en-US" sz="5500">
+              <a:solidFill>
+                <a:srgbClr val="171C24"/>
+              </a:solidFill>
+              <a:latin typeface="TT Hoves" panose="02000003020000060003"/>
+              <a:ea typeface="TT Hoves" panose="02000003020000060003"/>
+              <a:cs typeface="TT Hoves" panose="02000003020000060003"/>
+              <a:sym typeface="TT Hoves" panose="02000003020000060003"/>
+            </a:endParaRPr>
           </a:p>
           <a:p>
             <a:pPr algn="l">
               <a:lnSpc>
-                <a:spcPts val="7699"/>
+                <a:spcPts val="7700"/>
               </a:lnSpc>
             </a:pPr>
           </a:p>
@@ -4523,12 +5105,12 @@
       </p:sp>
       <p:sp>
         <p:nvSpPr>
-          <p:cNvPr name="TextBox 3" id="3"/>
-          <p:cNvSpPr txBox="true"/>
+          <p:cNvPr id="3" name="TextBox 3"/>
+          <p:cNvSpPr txBox="1"/>
           <p:nvPr/>
         </p:nvSpPr>
         <p:spPr>
-          <a:xfrm rot="0">
+          <a:xfrm>
             <a:off x="478145" y="468350"/>
             <a:ext cx="16781155" cy="1377949"/>
           </a:xfrm>
@@ -4537,7 +5119,7 @@
           </a:prstGeom>
         </p:spPr>
         <p:txBody>
-          <a:bodyPr anchor="t" rtlCol="false" tIns="0" lIns="0" bIns="0" rIns="0">
+          <a:bodyPr lIns="0" tIns="0" rIns="0" bIns="0" rtlCol="0" anchor="t">
             <a:spAutoFit/>
           </a:bodyPr>
           <a:lstStyle/>
@@ -4551,29 +5133,38 @@
               </a:spcBef>
             </a:pPr>
             <a:r>
-              <a:rPr lang="en-US" b="true" sz="8000">
+              <a:rPr lang="en-US" sz="8000" b="1">
                 <a:solidFill>
                   <a:srgbClr val="171C24"/>
                 </a:solidFill>
-                <a:latin typeface="TT Hoves Bold"/>
-                <a:ea typeface="TT Hoves Bold"/>
-                <a:cs typeface="TT Hoves Bold"/>
-                <a:sym typeface="TT Hoves Bold"/>
+                <a:latin typeface="TT Hoves Bold" panose="02000003020000060003"/>
+                <a:ea typeface="TT Hoves Bold" panose="02000003020000060003"/>
+                <a:cs typeface="TT Hoves Bold" panose="02000003020000060003"/>
+                <a:sym typeface="TT Hoves Bold" panose="02000003020000060003"/>
               </a:rPr>
               <a:t>Algorit</a:t>
             </a:r>
             <a:r>
-              <a:rPr lang="en-US" b="true" sz="8000">
+              <a:rPr lang="en-US" sz="8000" b="1">
                 <a:solidFill>
                   <a:srgbClr val="171C24"/>
                 </a:solidFill>
-                <a:latin typeface="TT Hoves Bold"/>
-                <a:ea typeface="TT Hoves Bold"/>
-                <a:cs typeface="TT Hoves Bold"/>
-                <a:sym typeface="TT Hoves Bold"/>
+                <a:latin typeface="TT Hoves Bold" panose="02000003020000060003"/>
+                <a:ea typeface="TT Hoves Bold" panose="02000003020000060003"/>
+                <a:cs typeface="TT Hoves Bold" panose="02000003020000060003"/>
+                <a:sym typeface="TT Hoves Bold" panose="02000003020000060003"/>
               </a:rPr>
               <a:t>hm 1 - Branch and Bound</a:t>
             </a:r>
+            <a:endParaRPr lang="en-US" sz="8000" b="1">
+              <a:solidFill>
+                <a:srgbClr val="171C24"/>
+              </a:solidFill>
+              <a:latin typeface="TT Hoves Bold" panose="02000003020000060003"/>
+              <a:ea typeface="TT Hoves Bold" panose="02000003020000060003"/>
+              <a:cs typeface="TT Hoves Bold" panose="02000003020000060003"/>
+              <a:sym typeface="TT Hoves Bold" panose="02000003020000060003"/>
+            </a:endParaRPr>
           </a:p>
         </p:txBody>
       </p:sp>
@@ -4586,15 +5177,8 @@
 </file>
 
 <file path=ppt/slides/slide5.xml><?xml version="1.0" encoding="utf-8"?>
-<p:sld xmlns:p="http://schemas.openxmlformats.org/presentationml/2006/main" xmlns:a="http://schemas.openxmlformats.org/drawingml/2006/main">
+<p:sld xmlns:a="http://schemas.openxmlformats.org/drawingml/2006/main" xmlns:r="http://schemas.openxmlformats.org/officeDocument/2006/relationships" xmlns:p="http://schemas.openxmlformats.org/presentationml/2006/main">
   <p:cSld>
-    <p:bg>
-      <p:bgPr>
-        <a:solidFill>
-          <a:srgbClr val="F4EEEB"/>
-        </a:solidFill>
-      </p:bgPr>
-    </p:bg>
     <p:spTree>
       <p:nvGrpSpPr>
         <p:cNvPr id="1" name=""/>
@@ -4611,12 +5195,12 @@
       </p:grpSpPr>
       <p:sp>
         <p:nvSpPr>
-          <p:cNvPr name="TextBox 2" id="2"/>
-          <p:cNvSpPr txBox="true"/>
+          <p:cNvPr id="2" name="TextBox 2"/>
+          <p:cNvSpPr txBox="1"/>
           <p:nvPr/>
         </p:nvSpPr>
         <p:spPr>
-          <a:xfrm rot="0">
+          <a:xfrm>
             <a:off x="478145" y="3177298"/>
             <a:ext cx="8390578" cy="5270547"/>
           </a:xfrm>
@@ -4625,90 +5209,126 @@
           </a:prstGeom>
         </p:spPr>
         <p:txBody>
-          <a:bodyPr anchor="t" rtlCol="false" tIns="0" lIns="0" bIns="0" rIns="0">
+          <a:bodyPr lIns="0" tIns="0" rIns="0" bIns="0" rtlCol="0" anchor="t">
             <a:spAutoFit/>
           </a:bodyPr>
           <a:lstStyle/>
           <a:p>
             <a:pPr algn="l">
               <a:lnSpc>
-                <a:spcPts val="4862"/>
+                <a:spcPts val="4860"/>
               </a:lnSpc>
             </a:pPr>
             <a:r>
-              <a:rPr lang="en-US" sz="3473" b="true">
+              <a:rPr lang="en-US" sz="3475" b="1">
                 <a:solidFill>
                   <a:srgbClr val="171C24"/>
                 </a:solidFill>
-                <a:latin typeface="TT Hoves Bold"/>
-                <a:ea typeface="TT Hoves Bold"/>
-                <a:cs typeface="TT Hoves Bold"/>
-                <a:sym typeface="TT Hoves Bold"/>
+                <a:latin typeface="TT Hoves Bold" panose="02000003020000060003"/>
+                <a:ea typeface="TT Hoves Bold" panose="02000003020000060003"/>
+                <a:cs typeface="TT Hoves Bold" panose="02000003020000060003"/>
+                <a:sym typeface="TT Hoves Bold" panose="02000003020000060003"/>
               </a:rPr>
               <a:t>Pros (Advantages):</a:t>
             </a:r>
+            <a:endParaRPr lang="en-US" sz="3475" b="1">
+              <a:solidFill>
+                <a:srgbClr val="171C24"/>
+              </a:solidFill>
+              <a:latin typeface="TT Hoves Bold" panose="02000003020000060003"/>
+              <a:ea typeface="TT Hoves Bold" panose="02000003020000060003"/>
+              <a:cs typeface="TT Hoves Bold" panose="02000003020000060003"/>
+              <a:sym typeface="TT Hoves Bold" panose="02000003020000060003"/>
+            </a:endParaRPr>
           </a:p>
           <a:p>
             <a:pPr algn="l">
               <a:lnSpc>
-                <a:spcPts val="4862"/>
+                <a:spcPts val="4860"/>
               </a:lnSpc>
             </a:pPr>
             <a:r>
-              <a:rPr lang="en-US" sz="3473">
+              <a:rPr lang="en-US" sz="3475">
                 <a:solidFill>
                   <a:srgbClr val="171C24"/>
                 </a:solidFill>
-                <a:latin typeface="TT Hoves"/>
-                <a:ea typeface="TT Hoves"/>
-                <a:cs typeface="TT Hoves"/>
-                <a:sym typeface="TT Hoves"/>
+                <a:latin typeface="TT Hoves" panose="02000003020000060003"/>
+                <a:ea typeface="TT Hoves" panose="02000003020000060003"/>
+                <a:cs typeface="TT Hoves" panose="02000003020000060003"/>
+                <a:sym typeface="TT Hoves" panose="02000003020000060003"/>
               </a:rPr>
               <a:t>✅ Guaranteed Optimality: It always finds the mathematically perfect Global Minimum.</a:t>
             </a:r>
+            <a:endParaRPr lang="en-US" sz="3475">
+              <a:solidFill>
+                <a:srgbClr val="171C24"/>
+              </a:solidFill>
+              <a:latin typeface="TT Hoves" panose="02000003020000060003"/>
+              <a:ea typeface="TT Hoves" panose="02000003020000060003"/>
+              <a:cs typeface="TT Hoves" panose="02000003020000060003"/>
+              <a:sym typeface="TT Hoves" panose="02000003020000060003"/>
+            </a:endParaRPr>
           </a:p>
           <a:p>
             <a:pPr algn="l">
               <a:lnSpc>
-                <a:spcPts val="4862"/>
+                <a:spcPts val="4860"/>
               </a:lnSpc>
             </a:pPr>
             <a:r>
-              <a:rPr lang="en-US" sz="3473">
+              <a:rPr lang="en-US" sz="3475">
                 <a:solidFill>
                   <a:srgbClr val="171C24"/>
                 </a:solidFill>
-                <a:latin typeface="TT Hoves"/>
-                <a:ea typeface="TT Hoves"/>
-                <a:cs typeface="TT Hoves"/>
-                <a:sym typeface="TT Hoves"/>
+                <a:latin typeface="TT Hoves" panose="02000003020000060003"/>
+                <a:ea typeface="TT Hoves" panose="02000003020000060003"/>
+                <a:cs typeface="TT Hoves" panose="02000003020000060003"/>
+                <a:sym typeface="TT Hoves" panose="02000003020000060003"/>
               </a:rPr>
               <a:t>✅ Deterministic: If you run it 100 times, you get the exact same result 100 times.</a:t>
             </a:r>
+            <a:endParaRPr lang="en-US" sz="3475">
+              <a:solidFill>
+                <a:srgbClr val="171C24"/>
+              </a:solidFill>
+              <a:latin typeface="TT Hoves" panose="02000003020000060003"/>
+              <a:ea typeface="TT Hoves" panose="02000003020000060003"/>
+              <a:cs typeface="TT Hoves" panose="02000003020000060003"/>
+              <a:sym typeface="TT Hoves" panose="02000003020000060003"/>
+            </a:endParaRPr>
           </a:p>
           <a:p>
             <a:pPr algn="l">
               <a:lnSpc>
-                <a:spcPts val="4862"/>
+                <a:spcPts val="4860"/>
               </a:lnSpc>
             </a:pPr>
             <a:r>
-              <a:rPr lang="en-US" sz="3473">
+              <a:rPr lang="en-US" sz="3475">
                 <a:solidFill>
                   <a:srgbClr val="171C24"/>
                 </a:solidFill>
-                <a:latin typeface="TT Hoves"/>
-                <a:ea typeface="TT Hoves"/>
-                <a:cs typeface="TT Hoves"/>
-                <a:sym typeface="TT Hoves"/>
+                <a:latin typeface="TT Hoves" panose="02000003020000060003"/>
+                <a:ea typeface="TT Hoves" panose="02000003020000060003"/>
+                <a:cs typeface="TT Hoves" panose="02000003020000060003"/>
+                <a:sym typeface="TT Hoves" panose="02000003020000060003"/>
               </a:rPr>
               <a:t>✅ Simplicity: No complex parameters to tune (unlike AI algorithms).</a:t>
             </a:r>
+            <a:endParaRPr lang="en-US" sz="3475">
+              <a:solidFill>
+                <a:srgbClr val="171C24"/>
+              </a:solidFill>
+              <a:latin typeface="TT Hoves" panose="02000003020000060003"/>
+              <a:ea typeface="TT Hoves" panose="02000003020000060003"/>
+              <a:cs typeface="TT Hoves" panose="02000003020000060003"/>
+              <a:sym typeface="TT Hoves" panose="02000003020000060003"/>
+            </a:endParaRPr>
           </a:p>
           <a:p>
             <a:pPr algn="l">
               <a:lnSpc>
-                <a:spcPts val="3182"/>
+                <a:spcPts val="3180"/>
               </a:lnSpc>
             </a:pPr>
           </a:p>
@@ -4716,12 +5336,12 @@
       </p:sp>
       <p:sp>
         <p:nvSpPr>
-          <p:cNvPr name="TextBox 3" id="3"/>
-          <p:cNvSpPr txBox="true"/>
+          <p:cNvPr id="3" name="TextBox 3"/>
+          <p:cNvSpPr txBox="1"/>
           <p:nvPr/>
         </p:nvSpPr>
         <p:spPr>
-          <a:xfrm rot="0">
+          <a:xfrm>
             <a:off x="478145" y="468350"/>
             <a:ext cx="16781155" cy="1377949"/>
           </a:xfrm>
@@ -4730,7 +5350,7 @@
           </a:prstGeom>
         </p:spPr>
         <p:txBody>
-          <a:bodyPr anchor="t" rtlCol="false" tIns="0" lIns="0" bIns="0" rIns="0">
+          <a:bodyPr lIns="0" tIns="0" rIns="0" bIns="0" rtlCol="0" anchor="t">
             <a:spAutoFit/>
           </a:bodyPr>
           <a:lstStyle/>
@@ -4744,28 +5364,37 @@
               </a:spcBef>
             </a:pPr>
             <a:r>
-              <a:rPr lang="en-US" b="true" sz="8000">
+              <a:rPr lang="en-US" sz="8000" b="1">
                 <a:solidFill>
                   <a:srgbClr val="171C24"/>
                 </a:solidFill>
-                <a:latin typeface="TT Hoves Bold"/>
-                <a:ea typeface="TT Hoves Bold"/>
-                <a:cs typeface="TT Hoves Bold"/>
-                <a:sym typeface="TT Hoves Bold"/>
+                <a:latin typeface="TT Hoves Bold" panose="02000003020000060003"/>
+                <a:ea typeface="TT Hoves Bold" panose="02000003020000060003"/>
+                <a:cs typeface="TT Hoves Bold" panose="02000003020000060003"/>
+                <a:sym typeface="TT Hoves Bold" panose="02000003020000060003"/>
               </a:rPr>
               <a:t>Algorithmic Analysis</a:t>
             </a:r>
-          </a:p>
-        </p:txBody>
-      </p:sp>
-      <p:sp>
-        <p:nvSpPr>
-          <p:cNvPr name="TextBox 4" id="4"/>
-          <p:cNvSpPr txBox="true"/>
+            <a:endParaRPr lang="en-US" sz="8000" b="1">
+              <a:solidFill>
+                <a:srgbClr val="171C24"/>
+              </a:solidFill>
+              <a:latin typeface="TT Hoves Bold" panose="02000003020000060003"/>
+              <a:ea typeface="TT Hoves Bold" panose="02000003020000060003"/>
+              <a:cs typeface="TT Hoves Bold" panose="02000003020000060003"/>
+              <a:sym typeface="TT Hoves Bold" panose="02000003020000060003"/>
+            </a:endParaRPr>
+          </a:p>
+        </p:txBody>
+      </p:sp>
+      <p:sp>
+        <p:nvSpPr>
+          <p:cNvPr id="4" name="TextBox 4"/>
+          <p:cNvSpPr txBox="1"/>
           <p:nvPr/>
         </p:nvSpPr>
         <p:spPr>
-          <a:xfrm rot="0">
+          <a:xfrm>
             <a:off x="9144000" y="3177298"/>
             <a:ext cx="8390578" cy="5880147"/>
           </a:xfrm>
@@ -4774,109 +5403,145 @@
           </a:prstGeom>
         </p:spPr>
         <p:txBody>
-          <a:bodyPr anchor="t" rtlCol="false" tIns="0" lIns="0" bIns="0" rIns="0">
+          <a:bodyPr lIns="0" tIns="0" rIns="0" bIns="0" rtlCol="0" anchor="t">
             <a:spAutoFit/>
           </a:bodyPr>
           <a:lstStyle/>
           <a:p>
             <a:pPr algn="l">
               <a:lnSpc>
-                <a:spcPts val="4862"/>
+                <a:spcPts val="4860"/>
               </a:lnSpc>
             </a:pPr>
             <a:r>
-              <a:rPr lang="en-US" sz="3473" b="true">
+              <a:rPr lang="en-US" sz="3475" b="1">
                 <a:solidFill>
                   <a:srgbClr val="171C24"/>
                 </a:solidFill>
-                <a:latin typeface="TT Hoves Bold"/>
-                <a:ea typeface="TT Hoves Bold"/>
-                <a:cs typeface="TT Hoves Bold"/>
-                <a:sym typeface="TT Hoves Bold"/>
+                <a:latin typeface="TT Hoves Bold" panose="02000003020000060003"/>
+                <a:ea typeface="TT Hoves Bold" panose="02000003020000060003"/>
+                <a:cs typeface="TT Hoves Bold" panose="02000003020000060003"/>
+                <a:sym typeface="TT Hoves Bold" panose="02000003020000060003"/>
               </a:rPr>
               <a:t>Cons (Disadvantages):</a:t>
             </a:r>
+            <a:endParaRPr lang="en-US" sz="3475" b="1">
+              <a:solidFill>
+                <a:srgbClr val="171C24"/>
+              </a:solidFill>
+              <a:latin typeface="TT Hoves Bold" panose="02000003020000060003"/>
+              <a:ea typeface="TT Hoves Bold" panose="02000003020000060003"/>
+              <a:cs typeface="TT Hoves Bold" panose="02000003020000060003"/>
+              <a:sym typeface="TT Hoves Bold" panose="02000003020000060003"/>
+            </a:endParaRPr>
           </a:p>
           <a:p>
             <a:pPr algn="l">
               <a:lnSpc>
-                <a:spcPts val="4862"/>
+                <a:spcPts val="4860"/>
               </a:lnSpc>
             </a:pPr>
             <a:r>
-              <a:rPr lang="en-US" sz="3473">
+              <a:rPr lang="en-US" sz="3475">
                 <a:solidFill>
                   <a:srgbClr val="171C24"/>
                 </a:solidFill>
-                <a:latin typeface="TT Hoves"/>
-                <a:ea typeface="TT Hoves"/>
-                <a:cs typeface="TT Hoves"/>
-                <a:sym typeface="TT Hoves"/>
+                <a:latin typeface="TT Hoves" panose="02000003020000060003"/>
+                <a:ea typeface="TT Hoves" panose="02000003020000060003"/>
+                <a:cs typeface="TT Hoves" panose="02000003020000060003"/>
+                <a:sym typeface="TT Hoves" panose="02000003020000060003"/>
               </a:rPr>
               <a:t>❌ Exponential Time (): Adding just 1 city multiplies the calculation time enormously.</a:t>
             </a:r>
             <a:r>
-              <a:rPr lang="en-US" sz="3473">
+              <a:rPr lang="en-US" sz="3475">
                 <a:solidFill>
                   <a:srgbClr val="171C24"/>
                 </a:solidFill>
-                <a:latin typeface="TT Hoves"/>
-                <a:ea typeface="TT Hoves"/>
-                <a:cs typeface="TT Hoves"/>
-                <a:sym typeface="TT Hoves"/>
+                <a:latin typeface="TT Hoves" panose="02000003020000060003"/>
+                <a:ea typeface="TT Hoves" panose="02000003020000060003"/>
+                <a:cs typeface="TT Hoves" panose="02000003020000060003"/>
+                <a:sym typeface="TT Hoves" panose="02000003020000060003"/>
               </a:rPr>
               <a:t>.</a:t>
             </a:r>
+            <a:endParaRPr lang="en-US" sz="3475">
+              <a:solidFill>
+                <a:srgbClr val="171C24"/>
+              </a:solidFill>
+              <a:latin typeface="TT Hoves" panose="02000003020000060003"/>
+              <a:ea typeface="TT Hoves" panose="02000003020000060003"/>
+              <a:cs typeface="TT Hoves" panose="02000003020000060003"/>
+              <a:sym typeface="TT Hoves" panose="02000003020000060003"/>
+            </a:endParaRPr>
           </a:p>
           <a:p>
             <a:pPr algn="l">
               <a:lnSpc>
-                <a:spcPts val="4862"/>
+                <a:spcPts val="4860"/>
               </a:lnSpc>
             </a:pPr>
             <a:r>
-              <a:rPr lang="en-US" sz="3473">
+              <a:rPr lang="en-US" sz="3475">
                 <a:solidFill>
                   <a:srgbClr val="171C24"/>
                 </a:solidFill>
-                <a:latin typeface="TT Hoves"/>
-                <a:ea typeface="TT Hoves"/>
-                <a:cs typeface="TT Hoves"/>
-                <a:sym typeface="TT Hoves"/>
+                <a:latin typeface="TT Hoves" panose="02000003020000060003"/>
+                <a:ea typeface="TT Hoves" panose="02000003020000060003"/>
+                <a:cs typeface="TT Hoves" panose="02000003020000060003"/>
+                <a:sym typeface="TT Hoves" panose="02000003020000060003"/>
               </a:rPr>
               <a:t>❌ High Memory Usage: It creates millions of tree nodes, which can fill up RAM and crash the system.</a:t>
             </a:r>
+            <a:endParaRPr lang="en-US" sz="3475">
+              <a:solidFill>
+                <a:srgbClr val="171C24"/>
+              </a:solidFill>
+              <a:latin typeface="TT Hoves" panose="02000003020000060003"/>
+              <a:ea typeface="TT Hoves" panose="02000003020000060003"/>
+              <a:cs typeface="TT Hoves" panose="02000003020000060003"/>
+              <a:sym typeface="TT Hoves" panose="02000003020000060003"/>
+            </a:endParaRPr>
           </a:p>
           <a:p>
             <a:pPr algn="l">
               <a:lnSpc>
-                <a:spcPts val="4862"/>
+                <a:spcPts val="4860"/>
               </a:lnSpc>
             </a:pPr>
             <a:r>
-              <a:rPr lang="en-US" sz="3473">
+              <a:rPr lang="en-US" sz="3475">
                 <a:solidFill>
                   <a:srgbClr val="171C24"/>
                 </a:solidFill>
-                <a:latin typeface="TT Hoves"/>
-                <a:ea typeface="TT Hoves"/>
-                <a:cs typeface="TT Hoves"/>
-                <a:sym typeface="TT Hoves"/>
+                <a:latin typeface="TT Hoves" panose="02000003020000060003"/>
+                <a:ea typeface="TT Hoves" panose="02000003020000060003"/>
+                <a:cs typeface="TT Hoves" panose="02000003020000060003"/>
+                <a:sym typeface="TT Hoves" panose="02000003020000060003"/>
               </a:rPr>
               <a:t>❌ Not Scalable: It is practically impossible to use for  on standard laptops.</a:t>
             </a:r>
+            <a:endParaRPr lang="en-US" sz="3475">
+              <a:solidFill>
+                <a:srgbClr val="171C24"/>
+              </a:solidFill>
+              <a:latin typeface="TT Hoves" panose="02000003020000060003"/>
+              <a:ea typeface="TT Hoves" panose="02000003020000060003"/>
+              <a:cs typeface="TT Hoves" panose="02000003020000060003"/>
+              <a:sym typeface="TT Hoves" panose="02000003020000060003"/>
+            </a:endParaRPr>
           </a:p>
           <a:p>
             <a:pPr algn="l">
               <a:lnSpc>
-                <a:spcPts val="4862"/>
+                <a:spcPts val="4860"/>
               </a:lnSpc>
             </a:pPr>
           </a:p>
           <a:p>
             <a:pPr algn="l">
               <a:lnSpc>
-                <a:spcPts val="3182"/>
+                <a:spcPts val="3180"/>
               </a:lnSpc>
             </a:pPr>
           </a:p>
@@ -4891,15 +5556,8 @@
 </file>
 
 <file path=ppt/slides/slide6.xml><?xml version="1.0" encoding="utf-8"?>
-<p:sld xmlns:p="http://schemas.openxmlformats.org/presentationml/2006/main" xmlns:a="http://schemas.openxmlformats.org/drawingml/2006/main">
+<p:sld xmlns:a="http://schemas.openxmlformats.org/drawingml/2006/main" xmlns:r="http://schemas.openxmlformats.org/officeDocument/2006/relationships" xmlns:p="http://schemas.openxmlformats.org/presentationml/2006/main">
   <p:cSld>
-    <p:bg>
-      <p:bgPr>
-        <a:solidFill>
-          <a:srgbClr val="F4EEEB"/>
-        </a:solidFill>
-      </p:bgPr>
-    </p:bg>
     <p:spTree>
       <p:nvGrpSpPr>
         <p:cNvPr id="1" name=""/>
@@ -4916,12 +5574,12 @@
       </p:grpSpPr>
       <p:sp>
         <p:nvSpPr>
-          <p:cNvPr name="TextBox 2" id="2"/>
-          <p:cNvSpPr txBox="true"/>
+          <p:cNvPr id="2" name="TextBox 2"/>
+          <p:cNvSpPr txBox="1"/>
           <p:nvPr/>
         </p:nvSpPr>
         <p:spPr>
-          <a:xfrm rot="0">
+          <a:xfrm>
             <a:off x="1240433" y="2202597"/>
             <a:ext cx="16018867" cy="6765925"/>
           </a:xfrm>
@@ -4930,176 +5588,230 @@
           </a:prstGeom>
         </p:spPr>
         <p:txBody>
-          <a:bodyPr anchor="t" rtlCol="false" tIns="0" lIns="0" bIns="0" rIns="0">
+          <a:bodyPr lIns="0" tIns="0" rIns="0" bIns="0" rtlCol="0" anchor="t">
             <a:spAutoFit/>
           </a:bodyPr>
           <a:lstStyle/>
           <a:p>
-            <a:pPr algn="l" marL="1187449" indent="-593725" lvl="1">
+            <a:pPr marL="1187450" lvl="1" indent="-593725" algn="l">
               <a:lnSpc>
-                <a:spcPts val="7699"/>
+                <a:spcPts val="7700"/>
               </a:lnSpc>
-              <a:buFont typeface="Arial"/>
+              <a:buFont typeface="Arial" panose="020B0604020202020204"/>
               <a:buChar char="•"/>
             </a:pPr>
             <a:r>
-              <a:rPr lang="en-US" sz="5499">
+              <a:rPr lang="en-US" sz="5500">
                 <a:solidFill>
                   <a:srgbClr val="171C24"/>
                 </a:solidFill>
-                <a:latin typeface="TT Hoves"/>
-                <a:ea typeface="TT Hoves"/>
-                <a:cs typeface="TT Hoves"/>
-                <a:sym typeface="TT Hoves"/>
+                <a:latin typeface="TT Hoves" panose="02000003020000060003"/>
+                <a:ea typeface="TT Hoves" panose="02000003020000060003"/>
+                <a:cs typeface="TT Hoves" panose="02000003020000060003"/>
+                <a:sym typeface="TT Hoves" panose="02000003020000060003"/>
               </a:rPr>
               <a:t>Type: Heuristic (Approximation).</a:t>
             </a:r>
-          </a:p>
-          <a:p>
-            <a:pPr algn="l" marL="1187449" indent="-593725" lvl="1">
+            <a:endParaRPr lang="en-US" sz="5500">
+              <a:solidFill>
+                <a:srgbClr val="171C24"/>
+              </a:solidFill>
+              <a:latin typeface="TT Hoves" panose="02000003020000060003"/>
+              <a:ea typeface="TT Hoves" panose="02000003020000060003"/>
+              <a:cs typeface="TT Hoves" panose="02000003020000060003"/>
+              <a:sym typeface="TT Hoves" panose="02000003020000060003"/>
+            </a:endParaRPr>
+          </a:p>
+          <a:p>
+            <a:pPr marL="1187450" lvl="1" indent="-593725" algn="l">
               <a:lnSpc>
-                <a:spcPts val="7699"/>
+                <a:spcPts val="7700"/>
               </a:lnSpc>
-              <a:buFont typeface="Arial"/>
+              <a:buFont typeface="Arial" panose="020B0604020202020204"/>
               <a:buChar char="•"/>
             </a:pPr>
             <a:r>
-              <a:rPr lang="en-US" sz="5499">
+              <a:rPr lang="en-US" sz="5500">
                 <a:solidFill>
                   <a:srgbClr val="171C24"/>
                 </a:solidFill>
-                <a:latin typeface="TT Hoves"/>
-                <a:ea typeface="TT Hoves"/>
-                <a:cs typeface="TT Hoves"/>
-                <a:sym typeface="TT Hoves"/>
+                <a:latin typeface="TT Hoves" panose="02000003020000060003"/>
+                <a:ea typeface="TT Hoves" panose="02000003020000060003"/>
+                <a:cs typeface="TT Hoves" panose="02000003020000060003"/>
+                <a:sym typeface="TT Hoves" panose="02000003020000060003"/>
               </a:rPr>
               <a:t>Inspi</a:t>
             </a:r>
             <a:r>
-              <a:rPr lang="en-US" sz="5499">
+              <a:rPr lang="en-US" sz="5500">
                 <a:solidFill>
                   <a:srgbClr val="171C24"/>
                 </a:solidFill>
-                <a:latin typeface="TT Hoves"/>
-                <a:ea typeface="TT Hoves"/>
-                <a:cs typeface="TT Hoves"/>
-                <a:sym typeface="TT Hoves"/>
+                <a:latin typeface="TT Hoves" panose="02000003020000060003"/>
+                <a:ea typeface="TT Hoves" panose="02000003020000060003"/>
+                <a:cs typeface="TT Hoves" panose="02000003020000060003"/>
+                <a:sym typeface="TT Hoves" panose="02000003020000060003"/>
               </a:rPr>
               <a:t>ration: Real ants finding food.</a:t>
             </a:r>
-          </a:p>
-          <a:p>
-            <a:pPr algn="l" marL="1187449" indent="-593725" lvl="1">
+            <a:endParaRPr lang="en-US" sz="5500">
+              <a:solidFill>
+                <a:srgbClr val="171C24"/>
+              </a:solidFill>
+              <a:latin typeface="TT Hoves" panose="02000003020000060003"/>
+              <a:ea typeface="TT Hoves" panose="02000003020000060003"/>
+              <a:cs typeface="TT Hoves" panose="02000003020000060003"/>
+              <a:sym typeface="TT Hoves" panose="02000003020000060003"/>
+            </a:endParaRPr>
+          </a:p>
+          <a:p>
+            <a:pPr marL="1187450" lvl="1" indent="-593725" algn="l">
               <a:lnSpc>
-                <a:spcPts val="7699"/>
+                <a:spcPts val="7700"/>
               </a:lnSpc>
-              <a:buFont typeface="Arial"/>
+              <a:buFont typeface="Arial" panose="020B0604020202020204"/>
               <a:buChar char="•"/>
             </a:pPr>
             <a:r>
-              <a:rPr lang="en-US" sz="5499">
+              <a:rPr lang="en-US" sz="5500">
                 <a:solidFill>
                   <a:srgbClr val="171C24"/>
                 </a:solidFill>
-                <a:latin typeface="TT Hoves"/>
-                <a:ea typeface="TT Hoves"/>
-                <a:cs typeface="TT Hoves"/>
-                <a:sym typeface="TT Hoves"/>
+                <a:latin typeface="TT Hoves" panose="02000003020000060003"/>
+                <a:ea typeface="TT Hoves" panose="02000003020000060003"/>
+                <a:cs typeface="TT Hoves" panose="02000003020000060003"/>
+                <a:sym typeface="TT Hoves" panose="02000003020000060003"/>
               </a:rPr>
               <a:t>Why u</a:t>
             </a:r>
             <a:r>
-              <a:rPr lang="en-US" sz="5499">
+              <a:rPr lang="en-US" sz="5500">
                 <a:solidFill>
                   <a:srgbClr val="171C24"/>
                 </a:solidFill>
-                <a:latin typeface="TT Hoves"/>
-                <a:ea typeface="TT Hoves"/>
-                <a:cs typeface="TT Hoves"/>
-                <a:sym typeface="TT Hoves"/>
+                <a:latin typeface="TT Hoves" panose="02000003020000060003"/>
+                <a:ea typeface="TT Hoves" panose="02000003020000060003"/>
+                <a:cs typeface="TT Hoves" panose="02000003020000060003"/>
+                <a:sym typeface="TT Hoves" panose="02000003020000060003"/>
               </a:rPr>
               <a:t>se it?</a:t>
             </a:r>
-          </a:p>
-          <a:p>
-            <a:pPr algn="l" marL="1187449" indent="-593725" lvl="1">
+            <a:endParaRPr lang="en-US" sz="5500">
+              <a:solidFill>
+                <a:srgbClr val="171C24"/>
+              </a:solidFill>
+              <a:latin typeface="TT Hoves" panose="02000003020000060003"/>
+              <a:ea typeface="TT Hoves" panose="02000003020000060003"/>
+              <a:cs typeface="TT Hoves" panose="02000003020000060003"/>
+              <a:sym typeface="TT Hoves" panose="02000003020000060003"/>
+            </a:endParaRPr>
+          </a:p>
+          <a:p>
+            <a:pPr marL="1187450" lvl="1" indent="-593725" algn="l">
               <a:lnSpc>
-                <a:spcPts val="7699"/>
+                <a:spcPts val="7700"/>
               </a:lnSpc>
-              <a:buFont typeface="Arial"/>
+              <a:buFont typeface="Arial" panose="020B0604020202020204"/>
               <a:buChar char="•"/>
             </a:pPr>
             <a:r>
-              <a:rPr lang="en-US" sz="5499">
+              <a:rPr lang="en-US" sz="5500">
                 <a:solidFill>
                   <a:srgbClr val="171C24"/>
                 </a:solidFill>
-                <a:latin typeface="TT Hoves"/>
-                <a:ea typeface="TT Hoves"/>
-                <a:cs typeface="TT Hoves"/>
-                <a:sym typeface="TT Hoves"/>
+                <a:latin typeface="TT Hoves" panose="02000003020000060003"/>
+                <a:ea typeface="TT Hoves" panose="02000003020000060003"/>
+                <a:cs typeface="TT Hoves" panose="02000003020000060003"/>
+                <a:sym typeface="TT Hoves" panose="02000003020000060003"/>
               </a:rPr>
               <a:t>Branch and Bound is too slow for 50+ cities.</a:t>
             </a:r>
-          </a:p>
-          <a:p>
-            <a:pPr algn="l" marL="1187449" indent="-593725" lvl="1">
+            <a:endParaRPr lang="en-US" sz="5500">
+              <a:solidFill>
+                <a:srgbClr val="171C24"/>
+              </a:solidFill>
+              <a:latin typeface="TT Hoves" panose="02000003020000060003"/>
+              <a:ea typeface="TT Hoves" panose="02000003020000060003"/>
+              <a:cs typeface="TT Hoves" panose="02000003020000060003"/>
+              <a:sym typeface="TT Hoves" panose="02000003020000060003"/>
+            </a:endParaRPr>
+          </a:p>
+          <a:p>
+            <a:pPr marL="1187450" lvl="1" indent="-593725" algn="l">
               <a:lnSpc>
-                <a:spcPts val="7699"/>
+                <a:spcPts val="7700"/>
               </a:lnSpc>
-              <a:buFont typeface="Arial"/>
+              <a:buFont typeface="Arial" panose="020B0604020202020204"/>
               <a:buChar char="•"/>
             </a:pPr>
             <a:r>
-              <a:rPr lang="en-US" sz="5499">
+              <a:rPr lang="en-US" sz="5500">
                 <a:solidFill>
                   <a:srgbClr val="171C24"/>
                 </a:solidFill>
-                <a:latin typeface="TT Hoves"/>
-                <a:ea typeface="TT Hoves"/>
-                <a:cs typeface="TT Hoves"/>
-                <a:sym typeface="TT Hoves"/>
+                <a:latin typeface="TT Hoves" panose="02000003020000060003"/>
+                <a:ea typeface="TT Hoves" panose="02000003020000060003"/>
+                <a:cs typeface="TT Hoves" panose="02000003020000060003"/>
+                <a:sym typeface="TT Hoves" panose="02000003020000060003"/>
               </a:rPr>
               <a:t>Ant Colony is</a:t>
             </a:r>
             <a:r>
-              <a:rPr lang="en-US" sz="5499">
+              <a:rPr lang="en-US" sz="5500">
                 <a:solidFill>
                   <a:srgbClr val="171C24"/>
                 </a:solidFill>
-                <a:latin typeface="TT Hoves"/>
-                <a:ea typeface="TT Hoves"/>
-                <a:cs typeface="TT Hoves"/>
-                <a:sym typeface="TT Hoves"/>
+                <a:latin typeface="TT Hoves" panose="02000003020000060003"/>
+                <a:ea typeface="TT Hoves" panose="02000003020000060003"/>
+                <a:cs typeface="TT Hoves" panose="02000003020000060003"/>
+                <a:sym typeface="TT Hoves" panose="02000003020000060003"/>
               </a:rPr>
               <a:t> fast.</a:t>
             </a:r>
-          </a:p>
-          <a:p>
-            <a:pPr algn="l" marL="1187449" indent="-593725" lvl="1">
+            <a:endParaRPr lang="en-US" sz="5500">
+              <a:solidFill>
+                <a:srgbClr val="171C24"/>
+              </a:solidFill>
+              <a:latin typeface="TT Hoves" panose="02000003020000060003"/>
+              <a:ea typeface="TT Hoves" panose="02000003020000060003"/>
+              <a:cs typeface="TT Hoves" panose="02000003020000060003"/>
+              <a:sym typeface="TT Hoves" panose="02000003020000060003"/>
+            </a:endParaRPr>
+          </a:p>
+          <a:p>
+            <a:pPr marL="1187450" lvl="1" indent="-593725" algn="l">
               <a:lnSpc>
-                <a:spcPts val="7699"/>
+                <a:spcPts val="7700"/>
               </a:lnSpc>
-              <a:buFont typeface="Arial"/>
+              <a:buFont typeface="Arial" panose="020B0604020202020204"/>
               <a:buChar char="•"/>
             </a:pPr>
             <a:r>
-              <a:rPr lang="en-US" sz="5499">
+              <a:rPr lang="en-US" sz="5500">
                 <a:solidFill>
                   <a:srgbClr val="171C24"/>
                 </a:solidFill>
-                <a:latin typeface="TT Hoves"/>
-                <a:ea typeface="TT Hoves"/>
-                <a:cs typeface="TT Hoves"/>
-                <a:sym typeface="TT Hoves"/>
+                <a:latin typeface="TT Hoves" panose="02000003020000060003"/>
+                <a:ea typeface="TT Hoves" panose="02000003020000060003"/>
+                <a:cs typeface="TT Hoves" panose="02000003020000060003"/>
+                <a:sym typeface="TT Hoves" panose="02000003020000060003"/>
               </a:rPr>
               <a:t>Key Concept: Pheromones (Scent trails).</a:t>
             </a:r>
+            <a:endParaRPr lang="en-US" sz="5500">
+              <a:solidFill>
+                <a:srgbClr val="171C24"/>
+              </a:solidFill>
+              <a:latin typeface="TT Hoves" panose="02000003020000060003"/>
+              <a:ea typeface="TT Hoves" panose="02000003020000060003"/>
+              <a:cs typeface="TT Hoves" panose="02000003020000060003"/>
+              <a:sym typeface="TT Hoves" panose="02000003020000060003"/>
+            </a:endParaRPr>
           </a:p>
           <a:p>
             <a:pPr algn="l">
               <a:lnSpc>
-                <a:spcPts val="7699"/>
+                <a:spcPts val="7700"/>
               </a:lnSpc>
             </a:pPr>
           </a:p>
@@ -5107,12 +5819,12 @@
       </p:sp>
       <p:sp>
         <p:nvSpPr>
-          <p:cNvPr name="TextBox 3" id="3"/>
-          <p:cNvSpPr txBox="true"/>
+          <p:cNvPr id="3" name="TextBox 3"/>
+          <p:cNvSpPr txBox="1"/>
           <p:nvPr/>
         </p:nvSpPr>
         <p:spPr>
-          <a:xfrm rot="0">
+          <a:xfrm>
             <a:off x="-434667" y="314327"/>
             <a:ext cx="19157333" cy="1285871"/>
           </a:xfrm>
@@ -5121,7 +5833,7 @@
           </a:prstGeom>
         </p:spPr>
         <p:txBody>
-          <a:bodyPr anchor="t" rtlCol="false" tIns="0" lIns="0" bIns="0" rIns="0">
+          <a:bodyPr lIns="0" tIns="0" rIns="0" bIns="0" rtlCol="0" anchor="t">
             <a:spAutoFit/>
           </a:bodyPr>
           <a:lstStyle/>
@@ -5135,29 +5847,38 @@
               </a:spcBef>
             </a:pPr>
             <a:r>
-              <a:rPr lang="en-US" b="true" sz="7500">
+              <a:rPr lang="en-US" sz="7500" b="1">
                 <a:solidFill>
                   <a:srgbClr val="171C24"/>
                 </a:solidFill>
-                <a:latin typeface="TT Hoves Bold"/>
-                <a:ea typeface="TT Hoves Bold"/>
-                <a:cs typeface="TT Hoves Bold"/>
-                <a:sym typeface="TT Hoves Bold"/>
+                <a:latin typeface="TT Hoves Bold" panose="02000003020000060003"/>
+                <a:ea typeface="TT Hoves Bold" panose="02000003020000060003"/>
+                <a:cs typeface="TT Hoves Bold" panose="02000003020000060003"/>
+                <a:sym typeface="TT Hoves Bold" panose="02000003020000060003"/>
               </a:rPr>
               <a:t>Algorit</a:t>
             </a:r>
             <a:r>
-              <a:rPr lang="en-US" b="true" sz="7500">
+              <a:rPr lang="en-US" sz="7500" b="1">
                 <a:solidFill>
                   <a:srgbClr val="171C24"/>
                 </a:solidFill>
-                <a:latin typeface="TT Hoves Bold"/>
-                <a:ea typeface="TT Hoves Bold"/>
-                <a:cs typeface="TT Hoves Bold"/>
-                <a:sym typeface="TT Hoves Bold"/>
+                <a:latin typeface="TT Hoves Bold" panose="02000003020000060003"/>
+                <a:ea typeface="TT Hoves Bold" panose="02000003020000060003"/>
+                <a:cs typeface="TT Hoves Bold" panose="02000003020000060003"/>
+                <a:sym typeface="TT Hoves Bold" panose="02000003020000060003"/>
               </a:rPr>
               <a:t>hm 2 - Ant Colony Optimization</a:t>
             </a:r>
+            <a:endParaRPr lang="en-US" sz="7500" b="1">
+              <a:solidFill>
+                <a:srgbClr val="171C24"/>
+              </a:solidFill>
+              <a:latin typeface="TT Hoves Bold" panose="02000003020000060003"/>
+              <a:ea typeface="TT Hoves Bold" panose="02000003020000060003"/>
+              <a:cs typeface="TT Hoves Bold" panose="02000003020000060003"/>
+              <a:sym typeface="TT Hoves Bold" panose="02000003020000060003"/>
+            </a:endParaRPr>
           </a:p>
         </p:txBody>
       </p:sp>
@@ -5170,15 +5891,8 @@
 </file>
 
 <file path=ppt/slides/slide7.xml><?xml version="1.0" encoding="utf-8"?>
-<p:sld xmlns:p="http://schemas.openxmlformats.org/presentationml/2006/main" xmlns:a="http://schemas.openxmlformats.org/drawingml/2006/main">
+<p:sld xmlns:a="http://schemas.openxmlformats.org/drawingml/2006/main" xmlns:r="http://schemas.openxmlformats.org/officeDocument/2006/relationships" xmlns:p="http://schemas.openxmlformats.org/presentationml/2006/main">
   <p:cSld>
-    <p:bg>
-      <p:bgPr>
-        <a:solidFill>
-          <a:srgbClr val="F4EEEB"/>
-        </a:solidFill>
-      </p:bgPr>
-    </p:bg>
     <p:spTree>
       <p:nvGrpSpPr>
         <p:cNvPr id="1" name=""/>
@@ -5195,12 +5909,12 @@
       </p:grpSpPr>
       <p:sp>
         <p:nvSpPr>
-          <p:cNvPr name="TextBox 2" id="2"/>
-          <p:cNvSpPr txBox="true"/>
+          <p:cNvPr id="2" name="TextBox 2"/>
+          <p:cNvSpPr txBox="1"/>
           <p:nvPr/>
         </p:nvSpPr>
         <p:spPr>
-          <a:xfrm rot="0">
+          <a:xfrm>
             <a:off x="-434667" y="314327"/>
             <a:ext cx="19157333" cy="1285871"/>
           </a:xfrm>
@@ -5209,7 +5923,7 @@
           </a:prstGeom>
         </p:spPr>
         <p:txBody>
-          <a:bodyPr anchor="t" rtlCol="false" tIns="0" lIns="0" bIns="0" rIns="0">
+          <a:bodyPr lIns="0" tIns="0" rIns="0" bIns="0" rtlCol="0" anchor="t">
             <a:spAutoFit/>
           </a:bodyPr>
           <a:lstStyle/>
@@ -5223,28 +5937,37 @@
               </a:spcBef>
             </a:pPr>
             <a:r>
-              <a:rPr lang="en-US" b="true" sz="7500">
+              <a:rPr lang="en-US" sz="7500" b="1">
                 <a:solidFill>
                   <a:srgbClr val="171C24"/>
                 </a:solidFill>
-                <a:latin typeface="TT Hoves Bold"/>
-                <a:ea typeface="TT Hoves Bold"/>
-                <a:cs typeface="TT Hoves Bold"/>
-                <a:sym typeface="TT Hoves Bold"/>
+                <a:latin typeface="TT Hoves Bold" panose="02000003020000060003"/>
+                <a:ea typeface="TT Hoves Bold" panose="02000003020000060003"/>
+                <a:cs typeface="TT Hoves Bold" panose="02000003020000060003"/>
+                <a:sym typeface="TT Hoves Bold" panose="02000003020000060003"/>
               </a:rPr>
               <a:t>Algorithmic Analysis</a:t>
             </a:r>
-          </a:p>
-        </p:txBody>
-      </p:sp>
-      <p:sp>
-        <p:nvSpPr>
-          <p:cNvPr name="TextBox 3" id="3"/>
-          <p:cNvSpPr txBox="true"/>
+            <a:endParaRPr lang="en-US" sz="7500" b="1">
+              <a:solidFill>
+                <a:srgbClr val="171C24"/>
+              </a:solidFill>
+              <a:latin typeface="TT Hoves Bold" panose="02000003020000060003"/>
+              <a:ea typeface="TT Hoves Bold" panose="02000003020000060003"/>
+              <a:cs typeface="TT Hoves Bold" panose="02000003020000060003"/>
+              <a:sym typeface="TT Hoves Bold" panose="02000003020000060003"/>
+            </a:endParaRPr>
+          </a:p>
+        </p:txBody>
+      </p:sp>
+      <p:sp>
+        <p:nvSpPr>
+          <p:cNvPr id="3" name="TextBox 3"/>
+          <p:cNvSpPr txBox="1"/>
           <p:nvPr/>
         </p:nvSpPr>
         <p:spPr>
-          <a:xfrm rot="0">
+          <a:xfrm>
             <a:off x="478145" y="2257061"/>
             <a:ext cx="8390578" cy="4660947"/>
           </a:xfrm>
@@ -5253,90 +5976,126 @@
           </a:prstGeom>
         </p:spPr>
         <p:txBody>
-          <a:bodyPr anchor="t" rtlCol="false" tIns="0" lIns="0" bIns="0" rIns="0">
+          <a:bodyPr lIns="0" tIns="0" rIns="0" bIns="0" rtlCol="0" anchor="t">
             <a:spAutoFit/>
           </a:bodyPr>
           <a:lstStyle/>
           <a:p>
             <a:pPr algn="l">
               <a:lnSpc>
-                <a:spcPts val="4862"/>
+                <a:spcPts val="4860"/>
               </a:lnSpc>
             </a:pPr>
             <a:r>
-              <a:rPr lang="en-US" sz="3473" b="true">
+              <a:rPr lang="en-US" sz="3475" b="1">
                 <a:solidFill>
                   <a:srgbClr val="171C24"/>
                 </a:solidFill>
-                <a:latin typeface="TT Hoves Bold"/>
-                <a:ea typeface="TT Hoves Bold"/>
-                <a:cs typeface="TT Hoves Bold"/>
-                <a:sym typeface="TT Hoves Bold"/>
+                <a:latin typeface="TT Hoves Bold" panose="02000003020000060003"/>
+                <a:ea typeface="TT Hoves Bold" panose="02000003020000060003"/>
+                <a:cs typeface="TT Hoves Bold" panose="02000003020000060003"/>
+                <a:sym typeface="TT Hoves Bold" panose="02000003020000060003"/>
               </a:rPr>
               <a:t>Pros (Advantages):</a:t>
             </a:r>
+            <a:endParaRPr lang="en-US" sz="3475" b="1">
+              <a:solidFill>
+                <a:srgbClr val="171C24"/>
+              </a:solidFill>
+              <a:latin typeface="TT Hoves Bold" panose="02000003020000060003"/>
+              <a:ea typeface="TT Hoves Bold" panose="02000003020000060003"/>
+              <a:cs typeface="TT Hoves Bold" panose="02000003020000060003"/>
+              <a:sym typeface="TT Hoves Bold" panose="02000003020000060003"/>
+            </a:endParaRPr>
           </a:p>
           <a:p>
             <a:pPr algn="l">
               <a:lnSpc>
-                <a:spcPts val="4862"/>
+                <a:spcPts val="4860"/>
               </a:lnSpc>
             </a:pPr>
             <a:r>
-              <a:rPr lang="en-US" sz="3473">
+              <a:rPr lang="en-US" sz="3475">
                 <a:solidFill>
                   <a:srgbClr val="171C24"/>
                 </a:solidFill>
-                <a:latin typeface="TT Hoves"/>
-                <a:ea typeface="TT Hoves"/>
-                <a:cs typeface="TT Hoves"/>
-                <a:sym typeface="TT Hoves"/>
+                <a:latin typeface="TT Hoves" panose="02000003020000060003"/>
+                <a:ea typeface="TT Hoves" panose="02000003020000060003"/>
+                <a:cs typeface="TT Hoves" panose="02000003020000060003"/>
+                <a:sym typeface="TT Hoves" panose="02000003020000060003"/>
               </a:rPr>
               <a:t>✅ Highly Scalable: Can solve large problems () in seconds.</a:t>
             </a:r>
+            <a:endParaRPr lang="en-US" sz="3475">
+              <a:solidFill>
+                <a:srgbClr val="171C24"/>
+              </a:solidFill>
+              <a:latin typeface="TT Hoves" panose="02000003020000060003"/>
+              <a:ea typeface="TT Hoves" panose="02000003020000060003"/>
+              <a:cs typeface="TT Hoves" panose="02000003020000060003"/>
+              <a:sym typeface="TT Hoves" panose="02000003020000060003"/>
+            </a:endParaRPr>
           </a:p>
           <a:p>
             <a:pPr algn="l">
               <a:lnSpc>
-                <a:spcPts val="4862"/>
+                <a:spcPts val="4860"/>
               </a:lnSpc>
             </a:pPr>
             <a:r>
-              <a:rPr lang="en-US" sz="3473">
+              <a:rPr lang="en-US" sz="3475">
                 <a:solidFill>
                   <a:srgbClr val="171C24"/>
                 </a:solidFill>
-                <a:latin typeface="TT Hoves"/>
-                <a:ea typeface="TT Hoves"/>
-                <a:cs typeface="TT Hoves"/>
-                <a:sym typeface="TT Hoves"/>
+                <a:latin typeface="TT Hoves" panose="02000003020000060003"/>
+                <a:ea typeface="TT Hoves" panose="02000003020000060003"/>
+                <a:cs typeface="TT Hoves" panose="02000003020000060003"/>
+                <a:sym typeface="TT Hoves" panose="02000003020000060003"/>
               </a:rPr>
               <a:t>✅ Fast Convergence: Polynomial Time (). It finds good paths almost instantly.</a:t>
             </a:r>
+            <a:endParaRPr lang="en-US" sz="3475">
+              <a:solidFill>
+                <a:srgbClr val="171C24"/>
+              </a:solidFill>
+              <a:latin typeface="TT Hoves" panose="02000003020000060003"/>
+              <a:ea typeface="TT Hoves" panose="02000003020000060003"/>
+              <a:cs typeface="TT Hoves" panose="02000003020000060003"/>
+              <a:sym typeface="TT Hoves" panose="02000003020000060003"/>
+            </a:endParaRPr>
           </a:p>
           <a:p>
             <a:pPr algn="l">
               <a:lnSpc>
-                <a:spcPts val="4862"/>
+                <a:spcPts val="4860"/>
               </a:lnSpc>
             </a:pPr>
             <a:r>
-              <a:rPr lang="en-US" sz="3473">
+              <a:rPr lang="en-US" sz="3475">
                 <a:solidFill>
                   <a:srgbClr val="171C24"/>
                 </a:solidFill>
-                <a:latin typeface="TT Hoves"/>
-                <a:ea typeface="TT Hoves"/>
-                <a:cs typeface="TT Hoves"/>
-                <a:sym typeface="TT Hoves"/>
+                <a:latin typeface="TT Hoves" panose="02000003020000060003"/>
+                <a:ea typeface="TT Hoves" panose="02000003020000060003"/>
+                <a:cs typeface="TT Hoves" panose="02000003020000060003"/>
+                <a:sym typeface="TT Hoves" panose="02000003020000060003"/>
               </a:rPr>
               <a:t>✅ Adaptive: The "Pheromone" system allows it to learn and escape local traps.</a:t>
             </a:r>
+            <a:endParaRPr lang="en-US" sz="3475">
+              <a:solidFill>
+                <a:srgbClr val="171C24"/>
+              </a:solidFill>
+              <a:latin typeface="TT Hoves" panose="02000003020000060003"/>
+              <a:ea typeface="TT Hoves" panose="02000003020000060003"/>
+              <a:cs typeface="TT Hoves" panose="02000003020000060003"/>
+              <a:sym typeface="TT Hoves" panose="02000003020000060003"/>
+            </a:endParaRPr>
           </a:p>
           <a:p>
             <a:pPr algn="l">
               <a:lnSpc>
-                <a:spcPts val="3182"/>
+                <a:spcPts val="3180"/>
               </a:lnSpc>
             </a:pPr>
           </a:p>
@@ -5344,12 +6103,12 @@
       </p:sp>
       <p:sp>
         <p:nvSpPr>
-          <p:cNvPr name="TextBox 4" id="4"/>
-          <p:cNvSpPr txBox="true"/>
+          <p:cNvPr id="4" name="TextBox 4"/>
+          <p:cNvSpPr txBox="1"/>
           <p:nvPr/>
         </p:nvSpPr>
         <p:spPr>
-          <a:xfrm rot="0">
+          <a:xfrm>
             <a:off x="9144000" y="2257061"/>
             <a:ext cx="8390578" cy="6489747"/>
           </a:xfrm>
@@ -5358,90 +6117,126 @@
           </a:prstGeom>
         </p:spPr>
         <p:txBody>
-          <a:bodyPr anchor="t" rtlCol="false" tIns="0" lIns="0" bIns="0" rIns="0">
+          <a:bodyPr lIns="0" tIns="0" rIns="0" bIns="0" rtlCol="0" anchor="t">
             <a:spAutoFit/>
           </a:bodyPr>
           <a:lstStyle/>
           <a:p>
             <a:pPr algn="l">
               <a:lnSpc>
-                <a:spcPts val="4862"/>
+                <a:spcPts val="4860"/>
               </a:lnSpc>
             </a:pPr>
             <a:r>
-              <a:rPr lang="en-US" sz="3473" b="true">
+              <a:rPr lang="en-US" sz="3475" b="1">
                 <a:solidFill>
                   <a:srgbClr val="171C24"/>
                 </a:solidFill>
-                <a:latin typeface="TT Hoves Bold"/>
-                <a:ea typeface="TT Hoves Bold"/>
-                <a:cs typeface="TT Hoves Bold"/>
-                <a:sym typeface="TT Hoves Bold"/>
+                <a:latin typeface="TT Hoves Bold" panose="02000003020000060003"/>
+                <a:ea typeface="TT Hoves Bold" panose="02000003020000060003"/>
+                <a:cs typeface="TT Hoves Bold" panose="02000003020000060003"/>
+                <a:sym typeface="TT Hoves Bold" panose="02000003020000060003"/>
               </a:rPr>
               <a:t>Cons (Disadvantages):</a:t>
             </a:r>
+            <a:endParaRPr lang="en-US" sz="3475" b="1">
+              <a:solidFill>
+                <a:srgbClr val="171C24"/>
+              </a:solidFill>
+              <a:latin typeface="TT Hoves Bold" panose="02000003020000060003"/>
+              <a:ea typeface="TT Hoves Bold" panose="02000003020000060003"/>
+              <a:cs typeface="TT Hoves Bold" panose="02000003020000060003"/>
+              <a:sym typeface="TT Hoves Bold" panose="02000003020000060003"/>
+            </a:endParaRPr>
           </a:p>
           <a:p>
             <a:pPr algn="l">
               <a:lnSpc>
-                <a:spcPts val="4862"/>
+                <a:spcPts val="4860"/>
               </a:lnSpc>
             </a:pPr>
             <a:r>
-              <a:rPr lang="en-US" sz="3473">
+              <a:rPr lang="en-US" sz="3475">
                 <a:solidFill>
                   <a:srgbClr val="171C24"/>
                 </a:solidFill>
-                <a:latin typeface="TT Hoves"/>
-                <a:ea typeface="TT Hoves"/>
-                <a:cs typeface="TT Hoves"/>
-                <a:sym typeface="TT Hoves"/>
+                <a:latin typeface="TT Hoves" panose="02000003020000060003"/>
+                <a:ea typeface="TT Hoves" panose="02000003020000060003"/>
+                <a:cs typeface="TT Hoves" panose="02000003020000060003"/>
+                <a:sym typeface="TT Hoves" panose="02000003020000060003"/>
               </a:rPr>
               <a:t>⚠️ Approximate Solution: It does not guarantee the perfect answer (usually 98-99% accurate).</a:t>
             </a:r>
+            <a:endParaRPr lang="en-US" sz="3475">
+              <a:solidFill>
+                <a:srgbClr val="171C24"/>
+              </a:solidFill>
+              <a:latin typeface="TT Hoves" panose="02000003020000060003"/>
+              <a:ea typeface="TT Hoves" panose="02000003020000060003"/>
+              <a:cs typeface="TT Hoves" panose="02000003020000060003"/>
+              <a:sym typeface="TT Hoves" panose="02000003020000060003"/>
+            </a:endParaRPr>
           </a:p>
           <a:p>
             <a:pPr algn="l">
               <a:lnSpc>
-                <a:spcPts val="4862"/>
+                <a:spcPts val="4860"/>
               </a:lnSpc>
             </a:pPr>
             <a:r>
-              <a:rPr lang="en-US" sz="3473">
+              <a:rPr lang="en-US" sz="3475">
                 <a:solidFill>
                   <a:srgbClr val="171C24"/>
                 </a:solidFill>
-                <a:latin typeface="TT Hoves"/>
-                <a:ea typeface="TT Hoves"/>
-                <a:cs typeface="TT Hoves"/>
-                <a:sym typeface="TT Hoves"/>
+                <a:latin typeface="TT Hoves" panose="02000003020000060003"/>
+                <a:ea typeface="TT Hoves" panose="02000003020000060003"/>
+                <a:cs typeface="TT Hoves" panose="02000003020000060003"/>
+                <a:sym typeface="TT Hoves" panose="02000003020000060003"/>
               </a:rPr>
               <a:t>⚠️ Probabilistic: Different runs can give slightly different results due to randomness..</a:t>
             </a:r>
+            <a:endParaRPr lang="en-US" sz="3475">
+              <a:solidFill>
+                <a:srgbClr val="171C24"/>
+              </a:solidFill>
+              <a:latin typeface="TT Hoves" panose="02000003020000060003"/>
+              <a:ea typeface="TT Hoves" panose="02000003020000060003"/>
+              <a:cs typeface="TT Hoves" panose="02000003020000060003"/>
+              <a:sym typeface="TT Hoves" panose="02000003020000060003"/>
+            </a:endParaRPr>
           </a:p>
           <a:p>
             <a:pPr algn="l">
               <a:lnSpc>
-                <a:spcPts val="4862"/>
+                <a:spcPts val="4860"/>
               </a:lnSpc>
             </a:pPr>
             <a:r>
-              <a:rPr lang="en-US" sz="3473">
+              <a:rPr lang="en-US" sz="3475">
                 <a:solidFill>
                   <a:srgbClr val="171C24"/>
                 </a:solidFill>
-                <a:latin typeface="TT Hoves"/>
-                <a:ea typeface="TT Hoves"/>
-                <a:cs typeface="TT Hoves"/>
-                <a:sym typeface="TT Hoves"/>
+                <a:latin typeface="TT Hoves" panose="02000003020000060003"/>
+                <a:ea typeface="TT Hoves" panose="02000003020000060003"/>
+                <a:cs typeface="TT Hoves" panose="02000003020000060003"/>
+                <a:sym typeface="TT Hoves" panose="02000003020000060003"/>
               </a:rPr>
               <a:t>⚠️ Complex Tuning: Requires careful tuning of parameters (Alpha, Beta, Evaporation) to work well.</a:t>
             </a:r>
+            <a:endParaRPr lang="en-US" sz="3475">
+              <a:solidFill>
+                <a:srgbClr val="171C24"/>
+              </a:solidFill>
+              <a:latin typeface="TT Hoves" panose="02000003020000060003"/>
+              <a:ea typeface="TT Hoves" panose="02000003020000060003"/>
+              <a:cs typeface="TT Hoves" panose="02000003020000060003"/>
+              <a:sym typeface="TT Hoves" panose="02000003020000060003"/>
+            </a:endParaRPr>
           </a:p>
           <a:p>
             <a:pPr algn="l">
               <a:lnSpc>
-                <a:spcPts val="3182"/>
+                <a:spcPts val="3180"/>
               </a:lnSpc>
             </a:pPr>
           </a:p>
@@ -5456,15 +6251,8 @@
 </file>
 
 <file path=ppt/slides/slide8.xml><?xml version="1.0" encoding="utf-8"?>
-<p:sld xmlns:p="http://schemas.openxmlformats.org/presentationml/2006/main" xmlns:a="http://schemas.openxmlformats.org/drawingml/2006/main">
+<p:sld xmlns:a="http://schemas.openxmlformats.org/drawingml/2006/main" xmlns:r="http://schemas.openxmlformats.org/officeDocument/2006/relationships" xmlns:p="http://schemas.openxmlformats.org/presentationml/2006/main">
   <p:cSld>
-    <p:bg>
-      <p:bgPr>
-        <a:solidFill>
-          <a:srgbClr val="F4EEEB"/>
-        </a:solidFill>
-      </p:bgPr>
-    </p:bg>
     <p:spTree>
       <p:nvGrpSpPr>
         <p:cNvPr id="1" name=""/>
@@ -5481,12 +6269,12 @@
       </p:grpSpPr>
       <p:sp>
         <p:nvSpPr>
-          <p:cNvPr name="TextBox 2" id="2"/>
-          <p:cNvSpPr txBox="true"/>
+          <p:cNvPr id="2" name="TextBox 2"/>
+          <p:cNvSpPr txBox="1"/>
           <p:nvPr/>
         </p:nvSpPr>
         <p:spPr>
-          <a:xfrm rot="0">
+          <a:xfrm>
             <a:off x="1240433" y="2202597"/>
             <a:ext cx="16018867" cy="6765925"/>
           </a:xfrm>
@@ -5495,122 +6283,158 @@
           </a:prstGeom>
         </p:spPr>
         <p:txBody>
-          <a:bodyPr anchor="t" rtlCol="false" tIns="0" lIns="0" bIns="0" rIns="0">
+          <a:bodyPr lIns="0" tIns="0" rIns="0" bIns="0" rtlCol="0" anchor="t">
             <a:spAutoFit/>
           </a:bodyPr>
           <a:lstStyle/>
           <a:p>
-            <a:pPr algn="l" marL="1187449" indent="-593725" lvl="1">
+            <a:pPr marL="1187450" lvl="1" indent="-593725" algn="l">
               <a:lnSpc>
-                <a:spcPts val="7699"/>
+                <a:spcPts val="7700"/>
               </a:lnSpc>
-              <a:buFont typeface="Arial"/>
+              <a:buFont typeface="Arial" panose="020B0604020202020204"/>
               <a:buChar char="•"/>
             </a:pPr>
             <a:r>
-              <a:rPr lang="en-US" sz="5499">
+              <a:rPr lang="en-US" sz="5500">
                 <a:solidFill>
                   <a:srgbClr val="171C24"/>
                 </a:solidFill>
-                <a:latin typeface="TT Hoves"/>
-                <a:ea typeface="TT Hoves"/>
-                <a:cs typeface="TT Hoves"/>
-                <a:sym typeface="TT Hoves"/>
+                <a:latin typeface="TT Hoves" panose="02000003020000060003"/>
+                <a:ea typeface="TT Hoves" panose="02000003020000060003"/>
+                <a:cs typeface="TT Hoves" panose="02000003020000060003"/>
+                <a:sym typeface="TT Hoves" panose="02000003020000060003"/>
               </a:rPr>
               <a:t>Table:</a:t>
             </a:r>
-          </a:p>
-          <a:p>
-            <a:pPr algn="l" marL="1187449" indent="-593725" lvl="1">
+            <a:endParaRPr lang="en-US" sz="5500">
+              <a:solidFill>
+                <a:srgbClr val="171C24"/>
+              </a:solidFill>
+              <a:latin typeface="TT Hoves" panose="02000003020000060003"/>
+              <a:ea typeface="TT Hoves" panose="02000003020000060003"/>
+              <a:cs typeface="TT Hoves" panose="02000003020000060003"/>
+              <a:sym typeface="TT Hoves" panose="02000003020000060003"/>
+            </a:endParaRPr>
+          </a:p>
+          <a:p>
+            <a:pPr marL="1187450" lvl="1" indent="-593725" algn="l">
               <a:lnSpc>
-                <a:spcPts val="7699"/>
+                <a:spcPts val="7700"/>
               </a:lnSpc>
-              <a:buFont typeface="Arial"/>
+              <a:buFont typeface="Arial" panose="020B0604020202020204"/>
               <a:buChar char="•"/>
             </a:pPr>
             <a:r>
-              <a:rPr lang="en-US" sz="5499">
+              <a:rPr lang="en-US" sz="5500">
                 <a:solidFill>
                   <a:srgbClr val="171C24"/>
                 </a:solidFill>
-                <a:latin typeface="TT Hoves"/>
-                <a:ea typeface="TT Hoves"/>
-                <a:cs typeface="TT Hoves"/>
-                <a:sym typeface="TT Hoves"/>
+                <a:latin typeface="TT Hoves" panose="02000003020000060003"/>
+                <a:ea typeface="TT Hoves" panose="02000003020000060003"/>
+                <a:cs typeface="TT Hoves" panose="02000003020000060003"/>
+                <a:sym typeface="TT Hoves" panose="02000003020000060003"/>
               </a:rPr>
               <a:t>Sm</a:t>
             </a:r>
             <a:r>
-              <a:rPr lang="en-US" sz="5499">
+              <a:rPr lang="en-US" sz="5500">
                 <a:solidFill>
                   <a:srgbClr val="171C24"/>
                 </a:solidFill>
-                <a:latin typeface="TT Hoves"/>
-                <a:ea typeface="TT Hoves"/>
-                <a:cs typeface="TT Hoves"/>
-                <a:sym typeface="TT Hoves"/>
+                <a:latin typeface="TT Hoves" panose="02000003020000060003"/>
+                <a:ea typeface="TT Hoves" panose="02000003020000060003"/>
+                <a:cs typeface="TT Hoves" panose="02000003020000060003"/>
+                <a:sym typeface="TT Hoves" panose="02000003020000060003"/>
               </a:rPr>
               <a:t>all Input (N=12): Branch &amp; Bound is better (100% Accurate).</a:t>
             </a:r>
-          </a:p>
-          <a:p>
-            <a:pPr algn="l" marL="1187449" indent="-593725" lvl="1">
+            <a:endParaRPr lang="en-US" sz="5500">
+              <a:solidFill>
+                <a:srgbClr val="171C24"/>
+              </a:solidFill>
+              <a:latin typeface="TT Hoves" panose="02000003020000060003"/>
+              <a:ea typeface="TT Hoves" panose="02000003020000060003"/>
+              <a:cs typeface="TT Hoves" panose="02000003020000060003"/>
+              <a:sym typeface="TT Hoves" panose="02000003020000060003"/>
+            </a:endParaRPr>
+          </a:p>
+          <a:p>
+            <a:pPr marL="1187450" lvl="1" indent="-593725" algn="l">
               <a:lnSpc>
-                <a:spcPts val="7699"/>
+                <a:spcPts val="7700"/>
               </a:lnSpc>
-              <a:buFont typeface="Arial"/>
+              <a:buFont typeface="Arial" panose="020B0604020202020204"/>
               <a:buChar char="•"/>
             </a:pPr>
             <a:r>
-              <a:rPr lang="en-US" sz="5499">
+              <a:rPr lang="en-US" sz="5500">
                 <a:solidFill>
                   <a:srgbClr val="171C24"/>
                 </a:solidFill>
-                <a:latin typeface="TT Hoves"/>
-                <a:ea typeface="TT Hoves"/>
-                <a:cs typeface="TT Hoves"/>
-                <a:sym typeface="TT Hoves"/>
+                <a:latin typeface="TT Hoves" panose="02000003020000060003"/>
+                <a:ea typeface="TT Hoves" panose="02000003020000060003"/>
+                <a:cs typeface="TT Hoves" panose="02000003020000060003"/>
+                <a:sym typeface="TT Hoves" panose="02000003020000060003"/>
               </a:rPr>
               <a:t>Large Input (N=20+): Ant Colony is</a:t>
             </a:r>
             <a:r>
-              <a:rPr lang="en-US" sz="5499">
+              <a:rPr lang="en-US" sz="5500">
                 <a:solidFill>
                   <a:srgbClr val="171C24"/>
                 </a:solidFill>
-                <a:latin typeface="TT Hoves"/>
-                <a:ea typeface="TT Hoves"/>
-                <a:cs typeface="TT Hoves"/>
-                <a:sym typeface="TT Hoves"/>
+                <a:latin typeface="TT Hoves" panose="02000003020000060003"/>
+                <a:ea typeface="TT Hoves" panose="02000003020000060003"/>
+                <a:cs typeface="TT Hoves" panose="02000003020000060003"/>
+                <a:sym typeface="TT Hoves" panose="02000003020000060003"/>
               </a:rPr>
               <a:t> better (Does not crash).</a:t>
             </a:r>
-          </a:p>
-          <a:p>
-            <a:pPr algn="l" marL="1187449" indent="-593725" lvl="1">
+            <a:endParaRPr lang="en-US" sz="5500">
+              <a:solidFill>
+                <a:srgbClr val="171C24"/>
+              </a:solidFill>
+              <a:latin typeface="TT Hoves" panose="02000003020000060003"/>
+              <a:ea typeface="TT Hoves" panose="02000003020000060003"/>
+              <a:cs typeface="TT Hoves" panose="02000003020000060003"/>
+              <a:sym typeface="TT Hoves" panose="02000003020000060003"/>
+            </a:endParaRPr>
+          </a:p>
+          <a:p>
+            <a:pPr marL="1187450" lvl="1" indent="-593725" algn="l">
               <a:lnSpc>
-                <a:spcPts val="7699"/>
+                <a:spcPts val="7700"/>
               </a:lnSpc>
-              <a:buFont typeface="Arial"/>
+              <a:buFont typeface="Arial" panose="020B0604020202020204"/>
               <a:buChar char="•"/>
             </a:pPr>
             <a:r>
-              <a:rPr lang="en-US" sz="5499">
+              <a:rPr lang="en-US" sz="5500">
                 <a:solidFill>
                   <a:srgbClr val="171C24"/>
                 </a:solidFill>
-                <a:latin typeface="TT Hoves"/>
-                <a:ea typeface="TT Hoves"/>
-                <a:cs typeface="TT Hoves"/>
-                <a:sym typeface="TT Hoves"/>
+                <a:latin typeface="TT Hoves" panose="02000003020000060003"/>
+                <a:ea typeface="TT Hoves" panose="02000003020000060003"/>
+                <a:cs typeface="TT Hoves" panose="02000003020000060003"/>
+                <a:sym typeface="TT Hoves" panose="02000003020000060003"/>
               </a:rPr>
               <a:t>Trade-off: Speed vs. Accuracy.</a:t>
             </a:r>
+            <a:endParaRPr lang="en-US" sz="5500">
+              <a:solidFill>
+                <a:srgbClr val="171C24"/>
+              </a:solidFill>
+              <a:latin typeface="TT Hoves" panose="02000003020000060003"/>
+              <a:ea typeface="TT Hoves" panose="02000003020000060003"/>
+              <a:cs typeface="TT Hoves" panose="02000003020000060003"/>
+              <a:sym typeface="TT Hoves" panose="02000003020000060003"/>
+            </a:endParaRPr>
           </a:p>
           <a:p>
             <a:pPr algn="l">
               <a:lnSpc>
-                <a:spcPts val="7699"/>
+                <a:spcPts val="7700"/>
               </a:lnSpc>
             </a:pPr>
           </a:p>
@@ -5618,12 +6442,12 @@
       </p:sp>
       <p:sp>
         <p:nvSpPr>
-          <p:cNvPr name="TextBox 3" id="3"/>
-          <p:cNvSpPr txBox="true"/>
+          <p:cNvPr id="3" name="TextBox 3"/>
+          <p:cNvSpPr txBox="1"/>
           <p:nvPr/>
         </p:nvSpPr>
         <p:spPr>
-          <a:xfrm rot="0">
+          <a:xfrm>
             <a:off x="-434667" y="314327"/>
             <a:ext cx="19157333" cy="1285871"/>
           </a:xfrm>
@@ -5632,7 +6456,7 @@
           </a:prstGeom>
         </p:spPr>
         <p:txBody>
-          <a:bodyPr anchor="t" rtlCol="false" tIns="0" lIns="0" bIns="0" rIns="0">
+          <a:bodyPr lIns="0" tIns="0" rIns="0" bIns="0" rtlCol="0" anchor="t">
             <a:spAutoFit/>
           </a:bodyPr>
           <a:lstStyle/>
@@ -5646,29 +6470,38 @@
               </a:spcBef>
             </a:pPr>
             <a:r>
-              <a:rPr lang="en-US" b="true" sz="7500">
+              <a:rPr lang="en-US" sz="7500" b="1">
                 <a:solidFill>
                   <a:srgbClr val="171C24"/>
                 </a:solidFill>
-                <a:latin typeface="TT Hoves Bold"/>
-                <a:ea typeface="TT Hoves Bold"/>
-                <a:cs typeface="TT Hoves Bold"/>
-                <a:sym typeface="TT Hoves Bold"/>
+                <a:latin typeface="TT Hoves Bold" panose="02000003020000060003"/>
+                <a:ea typeface="TT Hoves Bold" panose="02000003020000060003"/>
+                <a:cs typeface="TT Hoves Bold" panose="02000003020000060003"/>
+                <a:sym typeface="TT Hoves Bold" panose="02000003020000060003"/>
               </a:rPr>
               <a:t>Compariso</a:t>
             </a:r>
             <a:r>
-              <a:rPr lang="en-US" b="true" sz="7500">
+              <a:rPr lang="en-US" sz="7500" b="1">
                 <a:solidFill>
                   <a:srgbClr val="171C24"/>
                 </a:solidFill>
-                <a:latin typeface="TT Hoves Bold"/>
-                <a:ea typeface="TT Hoves Bold"/>
-                <a:cs typeface="TT Hoves Bold"/>
-                <a:sym typeface="TT Hoves Bold"/>
+                <a:latin typeface="TT Hoves Bold" panose="02000003020000060003"/>
+                <a:ea typeface="TT Hoves Bold" panose="02000003020000060003"/>
+                <a:cs typeface="TT Hoves Bold" panose="02000003020000060003"/>
+                <a:sym typeface="TT Hoves Bold" panose="02000003020000060003"/>
               </a:rPr>
               <a:t>n (My Result)</a:t>
             </a:r>
+            <a:endParaRPr lang="en-US" sz="7500" b="1">
+              <a:solidFill>
+                <a:srgbClr val="171C24"/>
+              </a:solidFill>
+              <a:latin typeface="TT Hoves Bold" panose="02000003020000060003"/>
+              <a:ea typeface="TT Hoves Bold" panose="02000003020000060003"/>
+              <a:cs typeface="TT Hoves Bold" panose="02000003020000060003"/>
+              <a:sym typeface="TT Hoves Bold" panose="02000003020000060003"/>
+            </a:endParaRPr>
           </a:p>
         </p:txBody>
       </p:sp>
@@ -5681,15 +6514,8 @@
 </file>
 
 <file path=ppt/slides/slide9.xml><?xml version="1.0" encoding="utf-8"?>
-<p:sld xmlns:p="http://schemas.openxmlformats.org/presentationml/2006/main" xmlns:a="http://schemas.openxmlformats.org/drawingml/2006/main">
+<p:sld xmlns:a="http://schemas.openxmlformats.org/drawingml/2006/main" xmlns:r="http://schemas.openxmlformats.org/officeDocument/2006/relationships" xmlns:p="http://schemas.openxmlformats.org/presentationml/2006/main">
   <p:cSld>
-    <p:bg>
-      <p:bgPr>
-        <a:solidFill>
-          <a:srgbClr val="F4EEEB"/>
-        </a:solidFill>
-      </p:bgPr>
-    </p:bg>
     <p:spTree>
       <p:nvGrpSpPr>
         <p:cNvPr id="1" name=""/>
@@ -5706,182 +6532,3047 @@
       </p:grpSpPr>
       <p:sp>
         <p:nvSpPr>
-          <p:cNvPr name="TextBox 2" id="2"/>
-          <p:cNvSpPr txBox="true"/>
+          <p:cNvPr id="2" name="Freeform 2"/>
+          <p:cNvSpPr/>
           <p:nvPr/>
         </p:nvSpPr>
         <p:spPr>
+          <a:xfrm>
+            <a:off x="0" y="0"/>
+            <a:ext cx="18288000" cy="10287000"/>
+          </a:xfrm>
+          <a:custGeom>
+            <a:avLst/>
+            <a:gdLst/>
+            <a:ahLst/>
+            <a:cxnLst/>
+            <a:rect l="l" t="t" r="r" b="b"/>
+            <a:pathLst>
+              <a:path w="18288000" h="10287000">
+                <a:moveTo>
+                  <a:pt x="0" y="0"/>
+                </a:moveTo>
+                <a:lnTo>
+                  <a:pt x="18288000" y="0"/>
+                </a:lnTo>
+                <a:lnTo>
+                  <a:pt x="18288000" y="10287000"/>
+                </a:lnTo>
+                <a:lnTo>
+                  <a:pt x="0" y="10287000"/>
+                </a:lnTo>
+                <a:lnTo>
+                  <a:pt x="0" y="0"/>
+                </a:lnTo>
+                <a:close/>
+              </a:path>
+            </a:pathLst>
+          </a:custGeom>
+          <a:solidFill>
+            <a:schemeClr val="accent6">
+              <a:lumMod val="20000"/>
+              <a:lumOff val="80000"/>
+            </a:schemeClr>
+          </a:solidFill>
+        </p:spPr>
+        <p:txBody>
+          <a:bodyPr/>
+          <a:p>
+            <a:endParaRPr lang="en-GB" altLang="en-US"/>
+          </a:p>
+        </p:txBody>
+      </p:sp>
+      <p:grpSp>
+        <p:nvGrpSpPr>
+          <p:cNvPr id="3" name="Group 3"/>
+          <p:cNvGrpSpPr/>
+          <p:nvPr/>
+        </p:nvGrpSpPr>
+        <p:grpSpPr>
           <a:xfrm rot="0">
-            <a:off x="1240433" y="2202597"/>
-            <a:ext cx="16018867" cy="7737475"/>
+            <a:off x="3012647" y="3960833"/>
+            <a:ext cx="666750" cy="666750"/>
+            <a:chOff x="0" y="0"/>
+            <a:chExt cx="812800" cy="812800"/>
+          </a:xfrm>
+        </p:grpSpPr>
+        <p:sp>
+          <p:nvSpPr>
+            <p:cNvPr id="4" name="Freeform 4"/>
+            <p:cNvSpPr/>
+            <p:nvPr/>
+          </p:nvSpPr>
+          <p:spPr>
+            <a:xfrm>
+              <a:off x="0" y="0"/>
+              <a:ext cx="812800" cy="812800"/>
+            </a:xfrm>
+            <a:custGeom>
+              <a:avLst/>
+              <a:gdLst/>
+              <a:ahLst/>
+              <a:cxnLst/>
+              <a:rect l="l" t="t" r="r" b="b"/>
+              <a:pathLst>
+                <a:path w="812800" h="812800">
+                  <a:moveTo>
+                    <a:pt x="812800" y="406400"/>
+                  </a:moveTo>
+                  <a:lnTo>
+                    <a:pt x="406400" y="0"/>
+                  </a:lnTo>
+                  <a:lnTo>
+                    <a:pt x="406400" y="203200"/>
+                  </a:lnTo>
+                  <a:lnTo>
+                    <a:pt x="0" y="203200"/>
+                  </a:lnTo>
+                  <a:lnTo>
+                    <a:pt x="0" y="609600"/>
+                  </a:lnTo>
+                  <a:lnTo>
+                    <a:pt x="406400" y="609600"/>
+                  </a:lnTo>
+                  <a:lnTo>
+                    <a:pt x="406400" y="812800"/>
+                  </a:lnTo>
+                  <a:lnTo>
+                    <a:pt x="812800" y="406400"/>
+                  </a:lnTo>
+                  <a:close/>
+                </a:path>
+              </a:pathLst>
+            </a:custGeom>
+            <a:solidFill>
+              <a:srgbClr val="211C73"/>
+            </a:solidFill>
+          </p:spPr>
+        </p:sp>
+        <p:sp>
+          <p:nvSpPr>
+            <p:cNvPr id="5" name="TextBox 5"/>
+            <p:cNvSpPr txBox="1"/>
+            <p:nvPr/>
+          </p:nvSpPr>
+          <p:spPr>
+            <a:xfrm>
+              <a:off x="0" y="146050"/>
+              <a:ext cx="711200" cy="463550"/>
+            </a:xfrm>
+            <a:prstGeom prst="rect">
+              <a:avLst/>
+            </a:prstGeom>
+          </p:spPr>
+          <p:txBody>
+            <a:bodyPr lIns="50800" tIns="50800" rIns="50800" bIns="50800" rtlCol="0" anchor="ctr"/>
+            <a:lstStyle/>
+            <a:p>
+              <a:pPr algn="ctr">
+                <a:lnSpc>
+                  <a:spcPts val="3220"/>
+                </a:lnSpc>
+              </a:pPr>
+            </a:p>
+          </p:txBody>
+        </p:sp>
+      </p:grpSp>
+      <p:grpSp>
+        <p:nvGrpSpPr>
+          <p:cNvPr id="6" name="Group 6"/>
+          <p:cNvGrpSpPr/>
+          <p:nvPr/>
+        </p:nvGrpSpPr>
+        <p:grpSpPr>
+          <a:xfrm rot="0">
+            <a:off x="5678802" y="3960833"/>
+            <a:ext cx="666750" cy="666750"/>
+            <a:chOff x="0" y="0"/>
+            <a:chExt cx="812800" cy="812800"/>
+          </a:xfrm>
+        </p:grpSpPr>
+        <p:sp>
+          <p:nvSpPr>
+            <p:cNvPr id="7" name="Freeform 7"/>
+            <p:cNvSpPr/>
+            <p:nvPr/>
+          </p:nvSpPr>
+          <p:spPr>
+            <a:xfrm>
+              <a:off x="0" y="0"/>
+              <a:ext cx="812800" cy="812800"/>
+            </a:xfrm>
+            <a:custGeom>
+              <a:avLst/>
+              <a:gdLst/>
+              <a:ahLst/>
+              <a:cxnLst/>
+              <a:rect l="l" t="t" r="r" b="b"/>
+              <a:pathLst>
+                <a:path w="812800" h="812800">
+                  <a:moveTo>
+                    <a:pt x="812800" y="406400"/>
+                  </a:moveTo>
+                  <a:lnTo>
+                    <a:pt x="406400" y="0"/>
+                  </a:lnTo>
+                  <a:lnTo>
+                    <a:pt x="406400" y="203200"/>
+                  </a:lnTo>
+                  <a:lnTo>
+                    <a:pt x="0" y="203200"/>
+                  </a:lnTo>
+                  <a:lnTo>
+                    <a:pt x="0" y="609600"/>
+                  </a:lnTo>
+                  <a:lnTo>
+                    <a:pt x="406400" y="609600"/>
+                  </a:lnTo>
+                  <a:lnTo>
+                    <a:pt x="406400" y="812800"/>
+                  </a:lnTo>
+                  <a:lnTo>
+                    <a:pt x="812800" y="406400"/>
+                  </a:lnTo>
+                  <a:close/>
+                </a:path>
+              </a:pathLst>
+            </a:custGeom>
+            <a:solidFill>
+              <a:srgbClr val="2F27A8"/>
+            </a:solidFill>
+          </p:spPr>
+        </p:sp>
+        <p:sp>
+          <p:nvSpPr>
+            <p:cNvPr id="8" name="TextBox 8"/>
+            <p:cNvSpPr txBox="1"/>
+            <p:nvPr/>
+          </p:nvSpPr>
+          <p:spPr>
+            <a:xfrm>
+              <a:off x="0" y="146050"/>
+              <a:ext cx="711200" cy="463550"/>
+            </a:xfrm>
+            <a:prstGeom prst="rect">
+              <a:avLst/>
+            </a:prstGeom>
+          </p:spPr>
+          <p:txBody>
+            <a:bodyPr lIns="50800" tIns="50800" rIns="50800" bIns="50800" rtlCol="0" anchor="ctr"/>
+            <a:lstStyle/>
+            <a:p>
+              <a:pPr algn="ctr">
+                <a:lnSpc>
+                  <a:spcPts val="3220"/>
+                </a:lnSpc>
+              </a:pPr>
+            </a:p>
+          </p:txBody>
+        </p:sp>
+      </p:grpSp>
+      <p:grpSp>
+        <p:nvGrpSpPr>
+          <p:cNvPr id="9" name="Group 9"/>
+          <p:cNvGrpSpPr/>
+          <p:nvPr/>
+        </p:nvGrpSpPr>
+        <p:grpSpPr>
+          <a:xfrm rot="0">
+            <a:off x="1559805" y="3470253"/>
+            <a:ext cx="1647909" cy="1647909"/>
+            <a:chOff x="0" y="0"/>
+            <a:chExt cx="812800" cy="812800"/>
+          </a:xfrm>
+        </p:grpSpPr>
+        <p:sp>
+          <p:nvSpPr>
+            <p:cNvPr id="10" name="Freeform 10"/>
+            <p:cNvSpPr/>
+            <p:nvPr/>
+          </p:nvSpPr>
+          <p:spPr>
+            <a:xfrm>
+              <a:off x="0" y="0"/>
+              <a:ext cx="812800" cy="812800"/>
+            </a:xfrm>
+            <a:custGeom>
+              <a:avLst/>
+              <a:gdLst/>
+              <a:ahLst/>
+              <a:cxnLst/>
+              <a:rect l="l" t="t" r="r" b="b"/>
+              <a:pathLst>
+                <a:path w="812800" h="812800">
+                  <a:moveTo>
+                    <a:pt x="406400" y="0"/>
+                  </a:moveTo>
+                  <a:cubicBezTo>
+                    <a:pt x="181951" y="0"/>
+                    <a:pt x="0" y="181951"/>
+                    <a:pt x="0" y="406400"/>
+                  </a:cubicBezTo>
+                  <a:cubicBezTo>
+                    <a:pt x="0" y="630849"/>
+                    <a:pt x="181951" y="812800"/>
+                    <a:pt x="406400" y="812800"/>
+                  </a:cubicBezTo>
+                  <a:cubicBezTo>
+                    <a:pt x="630849" y="812800"/>
+                    <a:pt x="812800" y="630849"/>
+                    <a:pt x="812800" y="406400"/>
+                  </a:cubicBezTo>
+                  <a:cubicBezTo>
+                    <a:pt x="812800" y="181951"/>
+                    <a:pt x="630849" y="0"/>
+                    <a:pt x="406400" y="0"/>
+                  </a:cubicBezTo>
+                  <a:close/>
+                </a:path>
+              </a:pathLst>
+            </a:custGeom>
+            <a:solidFill>
+              <a:srgbClr val="211C73"/>
+            </a:solidFill>
+          </p:spPr>
+        </p:sp>
+        <p:sp>
+          <p:nvSpPr>
+            <p:cNvPr id="11" name="TextBox 11"/>
+            <p:cNvSpPr txBox="1"/>
+            <p:nvPr/>
+          </p:nvSpPr>
+          <p:spPr>
+            <a:xfrm>
+              <a:off x="76200" y="19050"/>
+              <a:ext cx="660400" cy="717550"/>
+            </a:xfrm>
+            <a:prstGeom prst="rect">
+              <a:avLst/>
+            </a:prstGeom>
+          </p:spPr>
+          <p:txBody>
+            <a:bodyPr lIns="50800" tIns="50800" rIns="50800" bIns="50800" rtlCol="0" anchor="ctr"/>
+            <a:lstStyle/>
+            <a:p>
+              <a:pPr algn="ctr">
+                <a:lnSpc>
+                  <a:spcPts val="3220"/>
+                </a:lnSpc>
+              </a:pPr>
+            </a:p>
+          </p:txBody>
+        </p:sp>
+      </p:grpSp>
+      <p:grpSp>
+        <p:nvGrpSpPr>
+          <p:cNvPr id="12" name="Group 12"/>
+          <p:cNvGrpSpPr/>
+          <p:nvPr/>
+        </p:nvGrpSpPr>
+        <p:grpSpPr>
+          <a:xfrm rot="0">
+            <a:off x="4228904" y="3470253"/>
+            <a:ext cx="1647909" cy="1647909"/>
+            <a:chOff x="0" y="0"/>
+            <a:chExt cx="812800" cy="812800"/>
+          </a:xfrm>
+        </p:grpSpPr>
+        <p:sp>
+          <p:nvSpPr>
+            <p:cNvPr id="13" name="Freeform 13"/>
+            <p:cNvSpPr/>
+            <p:nvPr/>
+          </p:nvSpPr>
+          <p:spPr>
+            <a:xfrm>
+              <a:off x="0" y="0"/>
+              <a:ext cx="812800" cy="812800"/>
+            </a:xfrm>
+            <a:custGeom>
+              <a:avLst/>
+              <a:gdLst/>
+              <a:ahLst/>
+              <a:cxnLst/>
+              <a:rect l="l" t="t" r="r" b="b"/>
+              <a:pathLst>
+                <a:path w="812800" h="812800">
+                  <a:moveTo>
+                    <a:pt x="406400" y="0"/>
+                  </a:moveTo>
+                  <a:cubicBezTo>
+                    <a:pt x="181951" y="0"/>
+                    <a:pt x="0" y="181951"/>
+                    <a:pt x="0" y="406400"/>
+                  </a:cubicBezTo>
+                  <a:cubicBezTo>
+                    <a:pt x="0" y="630849"/>
+                    <a:pt x="181951" y="812800"/>
+                    <a:pt x="406400" y="812800"/>
+                  </a:cubicBezTo>
+                  <a:cubicBezTo>
+                    <a:pt x="630849" y="812800"/>
+                    <a:pt x="812800" y="630849"/>
+                    <a:pt x="812800" y="406400"/>
+                  </a:cubicBezTo>
+                  <a:cubicBezTo>
+                    <a:pt x="812800" y="181951"/>
+                    <a:pt x="630849" y="0"/>
+                    <a:pt x="406400" y="0"/>
+                  </a:cubicBezTo>
+                  <a:close/>
+                </a:path>
+              </a:pathLst>
+            </a:custGeom>
+            <a:solidFill>
+              <a:srgbClr val="2F27A8"/>
+            </a:solidFill>
+          </p:spPr>
+        </p:sp>
+        <p:sp>
+          <p:nvSpPr>
+            <p:cNvPr id="14" name="TextBox 14"/>
+            <p:cNvSpPr txBox="1"/>
+            <p:nvPr/>
+          </p:nvSpPr>
+          <p:spPr>
+            <a:xfrm>
+              <a:off x="76200" y="19050"/>
+              <a:ext cx="660400" cy="717550"/>
+            </a:xfrm>
+            <a:prstGeom prst="rect">
+              <a:avLst/>
+            </a:prstGeom>
+          </p:spPr>
+          <p:txBody>
+            <a:bodyPr lIns="50800" tIns="50800" rIns="50800" bIns="50800" rtlCol="0" anchor="ctr"/>
+            <a:lstStyle/>
+            <a:p>
+              <a:pPr algn="ctr">
+                <a:lnSpc>
+                  <a:spcPts val="3220"/>
+                </a:lnSpc>
+              </a:pPr>
+            </a:p>
+          </p:txBody>
+        </p:sp>
+      </p:grpSp>
+      <p:grpSp>
+        <p:nvGrpSpPr>
+          <p:cNvPr id="15" name="Group 15"/>
+          <p:cNvGrpSpPr/>
+          <p:nvPr/>
+        </p:nvGrpSpPr>
+        <p:grpSpPr>
+          <a:xfrm rot="0">
+            <a:off x="8367879" y="3960833"/>
+            <a:ext cx="666750" cy="666750"/>
+            <a:chOff x="0" y="0"/>
+            <a:chExt cx="812800" cy="812800"/>
+          </a:xfrm>
+        </p:grpSpPr>
+        <p:sp>
+          <p:nvSpPr>
+            <p:cNvPr id="16" name="Freeform 16"/>
+            <p:cNvSpPr/>
+            <p:nvPr/>
+          </p:nvSpPr>
+          <p:spPr>
+            <a:xfrm>
+              <a:off x="0" y="0"/>
+              <a:ext cx="812800" cy="812800"/>
+            </a:xfrm>
+            <a:custGeom>
+              <a:avLst/>
+              <a:gdLst/>
+              <a:ahLst/>
+              <a:cxnLst/>
+              <a:rect l="l" t="t" r="r" b="b"/>
+              <a:pathLst>
+                <a:path w="812800" h="812800">
+                  <a:moveTo>
+                    <a:pt x="812800" y="406400"/>
+                  </a:moveTo>
+                  <a:lnTo>
+                    <a:pt x="406400" y="0"/>
+                  </a:lnTo>
+                  <a:lnTo>
+                    <a:pt x="406400" y="203200"/>
+                  </a:lnTo>
+                  <a:lnTo>
+                    <a:pt x="0" y="203200"/>
+                  </a:lnTo>
+                  <a:lnTo>
+                    <a:pt x="0" y="609600"/>
+                  </a:lnTo>
+                  <a:lnTo>
+                    <a:pt x="406400" y="609600"/>
+                  </a:lnTo>
+                  <a:lnTo>
+                    <a:pt x="406400" y="812800"/>
+                  </a:lnTo>
+                  <a:lnTo>
+                    <a:pt x="812800" y="406400"/>
+                  </a:lnTo>
+                  <a:close/>
+                </a:path>
+              </a:pathLst>
+            </a:custGeom>
+            <a:solidFill>
+              <a:srgbClr val="42003B"/>
+            </a:solidFill>
+          </p:spPr>
+        </p:sp>
+        <p:sp>
+          <p:nvSpPr>
+            <p:cNvPr id="17" name="TextBox 17"/>
+            <p:cNvSpPr txBox="1"/>
+            <p:nvPr/>
+          </p:nvSpPr>
+          <p:spPr>
+            <a:xfrm>
+              <a:off x="0" y="146050"/>
+              <a:ext cx="711200" cy="463550"/>
+            </a:xfrm>
+            <a:prstGeom prst="rect">
+              <a:avLst/>
+            </a:prstGeom>
+          </p:spPr>
+          <p:txBody>
+            <a:bodyPr lIns="50800" tIns="50800" rIns="50800" bIns="50800" rtlCol="0" anchor="ctr"/>
+            <a:lstStyle/>
+            <a:p>
+              <a:pPr algn="ctr">
+                <a:lnSpc>
+                  <a:spcPts val="3220"/>
+                </a:lnSpc>
+              </a:pPr>
+            </a:p>
+          </p:txBody>
+        </p:sp>
+      </p:grpSp>
+      <p:grpSp>
+        <p:nvGrpSpPr>
+          <p:cNvPr id="18" name="Group 18"/>
+          <p:cNvGrpSpPr/>
+          <p:nvPr/>
+        </p:nvGrpSpPr>
+        <p:grpSpPr>
+          <a:xfrm rot="0">
+            <a:off x="11017928" y="3960833"/>
+            <a:ext cx="666750" cy="666750"/>
+            <a:chOff x="0" y="0"/>
+            <a:chExt cx="812800" cy="812800"/>
+          </a:xfrm>
+        </p:grpSpPr>
+        <p:sp>
+          <p:nvSpPr>
+            <p:cNvPr id="19" name="Freeform 19"/>
+            <p:cNvSpPr/>
+            <p:nvPr/>
+          </p:nvSpPr>
+          <p:spPr>
+            <a:xfrm>
+              <a:off x="0" y="0"/>
+              <a:ext cx="812800" cy="812800"/>
+            </a:xfrm>
+            <a:custGeom>
+              <a:avLst/>
+              <a:gdLst/>
+              <a:ahLst/>
+              <a:cxnLst/>
+              <a:rect l="l" t="t" r="r" b="b"/>
+              <a:pathLst>
+                <a:path w="812800" h="812800">
+                  <a:moveTo>
+                    <a:pt x="812800" y="406400"/>
+                  </a:moveTo>
+                  <a:lnTo>
+                    <a:pt x="406400" y="0"/>
+                  </a:lnTo>
+                  <a:lnTo>
+                    <a:pt x="406400" y="203200"/>
+                  </a:lnTo>
+                  <a:lnTo>
+                    <a:pt x="0" y="203200"/>
+                  </a:lnTo>
+                  <a:lnTo>
+                    <a:pt x="0" y="609600"/>
+                  </a:lnTo>
+                  <a:lnTo>
+                    <a:pt x="406400" y="609600"/>
+                  </a:lnTo>
+                  <a:lnTo>
+                    <a:pt x="406400" y="812800"/>
+                  </a:lnTo>
+                  <a:lnTo>
+                    <a:pt x="812800" y="406400"/>
+                  </a:lnTo>
+                  <a:close/>
+                </a:path>
+              </a:pathLst>
+            </a:custGeom>
+            <a:solidFill>
+              <a:srgbClr val="66165D"/>
+            </a:solidFill>
+          </p:spPr>
+        </p:sp>
+        <p:sp>
+          <p:nvSpPr>
+            <p:cNvPr id="20" name="TextBox 20"/>
+            <p:cNvSpPr txBox="1"/>
+            <p:nvPr/>
+          </p:nvSpPr>
+          <p:spPr>
+            <a:xfrm>
+              <a:off x="0" y="146050"/>
+              <a:ext cx="711200" cy="463550"/>
+            </a:xfrm>
+            <a:prstGeom prst="rect">
+              <a:avLst/>
+            </a:prstGeom>
+          </p:spPr>
+          <p:txBody>
+            <a:bodyPr lIns="50800" tIns="50800" rIns="50800" bIns="50800" rtlCol="0" anchor="ctr"/>
+            <a:lstStyle/>
+            <a:p>
+              <a:pPr algn="ctr">
+                <a:lnSpc>
+                  <a:spcPts val="3220"/>
+                </a:lnSpc>
+              </a:pPr>
+            </a:p>
+          </p:txBody>
+        </p:sp>
+      </p:grpSp>
+      <p:grpSp>
+        <p:nvGrpSpPr>
+          <p:cNvPr id="21" name="Group 21"/>
+          <p:cNvGrpSpPr/>
+          <p:nvPr/>
+        </p:nvGrpSpPr>
+        <p:grpSpPr>
+          <a:xfrm rot="0">
+            <a:off x="13687026" y="3960833"/>
+            <a:ext cx="666750" cy="666750"/>
+            <a:chOff x="0" y="0"/>
+            <a:chExt cx="812800" cy="812800"/>
+          </a:xfrm>
+        </p:grpSpPr>
+        <p:sp>
+          <p:nvSpPr>
+            <p:cNvPr id="22" name="Freeform 22"/>
+            <p:cNvSpPr/>
+            <p:nvPr/>
+          </p:nvSpPr>
+          <p:spPr>
+            <a:xfrm>
+              <a:off x="0" y="0"/>
+              <a:ext cx="812800" cy="812800"/>
+            </a:xfrm>
+            <a:custGeom>
+              <a:avLst/>
+              <a:gdLst/>
+              <a:ahLst/>
+              <a:cxnLst/>
+              <a:rect l="l" t="t" r="r" b="b"/>
+              <a:pathLst>
+                <a:path w="812800" h="812800">
+                  <a:moveTo>
+                    <a:pt x="812800" y="406400"/>
+                  </a:moveTo>
+                  <a:lnTo>
+                    <a:pt x="406400" y="0"/>
+                  </a:lnTo>
+                  <a:lnTo>
+                    <a:pt x="406400" y="203200"/>
+                  </a:lnTo>
+                  <a:lnTo>
+                    <a:pt x="0" y="203200"/>
+                  </a:lnTo>
+                  <a:lnTo>
+                    <a:pt x="0" y="609600"/>
+                  </a:lnTo>
+                  <a:lnTo>
+                    <a:pt x="406400" y="609600"/>
+                  </a:lnTo>
+                  <a:lnTo>
+                    <a:pt x="406400" y="812800"/>
+                  </a:lnTo>
+                  <a:lnTo>
+                    <a:pt x="812800" y="406400"/>
+                  </a:lnTo>
+                  <a:close/>
+                </a:path>
+              </a:pathLst>
+            </a:custGeom>
+            <a:solidFill>
+              <a:srgbClr val="BD1F76"/>
+            </a:solidFill>
+          </p:spPr>
+        </p:sp>
+        <p:sp>
+          <p:nvSpPr>
+            <p:cNvPr id="23" name="TextBox 23"/>
+            <p:cNvSpPr txBox="1"/>
+            <p:nvPr/>
+          </p:nvSpPr>
+          <p:spPr>
+            <a:xfrm>
+              <a:off x="0" y="146050"/>
+              <a:ext cx="711200" cy="463550"/>
+            </a:xfrm>
+            <a:prstGeom prst="rect">
+              <a:avLst/>
+            </a:prstGeom>
+          </p:spPr>
+          <p:txBody>
+            <a:bodyPr lIns="50800" tIns="50800" rIns="50800" bIns="50800" rtlCol="0" anchor="ctr"/>
+            <a:lstStyle/>
+            <a:p>
+              <a:pPr algn="ctr">
+                <a:lnSpc>
+                  <a:spcPts val="3220"/>
+                </a:lnSpc>
+              </a:pPr>
+            </a:p>
+          </p:txBody>
+        </p:sp>
+      </p:grpSp>
+      <p:grpSp>
+        <p:nvGrpSpPr>
+          <p:cNvPr id="24" name="Group 24"/>
+          <p:cNvGrpSpPr/>
+          <p:nvPr/>
+        </p:nvGrpSpPr>
+        <p:grpSpPr>
+          <a:xfrm rot="0">
+            <a:off x="16356125" y="3960833"/>
+            <a:ext cx="666750" cy="666750"/>
+            <a:chOff x="0" y="0"/>
+            <a:chExt cx="812800" cy="812800"/>
+          </a:xfrm>
+        </p:grpSpPr>
+        <p:sp>
+          <p:nvSpPr>
+            <p:cNvPr id="25" name="Freeform 25"/>
+            <p:cNvSpPr/>
+            <p:nvPr/>
+          </p:nvSpPr>
+          <p:spPr>
+            <a:xfrm>
+              <a:off x="0" y="0"/>
+              <a:ext cx="812800" cy="812800"/>
+            </a:xfrm>
+            <a:custGeom>
+              <a:avLst/>
+              <a:gdLst/>
+              <a:ahLst/>
+              <a:cxnLst/>
+              <a:rect l="l" t="t" r="r" b="b"/>
+              <a:pathLst>
+                <a:path w="812800" h="812800">
+                  <a:moveTo>
+                    <a:pt x="812800" y="406400"/>
+                  </a:moveTo>
+                  <a:lnTo>
+                    <a:pt x="406400" y="0"/>
+                  </a:lnTo>
+                  <a:lnTo>
+                    <a:pt x="406400" y="203200"/>
+                  </a:lnTo>
+                  <a:lnTo>
+                    <a:pt x="0" y="203200"/>
+                  </a:lnTo>
+                  <a:lnTo>
+                    <a:pt x="0" y="609600"/>
+                  </a:lnTo>
+                  <a:lnTo>
+                    <a:pt x="406400" y="609600"/>
+                  </a:lnTo>
+                  <a:lnTo>
+                    <a:pt x="406400" y="812800"/>
+                  </a:lnTo>
+                  <a:lnTo>
+                    <a:pt x="812800" y="406400"/>
+                  </a:lnTo>
+                  <a:close/>
+                </a:path>
+              </a:pathLst>
+            </a:custGeom>
+            <a:solidFill>
+              <a:srgbClr val="FB366B"/>
+            </a:solidFill>
+          </p:spPr>
+        </p:sp>
+        <p:sp>
+          <p:nvSpPr>
+            <p:cNvPr id="26" name="TextBox 26"/>
+            <p:cNvSpPr txBox="1"/>
+            <p:nvPr/>
+          </p:nvSpPr>
+          <p:spPr>
+            <a:xfrm>
+              <a:off x="0" y="146050"/>
+              <a:ext cx="711200" cy="463550"/>
+            </a:xfrm>
+            <a:prstGeom prst="rect">
+              <a:avLst/>
+            </a:prstGeom>
+          </p:spPr>
+          <p:txBody>
+            <a:bodyPr lIns="50800" tIns="50800" rIns="50800" bIns="50800" rtlCol="0" anchor="ctr"/>
+            <a:lstStyle/>
+            <a:p>
+              <a:pPr algn="ctr">
+                <a:lnSpc>
+                  <a:spcPts val="3220"/>
+                </a:lnSpc>
+              </a:pPr>
+            </a:p>
+          </p:txBody>
+        </p:sp>
+      </p:grpSp>
+      <p:grpSp>
+        <p:nvGrpSpPr>
+          <p:cNvPr id="27" name="Group 27"/>
+          <p:cNvGrpSpPr/>
+          <p:nvPr/>
+        </p:nvGrpSpPr>
+        <p:grpSpPr>
+          <a:xfrm rot="0">
+            <a:off x="6898002" y="3470253"/>
+            <a:ext cx="1647909" cy="1647909"/>
+            <a:chOff x="0" y="0"/>
+            <a:chExt cx="812800" cy="812800"/>
+          </a:xfrm>
+        </p:grpSpPr>
+        <p:sp>
+          <p:nvSpPr>
+            <p:cNvPr id="28" name="Freeform 28"/>
+            <p:cNvSpPr/>
+            <p:nvPr/>
+          </p:nvSpPr>
+          <p:spPr>
+            <a:xfrm>
+              <a:off x="0" y="0"/>
+              <a:ext cx="812800" cy="812800"/>
+            </a:xfrm>
+            <a:custGeom>
+              <a:avLst/>
+              <a:gdLst/>
+              <a:ahLst/>
+              <a:cxnLst/>
+              <a:rect l="l" t="t" r="r" b="b"/>
+              <a:pathLst>
+                <a:path w="812800" h="812800">
+                  <a:moveTo>
+                    <a:pt x="406400" y="0"/>
+                  </a:moveTo>
+                  <a:cubicBezTo>
+                    <a:pt x="181951" y="0"/>
+                    <a:pt x="0" y="181951"/>
+                    <a:pt x="0" y="406400"/>
+                  </a:cubicBezTo>
+                  <a:cubicBezTo>
+                    <a:pt x="0" y="630849"/>
+                    <a:pt x="181951" y="812800"/>
+                    <a:pt x="406400" y="812800"/>
+                  </a:cubicBezTo>
+                  <a:cubicBezTo>
+                    <a:pt x="630849" y="812800"/>
+                    <a:pt x="812800" y="630849"/>
+                    <a:pt x="812800" y="406400"/>
+                  </a:cubicBezTo>
+                  <a:cubicBezTo>
+                    <a:pt x="812800" y="181951"/>
+                    <a:pt x="630849" y="0"/>
+                    <a:pt x="406400" y="0"/>
+                  </a:cubicBezTo>
+                  <a:close/>
+                </a:path>
+              </a:pathLst>
+            </a:custGeom>
+            <a:solidFill>
+              <a:srgbClr val="42003B"/>
+            </a:solidFill>
+          </p:spPr>
+        </p:sp>
+        <p:sp>
+          <p:nvSpPr>
+            <p:cNvPr id="29" name="TextBox 29"/>
+            <p:cNvSpPr txBox="1"/>
+            <p:nvPr/>
+          </p:nvSpPr>
+          <p:spPr>
+            <a:xfrm>
+              <a:off x="76200" y="19050"/>
+              <a:ext cx="660400" cy="717550"/>
+            </a:xfrm>
+            <a:prstGeom prst="rect">
+              <a:avLst/>
+            </a:prstGeom>
+          </p:spPr>
+          <p:txBody>
+            <a:bodyPr lIns="50800" tIns="50800" rIns="50800" bIns="50800" rtlCol="0" anchor="ctr"/>
+            <a:lstStyle/>
+            <a:p>
+              <a:pPr algn="ctr">
+                <a:lnSpc>
+                  <a:spcPts val="3220"/>
+                </a:lnSpc>
+              </a:pPr>
+            </a:p>
+          </p:txBody>
+        </p:sp>
+      </p:grpSp>
+      <p:grpSp>
+        <p:nvGrpSpPr>
+          <p:cNvPr id="30" name="Group 30"/>
+          <p:cNvGrpSpPr/>
+          <p:nvPr/>
+        </p:nvGrpSpPr>
+        <p:grpSpPr>
+          <a:xfrm rot="0">
+            <a:off x="9567101" y="3470253"/>
+            <a:ext cx="1647909" cy="1647909"/>
+            <a:chOff x="0" y="0"/>
+            <a:chExt cx="812800" cy="812800"/>
+          </a:xfrm>
+        </p:grpSpPr>
+        <p:sp>
+          <p:nvSpPr>
+            <p:cNvPr id="31" name="Freeform 31"/>
+            <p:cNvSpPr/>
+            <p:nvPr/>
+          </p:nvSpPr>
+          <p:spPr>
+            <a:xfrm>
+              <a:off x="0" y="0"/>
+              <a:ext cx="812800" cy="812800"/>
+            </a:xfrm>
+            <a:custGeom>
+              <a:avLst/>
+              <a:gdLst/>
+              <a:ahLst/>
+              <a:cxnLst/>
+              <a:rect l="l" t="t" r="r" b="b"/>
+              <a:pathLst>
+                <a:path w="812800" h="812800">
+                  <a:moveTo>
+                    <a:pt x="406400" y="0"/>
+                  </a:moveTo>
+                  <a:cubicBezTo>
+                    <a:pt x="181951" y="0"/>
+                    <a:pt x="0" y="181951"/>
+                    <a:pt x="0" y="406400"/>
+                  </a:cubicBezTo>
+                  <a:cubicBezTo>
+                    <a:pt x="0" y="630849"/>
+                    <a:pt x="181951" y="812800"/>
+                    <a:pt x="406400" y="812800"/>
+                  </a:cubicBezTo>
+                  <a:cubicBezTo>
+                    <a:pt x="630849" y="812800"/>
+                    <a:pt x="812800" y="630849"/>
+                    <a:pt x="812800" y="406400"/>
+                  </a:cubicBezTo>
+                  <a:cubicBezTo>
+                    <a:pt x="812800" y="181951"/>
+                    <a:pt x="630849" y="0"/>
+                    <a:pt x="406400" y="0"/>
+                  </a:cubicBezTo>
+                  <a:close/>
+                </a:path>
+              </a:pathLst>
+            </a:custGeom>
+            <a:solidFill>
+              <a:srgbClr val="66165D"/>
+            </a:solidFill>
+          </p:spPr>
+        </p:sp>
+        <p:sp>
+          <p:nvSpPr>
+            <p:cNvPr id="32" name="TextBox 32"/>
+            <p:cNvSpPr txBox="1"/>
+            <p:nvPr/>
+          </p:nvSpPr>
+          <p:spPr>
+            <a:xfrm>
+              <a:off x="76200" y="19050"/>
+              <a:ext cx="660400" cy="717550"/>
+            </a:xfrm>
+            <a:prstGeom prst="rect">
+              <a:avLst/>
+            </a:prstGeom>
+          </p:spPr>
+          <p:txBody>
+            <a:bodyPr lIns="50800" tIns="50800" rIns="50800" bIns="50800" rtlCol="0" anchor="ctr"/>
+            <a:lstStyle/>
+            <a:p>
+              <a:pPr algn="ctr">
+                <a:lnSpc>
+                  <a:spcPts val="3220"/>
+                </a:lnSpc>
+              </a:pPr>
+            </a:p>
+          </p:txBody>
+        </p:sp>
+      </p:grpSp>
+      <p:grpSp>
+        <p:nvGrpSpPr>
+          <p:cNvPr id="33" name="Group 33"/>
+          <p:cNvGrpSpPr/>
+          <p:nvPr/>
+        </p:nvGrpSpPr>
+        <p:grpSpPr>
+          <a:xfrm rot="0">
+            <a:off x="12236199" y="3470253"/>
+            <a:ext cx="1647909" cy="1647909"/>
+            <a:chOff x="0" y="0"/>
+            <a:chExt cx="812800" cy="812800"/>
+          </a:xfrm>
+        </p:grpSpPr>
+        <p:sp>
+          <p:nvSpPr>
+            <p:cNvPr id="34" name="Freeform 34"/>
+            <p:cNvSpPr/>
+            <p:nvPr/>
+          </p:nvSpPr>
+          <p:spPr>
+            <a:xfrm>
+              <a:off x="0" y="0"/>
+              <a:ext cx="812800" cy="812800"/>
+            </a:xfrm>
+            <a:custGeom>
+              <a:avLst/>
+              <a:gdLst/>
+              <a:ahLst/>
+              <a:cxnLst/>
+              <a:rect l="l" t="t" r="r" b="b"/>
+              <a:pathLst>
+                <a:path w="812800" h="812800">
+                  <a:moveTo>
+                    <a:pt x="406400" y="0"/>
+                  </a:moveTo>
+                  <a:cubicBezTo>
+                    <a:pt x="181951" y="0"/>
+                    <a:pt x="0" y="181951"/>
+                    <a:pt x="0" y="406400"/>
+                  </a:cubicBezTo>
+                  <a:cubicBezTo>
+                    <a:pt x="0" y="630849"/>
+                    <a:pt x="181951" y="812800"/>
+                    <a:pt x="406400" y="812800"/>
+                  </a:cubicBezTo>
+                  <a:cubicBezTo>
+                    <a:pt x="630849" y="812800"/>
+                    <a:pt x="812800" y="630849"/>
+                    <a:pt x="812800" y="406400"/>
+                  </a:cubicBezTo>
+                  <a:cubicBezTo>
+                    <a:pt x="812800" y="181951"/>
+                    <a:pt x="630849" y="0"/>
+                    <a:pt x="406400" y="0"/>
+                  </a:cubicBezTo>
+                  <a:close/>
+                </a:path>
+              </a:pathLst>
+            </a:custGeom>
+            <a:solidFill>
+              <a:srgbClr val="BD1F76"/>
+            </a:solidFill>
+          </p:spPr>
+        </p:sp>
+        <p:sp>
+          <p:nvSpPr>
+            <p:cNvPr id="35" name="TextBox 35"/>
+            <p:cNvSpPr txBox="1"/>
+            <p:nvPr/>
+          </p:nvSpPr>
+          <p:spPr>
+            <a:xfrm>
+              <a:off x="76200" y="19050"/>
+              <a:ext cx="660400" cy="717550"/>
+            </a:xfrm>
+            <a:prstGeom prst="rect">
+              <a:avLst/>
+            </a:prstGeom>
+          </p:spPr>
+          <p:txBody>
+            <a:bodyPr lIns="50800" tIns="50800" rIns="50800" bIns="50800" rtlCol="0" anchor="ctr"/>
+            <a:lstStyle/>
+            <a:p>
+              <a:pPr algn="ctr">
+                <a:lnSpc>
+                  <a:spcPts val="3220"/>
+                </a:lnSpc>
+              </a:pPr>
+            </a:p>
+          </p:txBody>
+        </p:sp>
+      </p:grpSp>
+      <p:grpSp>
+        <p:nvGrpSpPr>
+          <p:cNvPr id="36" name="Group 36"/>
+          <p:cNvGrpSpPr/>
+          <p:nvPr/>
+        </p:nvGrpSpPr>
+        <p:grpSpPr>
+          <a:xfrm rot="0">
+            <a:off x="14905298" y="3470253"/>
+            <a:ext cx="1647909" cy="1647909"/>
+            <a:chOff x="0" y="0"/>
+            <a:chExt cx="812800" cy="812800"/>
+          </a:xfrm>
+        </p:grpSpPr>
+        <p:sp>
+          <p:nvSpPr>
+            <p:cNvPr id="37" name="Freeform 37"/>
+            <p:cNvSpPr/>
+            <p:nvPr/>
+          </p:nvSpPr>
+          <p:spPr>
+            <a:xfrm>
+              <a:off x="0" y="0"/>
+              <a:ext cx="812800" cy="812800"/>
+            </a:xfrm>
+            <a:custGeom>
+              <a:avLst/>
+              <a:gdLst/>
+              <a:ahLst/>
+              <a:cxnLst/>
+              <a:rect l="l" t="t" r="r" b="b"/>
+              <a:pathLst>
+                <a:path w="812800" h="812800">
+                  <a:moveTo>
+                    <a:pt x="406400" y="0"/>
+                  </a:moveTo>
+                  <a:cubicBezTo>
+                    <a:pt x="181951" y="0"/>
+                    <a:pt x="0" y="181951"/>
+                    <a:pt x="0" y="406400"/>
+                  </a:cubicBezTo>
+                  <a:cubicBezTo>
+                    <a:pt x="0" y="630849"/>
+                    <a:pt x="181951" y="812800"/>
+                    <a:pt x="406400" y="812800"/>
+                  </a:cubicBezTo>
+                  <a:cubicBezTo>
+                    <a:pt x="630849" y="812800"/>
+                    <a:pt x="812800" y="630849"/>
+                    <a:pt x="812800" y="406400"/>
+                  </a:cubicBezTo>
+                  <a:cubicBezTo>
+                    <a:pt x="812800" y="181951"/>
+                    <a:pt x="630849" y="0"/>
+                    <a:pt x="406400" y="0"/>
+                  </a:cubicBezTo>
+                  <a:close/>
+                </a:path>
+              </a:pathLst>
+            </a:custGeom>
+            <a:solidFill>
+              <a:srgbClr val="FB366B"/>
+            </a:solidFill>
+          </p:spPr>
+        </p:sp>
+        <p:sp>
+          <p:nvSpPr>
+            <p:cNvPr id="38" name="TextBox 38"/>
+            <p:cNvSpPr txBox="1"/>
+            <p:nvPr/>
+          </p:nvSpPr>
+          <p:spPr>
+            <a:xfrm>
+              <a:off x="76200" y="19050"/>
+              <a:ext cx="660400" cy="717550"/>
+            </a:xfrm>
+            <a:prstGeom prst="rect">
+              <a:avLst/>
+            </a:prstGeom>
+          </p:spPr>
+          <p:txBody>
+            <a:bodyPr lIns="50800" tIns="50800" rIns="50800" bIns="50800" rtlCol="0" anchor="ctr"/>
+            <a:lstStyle/>
+            <a:p>
+              <a:pPr algn="ctr">
+                <a:lnSpc>
+                  <a:spcPts val="3220"/>
+                </a:lnSpc>
+              </a:pPr>
+            </a:p>
+          </p:txBody>
+        </p:sp>
+      </p:grpSp>
+      <p:sp>
+        <p:nvSpPr>
+          <p:cNvPr id="39" name="Freeform 39"/>
+          <p:cNvSpPr/>
+          <p:nvPr/>
+        </p:nvSpPr>
+        <p:spPr>
+          <a:xfrm>
+            <a:off x="1758902" y="3664917"/>
+            <a:ext cx="1533855" cy="1533855"/>
+          </a:xfrm>
+          <a:custGeom>
+            <a:avLst/>
+            <a:gdLst/>
+            <a:ahLst/>
+            <a:cxnLst/>
+            <a:rect l="l" t="t" r="r" b="b"/>
+            <a:pathLst>
+              <a:path w="1533855" h="1533855">
+                <a:moveTo>
+                  <a:pt x="0" y="0"/>
+                </a:moveTo>
+                <a:lnTo>
+                  <a:pt x="1533854" y="0"/>
+                </a:lnTo>
+                <a:lnTo>
+                  <a:pt x="1533854" y="1533855"/>
+                </a:lnTo>
+                <a:lnTo>
+                  <a:pt x="0" y="1533855"/>
+                </a:lnTo>
+                <a:lnTo>
+                  <a:pt x="0" y="0"/>
+                </a:lnTo>
+                <a:close/>
+              </a:path>
+            </a:pathLst>
+          </a:custGeom>
+          <a:blipFill>
+            <a:blip r:embed="rId1">
+              <a:alphaModFix amt="65000"/>
+              <a:extLst>
+                <a:ext uri="{96DAC541-7B7A-43D3-8B79-37D633B846F1}">
+                  <asvg:svgBlip xmlns:asvg="http://schemas.microsoft.com/office/drawing/2016/SVG/main" r:embed="rId2"/>
+                </a:ext>
+              </a:extLst>
+            </a:blip>
+            <a:stretch>
+              <a:fillRect/>
+            </a:stretch>
+          </a:blipFill>
+          <a:ln cap="sq">
+            <a:noFill/>
+            <a:prstDash val="solid"/>
+            <a:miter/>
+          </a:ln>
+        </p:spPr>
+      </p:sp>
+      <p:grpSp>
+        <p:nvGrpSpPr>
+          <p:cNvPr id="40" name="Group 40"/>
+          <p:cNvGrpSpPr/>
+          <p:nvPr/>
+        </p:nvGrpSpPr>
+        <p:grpSpPr>
+          <a:xfrm rot="0">
+            <a:off x="1758902" y="3664917"/>
+            <a:ext cx="1253745" cy="1253745"/>
+            <a:chOff x="0" y="0"/>
+            <a:chExt cx="812800" cy="812800"/>
+          </a:xfrm>
+        </p:grpSpPr>
+        <p:sp>
+          <p:nvSpPr>
+            <p:cNvPr id="41" name="Freeform 41"/>
+            <p:cNvSpPr/>
+            <p:nvPr/>
+          </p:nvSpPr>
+          <p:spPr>
+            <a:xfrm>
+              <a:off x="0" y="0"/>
+              <a:ext cx="812800" cy="812800"/>
+            </a:xfrm>
+            <a:custGeom>
+              <a:avLst/>
+              <a:gdLst/>
+              <a:ahLst/>
+              <a:cxnLst/>
+              <a:rect l="l" t="t" r="r" b="b"/>
+              <a:pathLst>
+                <a:path w="812800" h="812800">
+                  <a:moveTo>
+                    <a:pt x="406400" y="0"/>
+                  </a:moveTo>
+                  <a:cubicBezTo>
+                    <a:pt x="181951" y="0"/>
+                    <a:pt x="0" y="181951"/>
+                    <a:pt x="0" y="406400"/>
+                  </a:cubicBezTo>
+                  <a:cubicBezTo>
+                    <a:pt x="0" y="630849"/>
+                    <a:pt x="181951" y="812800"/>
+                    <a:pt x="406400" y="812800"/>
+                  </a:cubicBezTo>
+                  <a:cubicBezTo>
+                    <a:pt x="630849" y="812800"/>
+                    <a:pt x="812800" y="630849"/>
+                    <a:pt x="812800" y="406400"/>
+                  </a:cubicBezTo>
+                  <a:cubicBezTo>
+                    <a:pt x="812800" y="181951"/>
+                    <a:pt x="630849" y="0"/>
+                    <a:pt x="406400" y="0"/>
+                  </a:cubicBezTo>
+                  <a:close/>
+                </a:path>
+              </a:pathLst>
+            </a:custGeom>
+            <a:solidFill>
+              <a:srgbClr val="FFFFFF"/>
+            </a:solidFill>
+          </p:spPr>
+        </p:sp>
+        <p:sp>
+          <p:nvSpPr>
+            <p:cNvPr id="42" name="TextBox 42"/>
+            <p:cNvSpPr txBox="1"/>
+            <p:nvPr/>
+          </p:nvSpPr>
+          <p:spPr>
+            <a:xfrm>
+              <a:off x="76200" y="19050"/>
+              <a:ext cx="660400" cy="717550"/>
+            </a:xfrm>
+            <a:prstGeom prst="rect">
+              <a:avLst/>
+            </a:prstGeom>
+          </p:spPr>
+          <p:txBody>
+            <a:bodyPr lIns="50800" tIns="50800" rIns="50800" bIns="50800" rtlCol="0" anchor="ctr"/>
+            <a:lstStyle/>
+            <a:p>
+              <a:pPr algn="ctr">
+                <a:lnSpc>
+                  <a:spcPts val="3220"/>
+                </a:lnSpc>
+              </a:pPr>
+            </a:p>
+          </p:txBody>
+        </p:sp>
+      </p:grpSp>
+      <p:sp>
+        <p:nvSpPr>
+          <p:cNvPr id="43" name="Freeform 43"/>
+          <p:cNvSpPr/>
+          <p:nvPr/>
+        </p:nvSpPr>
+        <p:spPr>
+          <a:xfrm>
+            <a:off x="4425985" y="3664917"/>
+            <a:ext cx="1533525" cy="1533525"/>
+          </a:xfrm>
+          <a:custGeom>
+            <a:avLst/>
+            <a:gdLst/>
+            <a:ahLst/>
+            <a:cxnLst/>
+            <a:rect l="l" t="t" r="r" b="b"/>
+            <a:pathLst>
+              <a:path w="1533525" h="1533525">
+                <a:moveTo>
+                  <a:pt x="0" y="0"/>
+                </a:moveTo>
+                <a:lnTo>
+                  <a:pt x="1533525" y="0"/>
+                </a:lnTo>
+                <a:lnTo>
+                  <a:pt x="1533525" y="1533525"/>
+                </a:lnTo>
+                <a:lnTo>
+                  <a:pt x="0" y="1533525"/>
+                </a:lnTo>
+                <a:lnTo>
+                  <a:pt x="0" y="0"/>
+                </a:lnTo>
+                <a:close/>
+              </a:path>
+            </a:pathLst>
+          </a:custGeom>
+          <a:blipFill>
+            <a:blip r:embed="rId1">
+              <a:alphaModFix amt="65000"/>
+              <a:extLst>
+                <a:ext uri="{96DAC541-7B7A-43D3-8B79-37D633B846F1}">
+                  <asvg:svgBlip xmlns:asvg="http://schemas.microsoft.com/office/drawing/2016/SVG/main" r:embed="rId3"/>
+                </a:ext>
+              </a:extLst>
+            </a:blip>
+            <a:stretch>
+              <a:fillRect/>
+            </a:stretch>
+          </a:blipFill>
+          <a:ln cap="sq">
+            <a:noFill/>
+            <a:prstDash val="solid"/>
+            <a:miter/>
+          </a:ln>
+        </p:spPr>
+      </p:sp>
+      <p:grpSp>
+        <p:nvGrpSpPr>
+          <p:cNvPr id="44" name="Group 44"/>
+          <p:cNvGrpSpPr/>
+          <p:nvPr/>
+        </p:nvGrpSpPr>
+        <p:grpSpPr>
+          <a:xfrm rot="0">
+            <a:off x="4425985" y="3664917"/>
+            <a:ext cx="1253745" cy="1253745"/>
+            <a:chOff x="0" y="0"/>
+            <a:chExt cx="812800" cy="812800"/>
+          </a:xfrm>
+        </p:grpSpPr>
+        <p:sp>
+          <p:nvSpPr>
+            <p:cNvPr id="45" name="Freeform 45"/>
+            <p:cNvSpPr/>
+            <p:nvPr/>
+          </p:nvSpPr>
+          <p:spPr>
+            <a:xfrm>
+              <a:off x="0" y="0"/>
+              <a:ext cx="812800" cy="812800"/>
+            </a:xfrm>
+            <a:custGeom>
+              <a:avLst/>
+              <a:gdLst/>
+              <a:ahLst/>
+              <a:cxnLst/>
+              <a:rect l="l" t="t" r="r" b="b"/>
+              <a:pathLst>
+                <a:path w="812800" h="812800">
+                  <a:moveTo>
+                    <a:pt x="406400" y="0"/>
+                  </a:moveTo>
+                  <a:cubicBezTo>
+                    <a:pt x="181951" y="0"/>
+                    <a:pt x="0" y="181951"/>
+                    <a:pt x="0" y="406400"/>
+                  </a:cubicBezTo>
+                  <a:cubicBezTo>
+                    <a:pt x="0" y="630849"/>
+                    <a:pt x="181951" y="812800"/>
+                    <a:pt x="406400" y="812800"/>
+                  </a:cubicBezTo>
+                  <a:cubicBezTo>
+                    <a:pt x="630849" y="812800"/>
+                    <a:pt x="812800" y="630849"/>
+                    <a:pt x="812800" y="406400"/>
+                  </a:cubicBezTo>
+                  <a:cubicBezTo>
+                    <a:pt x="812800" y="181951"/>
+                    <a:pt x="630849" y="0"/>
+                    <a:pt x="406400" y="0"/>
+                  </a:cubicBezTo>
+                  <a:close/>
+                </a:path>
+              </a:pathLst>
+            </a:custGeom>
+            <a:solidFill>
+              <a:srgbClr val="FFFFFF"/>
+            </a:solidFill>
+          </p:spPr>
+        </p:sp>
+        <p:sp>
+          <p:nvSpPr>
+            <p:cNvPr id="46" name="TextBox 46"/>
+            <p:cNvSpPr txBox="1"/>
+            <p:nvPr/>
+          </p:nvSpPr>
+          <p:spPr>
+            <a:xfrm>
+              <a:off x="76200" y="19050"/>
+              <a:ext cx="660400" cy="717550"/>
+            </a:xfrm>
+            <a:prstGeom prst="rect">
+              <a:avLst/>
+            </a:prstGeom>
+          </p:spPr>
+          <p:txBody>
+            <a:bodyPr lIns="50800" tIns="50800" rIns="50800" bIns="50800" rtlCol="0" anchor="ctr"/>
+            <a:lstStyle/>
+            <a:p>
+              <a:pPr algn="ctr">
+                <a:lnSpc>
+                  <a:spcPts val="3220"/>
+                </a:lnSpc>
+              </a:pPr>
+            </a:p>
+          </p:txBody>
+        </p:sp>
+      </p:grpSp>
+      <p:sp>
+        <p:nvSpPr>
+          <p:cNvPr id="47" name="Freeform 47"/>
+          <p:cNvSpPr/>
+          <p:nvPr/>
+        </p:nvSpPr>
+        <p:spPr>
+          <a:xfrm>
+            <a:off x="7095084" y="3664917"/>
+            <a:ext cx="1533525" cy="1533525"/>
+          </a:xfrm>
+          <a:custGeom>
+            <a:avLst/>
+            <a:gdLst/>
+            <a:ahLst/>
+            <a:cxnLst/>
+            <a:rect l="l" t="t" r="r" b="b"/>
+            <a:pathLst>
+              <a:path w="1533525" h="1533525">
+                <a:moveTo>
+                  <a:pt x="0" y="0"/>
+                </a:moveTo>
+                <a:lnTo>
+                  <a:pt x="1533525" y="0"/>
+                </a:lnTo>
+                <a:lnTo>
+                  <a:pt x="1533525" y="1533525"/>
+                </a:lnTo>
+                <a:lnTo>
+                  <a:pt x="0" y="1533525"/>
+                </a:lnTo>
+                <a:lnTo>
+                  <a:pt x="0" y="0"/>
+                </a:lnTo>
+                <a:close/>
+              </a:path>
+            </a:pathLst>
+          </a:custGeom>
+          <a:blipFill>
+            <a:blip r:embed="rId1">
+              <a:alphaModFix amt="65000"/>
+              <a:extLst>
+                <a:ext uri="{96DAC541-7B7A-43D3-8B79-37D633B846F1}">
+                  <asvg:svgBlip xmlns:asvg="http://schemas.microsoft.com/office/drawing/2016/SVG/main" r:embed="rId4"/>
+                </a:ext>
+              </a:extLst>
+            </a:blip>
+            <a:stretch>
+              <a:fillRect/>
+            </a:stretch>
+          </a:blipFill>
+          <a:ln cap="sq">
+            <a:noFill/>
+            <a:prstDash val="solid"/>
+            <a:miter/>
+          </a:ln>
+        </p:spPr>
+      </p:sp>
+      <p:grpSp>
+        <p:nvGrpSpPr>
+          <p:cNvPr id="48" name="Group 48"/>
+          <p:cNvGrpSpPr/>
+          <p:nvPr/>
+        </p:nvGrpSpPr>
+        <p:grpSpPr>
+          <a:xfrm rot="0">
+            <a:off x="7095084" y="3664917"/>
+            <a:ext cx="1253745" cy="1253745"/>
+            <a:chOff x="0" y="0"/>
+            <a:chExt cx="812800" cy="812800"/>
+          </a:xfrm>
+        </p:grpSpPr>
+        <p:sp>
+          <p:nvSpPr>
+            <p:cNvPr id="49" name="Freeform 49"/>
+            <p:cNvSpPr/>
+            <p:nvPr/>
+          </p:nvSpPr>
+          <p:spPr>
+            <a:xfrm>
+              <a:off x="0" y="0"/>
+              <a:ext cx="812800" cy="812800"/>
+            </a:xfrm>
+            <a:custGeom>
+              <a:avLst/>
+              <a:gdLst/>
+              <a:ahLst/>
+              <a:cxnLst/>
+              <a:rect l="l" t="t" r="r" b="b"/>
+              <a:pathLst>
+                <a:path w="812800" h="812800">
+                  <a:moveTo>
+                    <a:pt x="406400" y="0"/>
+                  </a:moveTo>
+                  <a:cubicBezTo>
+                    <a:pt x="181951" y="0"/>
+                    <a:pt x="0" y="181951"/>
+                    <a:pt x="0" y="406400"/>
+                  </a:cubicBezTo>
+                  <a:cubicBezTo>
+                    <a:pt x="0" y="630849"/>
+                    <a:pt x="181951" y="812800"/>
+                    <a:pt x="406400" y="812800"/>
+                  </a:cubicBezTo>
+                  <a:cubicBezTo>
+                    <a:pt x="630849" y="812800"/>
+                    <a:pt x="812800" y="630849"/>
+                    <a:pt x="812800" y="406400"/>
+                  </a:cubicBezTo>
+                  <a:cubicBezTo>
+                    <a:pt x="812800" y="181951"/>
+                    <a:pt x="630849" y="0"/>
+                    <a:pt x="406400" y="0"/>
+                  </a:cubicBezTo>
+                  <a:close/>
+                </a:path>
+              </a:pathLst>
+            </a:custGeom>
+            <a:solidFill>
+              <a:srgbClr val="FFFFFF"/>
+            </a:solidFill>
+          </p:spPr>
+        </p:sp>
+        <p:sp>
+          <p:nvSpPr>
+            <p:cNvPr id="50" name="TextBox 50"/>
+            <p:cNvSpPr txBox="1"/>
+            <p:nvPr/>
+          </p:nvSpPr>
+          <p:spPr>
+            <a:xfrm>
+              <a:off x="76200" y="19050"/>
+              <a:ext cx="660400" cy="717550"/>
+            </a:xfrm>
+            <a:prstGeom prst="rect">
+              <a:avLst/>
+            </a:prstGeom>
+          </p:spPr>
+          <p:txBody>
+            <a:bodyPr lIns="50800" tIns="50800" rIns="50800" bIns="50800" rtlCol="0" anchor="ctr"/>
+            <a:lstStyle/>
+            <a:p>
+              <a:pPr algn="ctr">
+                <a:lnSpc>
+                  <a:spcPts val="3220"/>
+                </a:lnSpc>
+              </a:pPr>
+            </a:p>
+          </p:txBody>
+        </p:sp>
+      </p:grpSp>
+      <p:sp>
+        <p:nvSpPr>
+          <p:cNvPr id="51" name="Freeform 51"/>
+          <p:cNvSpPr/>
+          <p:nvPr/>
+        </p:nvSpPr>
+        <p:spPr>
+          <a:xfrm>
+            <a:off x="9764182" y="3664917"/>
+            <a:ext cx="1533525" cy="1533525"/>
+          </a:xfrm>
+          <a:custGeom>
+            <a:avLst/>
+            <a:gdLst/>
+            <a:ahLst/>
+            <a:cxnLst/>
+            <a:rect l="l" t="t" r="r" b="b"/>
+            <a:pathLst>
+              <a:path w="1533525" h="1533525">
+                <a:moveTo>
+                  <a:pt x="0" y="0"/>
+                </a:moveTo>
+                <a:lnTo>
+                  <a:pt x="1533525" y="0"/>
+                </a:lnTo>
+                <a:lnTo>
+                  <a:pt x="1533525" y="1533525"/>
+                </a:lnTo>
+                <a:lnTo>
+                  <a:pt x="0" y="1533525"/>
+                </a:lnTo>
+                <a:lnTo>
+                  <a:pt x="0" y="0"/>
+                </a:lnTo>
+                <a:close/>
+              </a:path>
+            </a:pathLst>
+          </a:custGeom>
+          <a:blipFill>
+            <a:blip r:embed="rId1">
+              <a:alphaModFix amt="65000"/>
+              <a:extLst>
+                <a:ext uri="{96DAC541-7B7A-43D3-8B79-37D633B846F1}">
+                  <asvg:svgBlip xmlns:asvg="http://schemas.microsoft.com/office/drawing/2016/SVG/main" r:embed="rId2"/>
+                </a:ext>
+              </a:extLst>
+            </a:blip>
+            <a:stretch>
+              <a:fillRect/>
+            </a:stretch>
+          </a:blipFill>
+          <a:ln cap="sq">
+            <a:noFill/>
+            <a:prstDash val="solid"/>
+            <a:miter/>
+          </a:ln>
+        </p:spPr>
+      </p:sp>
+      <p:grpSp>
+        <p:nvGrpSpPr>
+          <p:cNvPr id="52" name="Group 52"/>
+          <p:cNvGrpSpPr/>
+          <p:nvPr/>
+        </p:nvGrpSpPr>
+        <p:grpSpPr>
+          <a:xfrm rot="0">
+            <a:off x="9764182" y="3664917"/>
+            <a:ext cx="1253745" cy="1253745"/>
+            <a:chOff x="0" y="0"/>
+            <a:chExt cx="812800" cy="812800"/>
+          </a:xfrm>
+        </p:grpSpPr>
+        <p:sp>
+          <p:nvSpPr>
+            <p:cNvPr id="53" name="Freeform 53"/>
+            <p:cNvSpPr/>
+            <p:nvPr/>
+          </p:nvSpPr>
+          <p:spPr>
+            <a:xfrm>
+              <a:off x="0" y="0"/>
+              <a:ext cx="812800" cy="812800"/>
+            </a:xfrm>
+            <a:custGeom>
+              <a:avLst/>
+              <a:gdLst/>
+              <a:ahLst/>
+              <a:cxnLst/>
+              <a:rect l="l" t="t" r="r" b="b"/>
+              <a:pathLst>
+                <a:path w="812800" h="812800">
+                  <a:moveTo>
+                    <a:pt x="406400" y="0"/>
+                  </a:moveTo>
+                  <a:cubicBezTo>
+                    <a:pt x="181951" y="0"/>
+                    <a:pt x="0" y="181951"/>
+                    <a:pt x="0" y="406400"/>
+                  </a:cubicBezTo>
+                  <a:cubicBezTo>
+                    <a:pt x="0" y="630849"/>
+                    <a:pt x="181951" y="812800"/>
+                    <a:pt x="406400" y="812800"/>
+                  </a:cubicBezTo>
+                  <a:cubicBezTo>
+                    <a:pt x="630849" y="812800"/>
+                    <a:pt x="812800" y="630849"/>
+                    <a:pt x="812800" y="406400"/>
+                  </a:cubicBezTo>
+                  <a:cubicBezTo>
+                    <a:pt x="812800" y="181951"/>
+                    <a:pt x="630849" y="0"/>
+                    <a:pt x="406400" y="0"/>
+                  </a:cubicBezTo>
+                  <a:close/>
+                </a:path>
+              </a:pathLst>
+            </a:custGeom>
+            <a:solidFill>
+              <a:srgbClr val="FFFFFF"/>
+            </a:solidFill>
+          </p:spPr>
+        </p:sp>
+        <p:sp>
+          <p:nvSpPr>
+            <p:cNvPr id="54" name="TextBox 54"/>
+            <p:cNvSpPr txBox="1"/>
+            <p:nvPr/>
+          </p:nvSpPr>
+          <p:spPr>
+            <a:xfrm>
+              <a:off x="76200" y="19050"/>
+              <a:ext cx="660400" cy="717550"/>
+            </a:xfrm>
+            <a:prstGeom prst="rect">
+              <a:avLst/>
+            </a:prstGeom>
+          </p:spPr>
+          <p:txBody>
+            <a:bodyPr lIns="50800" tIns="50800" rIns="50800" bIns="50800" rtlCol="0" anchor="ctr"/>
+            <a:lstStyle/>
+            <a:p>
+              <a:pPr algn="ctr">
+                <a:lnSpc>
+                  <a:spcPts val="3220"/>
+                </a:lnSpc>
+              </a:pPr>
+            </a:p>
+          </p:txBody>
+        </p:sp>
+      </p:grpSp>
+      <p:sp>
+        <p:nvSpPr>
+          <p:cNvPr id="55" name="Freeform 55"/>
+          <p:cNvSpPr/>
+          <p:nvPr/>
+        </p:nvSpPr>
+        <p:spPr>
+          <a:xfrm>
+            <a:off x="12433281" y="3664917"/>
+            <a:ext cx="1533525" cy="1533525"/>
+          </a:xfrm>
+          <a:custGeom>
+            <a:avLst/>
+            <a:gdLst/>
+            <a:ahLst/>
+            <a:cxnLst/>
+            <a:rect l="l" t="t" r="r" b="b"/>
+            <a:pathLst>
+              <a:path w="1533525" h="1533525">
+                <a:moveTo>
+                  <a:pt x="0" y="0"/>
+                </a:moveTo>
+                <a:lnTo>
+                  <a:pt x="1533525" y="0"/>
+                </a:lnTo>
+                <a:lnTo>
+                  <a:pt x="1533525" y="1533525"/>
+                </a:lnTo>
+                <a:lnTo>
+                  <a:pt x="0" y="1533525"/>
+                </a:lnTo>
+                <a:lnTo>
+                  <a:pt x="0" y="0"/>
+                </a:lnTo>
+                <a:close/>
+              </a:path>
+            </a:pathLst>
+          </a:custGeom>
+          <a:blipFill>
+            <a:blip r:embed="rId1">
+              <a:alphaModFix amt="65000"/>
+              <a:extLst>
+                <a:ext uri="{96DAC541-7B7A-43D3-8B79-37D633B846F1}">
+                  <asvg:svgBlip xmlns:asvg="http://schemas.microsoft.com/office/drawing/2016/SVG/main" r:embed="rId5"/>
+                </a:ext>
+              </a:extLst>
+            </a:blip>
+            <a:stretch>
+              <a:fillRect/>
+            </a:stretch>
+          </a:blipFill>
+          <a:ln cap="sq">
+            <a:noFill/>
+            <a:prstDash val="solid"/>
+            <a:miter/>
+          </a:ln>
+        </p:spPr>
+      </p:sp>
+      <p:grpSp>
+        <p:nvGrpSpPr>
+          <p:cNvPr id="56" name="Group 56"/>
+          <p:cNvGrpSpPr/>
+          <p:nvPr/>
+        </p:nvGrpSpPr>
+        <p:grpSpPr>
+          <a:xfrm rot="0">
+            <a:off x="12433281" y="3664917"/>
+            <a:ext cx="1253745" cy="1253745"/>
+            <a:chOff x="0" y="0"/>
+            <a:chExt cx="812800" cy="812800"/>
+          </a:xfrm>
+        </p:grpSpPr>
+        <p:sp>
+          <p:nvSpPr>
+            <p:cNvPr id="57" name="Freeform 57"/>
+            <p:cNvSpPr/>
+            <p:nvPr/>
+          </p:nvSpPr>
+          <p:spPr>
+            <a:xfrm>
+              <a:off x="0" y="0"/>
+              <a:ext cx="812800" cy="812800"/>
+            </a:xfrm>
+            <a:custGeom>
+              <a:avLst/>
+              <a:gdLst/>
+              <a:ahLst/>
+              <a:cxnLst/>
+              <a:rect l="l" t="t" r="r" b="b"/>
+              <a:pathLst>
+                <a:path w="812800" h="812800">
+                  <a:moveTo>
+                    <a:pt x="406400" y="0"/>
+                  </a:moveTo>
+                  <a:cubicBezTo>
+                    <a:pt x="181951" y="0"/>
+                    <a:pt x="0" y="181951"/>
+                    <a:pt x="0" y="406400"/>
+                  </a:cubicBezTo>
+                  <a:cubicBezTo>
+                    <a:pt x="0" y="630849"/>
+                    <a:pt x="181951" y="812800"/>
+                    <a:pt x="406400" y="812800"/>
+                  </a:cubicBezTo>
+                  <a:cubicBezTo>
+                    <a:pt x="630849" y="812800"/>
+                    <a:pt x="812800" y="630849"/>
+                    <a:pt x="812800" y="406400"/>
+                  </a:cubicBezTo>
+                  <a:cubicBezTo>
+                    <a:pt x="812800" y="181951"/>
+                    <a:pt x="630849" y="0"/>
+                    <a:pt x="406400" y="0"/>
+                  </a:cubicBezTo>
+                  <a:close/>
+                </a:path>
+              </a:pathLst>
+            </a:custGeom>
+            <a:solidFill>
+              <a:srgbClr val="FFFFFF"/>
+            </a:solidFill>
+          </p:spPr>
+        </p:sp>
+        <p:sp>
+          <p:nvSpPr>
+            <p:cNvPr id="58" name="TextBox 58"/>
+            <p:cNvSpPr txBox="1"/>
+            <p:nvPr/>
+          </p:nvSpPr>
+          <p:spPr>
+            <a:xfrm>
+              <a:off x="76200" y="19050"/>
+              <a:ext cx="660400" cy="717550"/>
+            </a:xfrm>
+            <a:prstGeom prst="rect">
+              <a:avLst/>
+            </a:prstGeom>
+          </p:spPr>
+          <p:txBody>
+            <a:bodyPr lIns="50800" tIns="50800" rIns="50800" bIns="50800" rtlCol="0" anchor="ctr"/>
+            <a:lstStyle/>
+            <a:p>
+              <a:pPr algn="ctr">
+                <a:lnSpc>
+                  <a:spcPts val="3220"/>
+                </a:lnSpc>
+              </a:pPr>
+            </a:p>
+          </p:txBody>
+        </p:sp>
+      </p:grpSp>
+      <p:sp>
+        <p:nvSpPr>
+          <p:cNvPr id="59" name="Freeform 59"/>
+          <p:cNvSpPr/>
+          <p:nvPr/>
+        </p:nvSpPr>
+        <p:spPr>
+          <a:xfrm>
+            <a:off x="15102380" y="3664917"/>
+            <a:ext cx="1533525" cy="1533525"/>
+          </a:xfrm>
+          <a:custGeom>
+            <a:avLst/>
+            <a:gdLst/>
+            <a:ahLst/>
+            <a:cxnLst/>
+            <a:rect l="l" t="t" r="r" b="b"/>
+            <a:pathLst>
+              <a:path w="1533525" h="1533525">
+                <a:moveTo>
+                  <a:pt x="0" y="0"/>
+                </a:moveTo>
+                <a:lnTo>
+                  <a:pt x="1533525" y="0"/>
+                </a:lnTo>
+                <a:lnTo>
+                  <a:pt x="1533525" y="1533525"/>
+                </a:lnTo>
+                <a:lnTo>
+                  <a:pt x="0" y="1533525"/>
+                </a:lnTo>
+                <a:lnTo>
+                  <a:pt x="0" y="0"/>
+                </a:lnTo>
+                <a:close/>
+              </a:path>
+            </a:pathLst>
+          </a:custGeom>
+          <a:blipFill>
+            <a:blip r:embed="rId1">
+              <a:alphaModFix amt="65000"/>
+              <a:extLst>
+                <a:ext uri="{96DAC541-7B7A-43D3-8B79-37D633B846F1}">
+                  <asvg:svgBlip xmlns:asvg="http://schemas.microsoft.com/office/drawing/2016/SVG/main" r:embed="rId6"/>
+                </a:ext>
+              </a:extLst>
+            </a:blip>
+            <a:stretch>
+              <a:fillRect/>
+            </a:stretch>
+          </a:blipFill>
+          <a:ln cap="sq">
+            <a:noFill/>
+            <a:prstDash val="solid"/>
+            <a:miter/>
+          </a:ln>
+        </p:spPr>
+      </p:sp>
+      <p:grpSp>
+        <p:nvGrpSpPr>
+          <p:cNvPr id="60" name="Group 60"/>
+          <p:cNvGrpSpPr/>
+          <p:nvPr/>
+        </p:nvGrpSpPr>
+        <p:grpSpPr>
+          <a:xfrm rot="0">
+            <a:off x="15102380" y="3664917"/>
+            <a:ext cx="1253745" cy="1253745"/>
+            <a:chOff x="0" y="0"/>
+            <a:chExt cx="812800" cy="812800"/>
+          </a:xfrm>
+        </p:grpSpPr>
+        <p:sp>
+          <p:nvSpPr>
+            <p:cNvPr id="61" name="Freeform 61"/>
+            <p:cNvSpPr/>
+            <p:nvPr/>
+          </p:nvSpPr>
+          <p:spPr>
+            <a:xfrm>
+              <a:off x="0" y="0"/>
+              <a:ext cx="812800" cy="812800"/>
+            </a:xfrm>
+            <a:custGeom>
+              <a:avLst/>
+              <a:gdLst/>
+              <a:ahLst/>
+              <a:cxnLst/>
+              <a:rect l="l" t="t" r="r" b="b"/>
+              <a:pathLst>
+                <a:path w="812800" h="812800">
+                  <a:moveTo>
+                    <a:pt x="406400" y="0"/>
+                  </a:moveTo>
+                  <a:cubicBezTo>
+                    <a:pt x="181951" y="0"/>
+                    <a:pt x="0" y="181951"/>
+                    <a:pt x="0" y="406400"/>
+                  </a:cubicBezTo>
+                  <a:cubicBezTo>
+                    <a:pt x="0" y="630849"/>
+                    <a:pt x="181951" y="812800"/>
+                    <a:pt x="406400" y="812800"/>
+                  </a:cubicBezTo>
+                  <a:cubicBezTo>
+                    <a:pt x="630849" y="812800"/>
+                    <a:pt x="812800" y="630849"/>
+                    <a:pt x="812800" y="406400"/>
+                  </a:cubicBezTo>
+                  <a:cubicBezTo>
+                    <a:pt x="812800" y="181951"/>
+                    <a:pt x="630849" y="0"/>
+                    <a:pt x="406400" y="0"/>
+                  </a:cubicBezTo>
+                  <a:close/>
+                </a:path>
+              </a:pathLst>
+            </a:custGeom>
+            <a:solidFill>
+              <a:srgbClr val="FFFFFF"/>
+            </a:solidFill>
+          </p:spPr>
+        </p:sp>
+        <p:sp>
+          <p:nvSpPr>
+            <p:cNvPr id="62" name="TextBox 62"/>
+            <p:cNvSpPr txBox="1"/>
+            <p:nvPr/>
+          </p:nvSpPr>
+          <p:spPr>
+            <a:xfrm>
+              <a:off x="76200" y="19050"/>
+              <a:ext cx="660400" cy="717550"/>
+            </a:xfrm>
+            <a:prstGeom prst="rect">
+              <a:avLst/>
+            </a:prstGeom>
+          </p:spPr>
+          <p:txBody>
+            <a:bodyPr lIns="50800" tIns="50800" rIns="50800" bIns="50800" rtlCol="0" anchor="ctr"/>
+            <a:lstStyle/>
+            <a:p>
+              <a:pPr algn="ctr">
+                <a:lnSpc>
+                  <a:spcPts val="3220"/>
+                </a:lnSpc>
+              </a:pPr>
+            </a:p>
+          </p:txBody>
+        </p:sp>
+      </p:grpSp>
+      <p:sp>
+        <p:nvSpPr>
+          <p:cNvPr id="63" name="Freeform 63"/>
+          <p:cNvSpPr/>
+          <p:nvPr/>
+        </p:nvSpPr>
+        <p:spPr>
+          <a:xfrm>
+            <a:off x="10041502" y="3958415"/>
+            <a:ext cx="666750" cy="666750"/>
+          </a:xfrm>
+          <a:custGeom>
+            <a:avLst/>
+            <a:gdLst/>
+            <a:ahLst/>
+            <a:cxnLst/>
+            <a:rect l="l" t="t" r="r" b="b"/>
+            <a:pathLst>
+              <a:path w="666750" h="666750">
+                <a:moveTo>
+                  <a:pt x="0" y="0"/>
+                </a:moveTo>
+                <a:lnTo>
+                  <a:pt x="666750" y="0"/>
+                </a:lnTo>
+                <a:lnTo>
+                  <a:pt x="666750" y="666750"/>
+                </a:lnTo>
+                <a:lnTo>
+                  <a:pt x="0" y="666750"/>
+                </a:lnTo>
+                <a:lnTo>
+                  <a:pt x="0" y="0"/>
+                </a:lnTo>
+                <a:close/>
+              </a:path>
+            </a:pathLst>
+          </a:custGeom>
+          <a:blipFill>
+            <a:blip r:embed="rId7">
+              <a:extLst>
+                <a:ext uri="{96DAC541-7B7A-43D3-8B79-37D633B846F1}">
+                  <asvg:svgBlip xmlns:asvg="http://schemas.microsoft.com/office/drawing/2016/SVG/main" r:embed="rId8"/>
+                </a:ext>
+              </a:extLst>
+            </a:blip>
+            <a:stretch>
+              <a:fillRect/>
+            </a:stretch>
+          </a:blipFill>
+        </p:spPr>
+      </p:sp>
+      <p:sp>
+        <p:nvSpPr>
+          <p:cNvPr id="68" name="Freeform 68"/>
+          <p:cNvSpPr/>
+          <p:nvPr/>
+        </p:nvSpPr>
+        <p:spPr>
+          <a:xfrm>
+            <a:off x="1973698" y="3880611"/>
+            <a:ext cx="727259" cy="752661"/>
+          </a:xfrm>
+          <a:custGeom>
+            <a:avLst/>
+            <a:gdLst/>
+            <a:ahLst/>
+            <a:cxnLst/>
+            <a:rect l="l" t="t" r="r" b="b"/>
+            <a:pathLst>
+              <a:path w="727259" h="752661">
+                <a:moveTo>
+                  <a:pt x="0" y="0"/>
+                </a:moveTo>
+                <a:lnTo>
+                  <a:pt x="727259" y="0"/>
+                </a:lnTo>
+                <a:lnTo>
+                  <a:pt x="727259" y="752661"/>
+                </a:lnTo>
+                <a:lnTo>
+                  <a:pt x="0" y="752661"/>
+                </a:lnTo>
+                <a:lnTo>
+                  <a:pt x="0" y="0"/>
+                </a:lnTo>
+                <a:close/>
+              </a:path>
+            </a:pathLst>
+          </a:custGeom>
+          <a:blipFill>
+            <a:blip r:embed="rId9">
+              <a:extLst>
+                <a:ext uri="{96DAC541-7B7A-43D3-8B79-37D633B846F1}">
+                  <asvg:svgBlip xmlns:asvg="http://schemas.microsoft.com/office/drawing/2016/SVG/main" r:embed="rId10"/>
+                </a:ext>
+              </a:extLst>
+            </a:blip>
+            <a:stretch>
+              <a:fillRect/>
+            </a:stretch>
+          </a:blipFill>
+        </p:spPr>
+      </p:sp>
+      <p:sp>
+        <p:nvSpPr>
+          <p:cNvPr id="69" name="Freeform 69"/>
+          <p:cNvSpPr/>
+          <p:nvPr/>
+        </p:nvSpPr>
+        <p:spPr>
+          <a:xfrm>
+            <a:off x="4819937" y="3838761"/>
+            <a:ext cx="462261" cy="794511"/>
+          </a:xfrm>
+          <a:custGeom>
+            <a:avLst/>
+            <a:gdLst/>
+            <a:ahLst/>
+            <a:cxnLst/>
+            <a:rect l="l" t="t" r="r" b="b"/>
+            <a:pathLst>
+              <a:path w="462261" h="794511">
+                <a:moveTo>
+                  <a:pt x="0" y="0"/>
+                </a:moveTo>
+                <a:lnTo>
+                  <a:pt x="462261" y="0"/>
+                </a:lnTo>
+                <a:lnTo>
+                  <a:pt x="462261" y="794511"/>
+                </a:lnTo>
+                <a:lnTo>
+                  <a:pt x="0" y="794511"/>
+                </a:lnTo>
+                <a:lnTo>
+                  <a:pt x="0" y="0"/>
+                </a:lnTo>
+                <a:close/>
+              </a:path>
+            </a:pathLst>
+          </a:custGeom>
+          <a:blipFill>
+            <a:blip r:embed="rId11">
+              <a:extLst>
+                <a:ext uri="{96DAC541-7B7A-43D3-8B79-37D633B846F1}">
+                  <asvg:svgBlip xmlns:asvg="http://schemas.microsoft.com/office/drawing/2016/SVG/main" r:embed="rId12"/>
+                </a:ext>
+              </a:extLst>
+            </a:blip>
+            <a:stretch>
+              <a:fillRect/>
+            </a:stretch>
+          </a:blipFill>
+        </p:spPr>
+      </p:sp>
+      <p:sp>
+        <p:nvSpPr>
+          <p:cNvPr id="70" name="Freeform 70"/>
+          <p:cNvSpPr/>
+          <p:nvPr/>
+        </p:nvSpPr>
+        <p:spPr>
+          <a:xfrm>
+            <a:off x="7268783" y="3904167"/>
+            <a:ext cx="775246" cy="775246"/>
+          </a:xfrm>
+          <a:custGeom>
+            <a:avLst/>
+            <a:gdLst/>
+            <a:ahLst/>
+            <a:cxnLst/>
+            <a:rect l="l" t="t" r="r" b="b"/>
+            <a:pathLst>
+              <a:path w="775246" h="775246">
+                <a:moveTo>
+                  <a:pt x="0" y="0"/>
+                </a:moveTo>
+                <a:lnTo>
+                  <a:pt x="775246" y="0"/>
+                </a:lnTo>
+                <a:lnTo>
+                  <a:pt x="775246" y="775246"/>
+                </a:lnTo>
+                <a:lnTo>
+                  <a:pt x="0" y="775246"/>
+                </a:lnTo>
+                <a:lnTo>
+                  <a:pt x="0" y="0"/>
+                </a:lnTo>
+                <a:close/>
+              </a:path>
+            </a:pathLst>
+          </a:custGeom>
+          <a:blipFill>
+            <a:blip r:embed="rId13">
+              <a:extLst>
+                <a:ext uri="{96DAC541-7B7A-43D3-8B79-37D633B846F1}">
+                  <asvg:svgBlip xmlns:asvg="http://schemas.microsoft.com/office/drawing/2016/SVG/main" r:embed="rId14"/>
+                </a:ext>
+              </a:extLst>
+            </a:blip>
+            <a:stretch>
+              <a:fillRect/>
+            </a:stretch>
+          </a:blipFill>
+        </p:spPr>
+      </p:sp>
+      <p:sp>
+        <p:nvSpPr>
+          <p:cNvPr id="71" name="Freeform 71"/>
+          <p:cNvSpPr/>
+          <p:nvPr/>
+        </p:nvSpPr>
+        <p:spPr>
+          <a:xfrm>
+            <a:off x="12756042" y="3916200"/>
+            <a:ext cx="608224" cy="681484"/>
+          </a:xfrm>
+          <a:custGeom>
+            <a:avLst/>
+            <a:gdLst/>
+            <a:ahLst/>
+            <a:cxnLst/>
+            <a:rect l="l" t="t" r="r" b="b"/>
+            <a:pathLst>
+              <a:path w="608224" h="681484">
+                <a:moveTo>
+                  <a:pt x="0" y="0"/>
+                </a:moveTo>
+                <a:lnTo>
+                  <a:pt x="608224" y="0"/>
+                </a:lnTo>
+                <a:lnTo>
+                  <a:pt x="608224" y="681484"/>
+                </a:lnTo>
+                <a:lnTo>
+                  <a:pt x="0" y="681484"/>
+                </a:lnTo>
+                <a:lnTo>
+                  <a:pt x="0" y="0"/>
+                </a:lnTo>
+                <a:close/>
+              </a:path>
+            </a:pathLst>
+          </a:custGeom>
+          <a:blipFill>
+            <a:blip r:embed="rId15">
+              <a:extLst>
+                <a:ext uri="{96DAC541-7B7A-43D3-8B79-37D633B846F1}">
+                  <asvg:svgBlip xmlns:asvg="http://schemas.microsoft.com/office/drawing/2016/SVG/main" r:embed="rId16"/>
+                </a:ext>
+              </a:extLst>
+            </a:blip>
+            <a:stretch>
+              <a:fillRect/>
+            </a:stretch>
+          </a:blipFill>
+        </p:spPr>
+      </p:sp>
+      <p:sp>
+        <p:nvSpPr>
+          <p:cNvPr id="72" name="Freeform 72"/>
+          <p:cNvSpPr/>
+          <p:nvPr/>
+        </p:nvSpPr>
+        <p:spPr>
+          <a:xfrm>
+            <a:off x="15363426" y="3975514"/>
+            <a:ext cx="762002" cy="703899"/>
+          </a:xfrm>
+          <a:custGeom>
+            <a:avLst/>
+            <a:gdLst/>
+            <a:ahLst/>
+            <a:cxnLst/>
+            <a:rect l="l" t="t" r="r" b="b"/>
+            <a:pathLst>
+              <a:path w="762002" h="703899">
+                <a:moveTo>
+                  <a:pt x="0" y="0"/>
+                </a:moveTo>
+                <a:lnTo>
+                  <a:pt x="762002" y="0"/>
+                </a:lnTo>
+                <a:lnTo>
+                  <a:pt x="762002" y="703899"/>
+                </a:lnTo>
+                <a:lnTo>
+                  <a:pt x="0" y="703899"/>
+                </a:lnTo>
+                <a:lnTo>
+                  <a:pt x="0" y="0"/>
+                </a:lnTo>
+                <a:close/>
+              </a:path>
+            </a:pathLst>
+          </a:custGeom>
+          <a:blipFill>
+            <a:blip r:embed="rId17">
+              <a:extLst>
+                <a:ext uri="{96DAC541-7B7A-43D3-8B79-37D633B846F1}">
+                  <asvg:svgBlip xmlns:asvg="http://schemas.microsoft.com/office/drawing/2016/SVG/main" r:embed="rId18"/>
+                </a:ext>
+              </a:extLst>
+            </a:blip>
+            <a:stretch>
+              <a:fillRect/>
+            </a:stretch>
+          </a:blipFill>
+        </p:spPr>
+      </p:sp>
+      <p:sp>
+        <p:nvSpPr>
+          <p:cNvPr id="73" name="TextBox 73"/>
+          <p:cNvSpPr txBox="1"/>
+          <p:nvPr/>
+        </p:nvSpPr>
+        <p:spPr>
+          <a:xfrm>
+            <a:off x="5282198" y="1016554"/>
+            <a:ext cx="7723604" cy="721995"/>
           </a:xfrm>
           <a:prstGeom prst="rect">
             <a:avLst/>
           </a:prstGeom>
         </p:spPr>
         <p:txBody>
-          <a:bodyPr anchor="t" rtlCol="false" tIns="0" lIns="0" bIns="0" rIns="0">
+          <a:bodyPr lIns="0" tIns="0" rIns="0" bIns="0" rtlCol="0" anchor="t">
             <a:spAutoFit/>
           </a:bodyPr>
           <a:lstStyle/>
           <a:p>
-            <a:pPr algn="l" marL="1187449" indent="-593725" lvl="1">
+            <a:pPr algn="ctr">
               <a:lnSpc>
-                <a:spcPts val="7699"/>
-              </a:lnSpc>
-              <a:buFont typeface="Arial"/>
-              <a:buChar char="•"/>
-            </a:pPr>
-            <a:r>
-              <a:rPr lang="en-US" sz="5499">
-                <a:solidFill>
-                  <a:srgbClr val="171C24"/>
-                </a:solidFill>
-                <a:latin typeface="TT Hoves"/>
-                <a:ea typeface="TT Hoves"/>
-                <a:cs typeface="TT Hoves"/>
-                <a:sym typeface="TT Hoves"/>
-              </a:rPr>
-              <a:t>Status: Upcoming (Phase 2).</a:t>
-            </a:r>
-          </a:p>
-          <a:p>
-            <a:pPr algn="l" marL="1187449" indent="-593725" lvl="1">
-              <a:lnSpc>
-                <a:spcPts val="7699"/>
-              </a:lnSpc>
-              <a:buFont typeface="Arial"/>
-              <a:buChar char="•"/>
-            </a:pPr>
-            <a:r>
-              <a:rPr lang="en-US" sz="5499">
-                <a:solidFill>
-                  <a:srgbClr val="171C24"/>
-                </a:solidFill>
-                <a:latin typeface="TT Hoves"/>
-                <a:ea typeface="TT Hoves"/>
-                <a:cs typeface="TT Hoves"/>
-                <a:sym typeface="TT Hoves"/>
-              </a:rPr>
-              <a:t>Problem: 0/1 Knapsack.</a:t>
-            </a:r>
-          </a:p>
-          <a:p>
-            <a:pPr algn="l" marL="1187449" indent="-593725" lvl="1">
-              <a:lnSpc>
-                <a:spcPts val="7699"/>
-              </a:lnSpc>
-              <a:buFont typeface="Arial"/>
-              <a:buChar char="•"/>
-            </a:pPr>
-            <a:r>
-              <a:rPr lang="en-US" sz="5499">
-                <a:solidFill>
-                  <a:srgbClr val="171C24"/>
-                </a:solidFill>
-                <a:latin typeface="TT Hoves"/>
-                <a:ea typeface="TT Hoves"/>
-                <a:cs typeface="TT Hoves"/>
-                <a:sym typeface="TT Hoves"/>
-              </a:rPr>
-              <a:t>Goal: Select items to maximize profit without breaking the bag.</a:t>
-            </a:r>
-          </a:p>
-          <a:p>
-            <a:pPr algn="l" marL="1187449" indent="-593725" lvl="1">
-              <a:lnSpc>
-                <a:spcPts val="7699"/>
-              </a:lnSpc>
-              <a:buFont typeface="Arial"/>
-              <a:buChar char="•"/>
-            </a:pPr>
-            <a:r>
-              <a:rPr lang="en-US" sz="5499">
-                <a:solidFill>
-                  <a:srgbClr val="171C24"/>
-                </a:solidFill>
-                <a:latin typeface="TT Hoves"/>
-                <a:ea typeface="TT Hoves"/>
-                <a:cs typeface="TT Hoves"/>
-                <a:sym typeface="TT Hoves"/>
-              </a:rPr>
-              <a:t>Plan: Implement using Branch &amp; Bound and Dynamic</a:t>
-            </a:r>
-            <a:r>
-              <a:rPr lang="en-US" sz="5499">
-                <a:solidFill>
-                  <a:srgbClr val="171C24"/>
-                </a:solidFill>
-                <a:latin typeface="TT Hoves"/>
-                <a:ea typeface="TT Hoves"/>
-                <a:cs typeface="TT Hoves"/>
-                <a:sym typeface="TT Hoves"/>
-              </a:rPr>
-              <a:t> Programming (DP) in the same C backend.</a:t>
-            </a:r>
-          </a:p>
-          <a:p>
-            <a:pPr algn="l">
-              <a:lnSpc>
-                <a:spcPts val="7699"/>
+                <a:spcPts val="5880"/>
               </a:lnSpc>
             </a:pPr>
-          </a:p>
-        </p:txBody>
-      </p:sp>
-      <p:sp>
-        <p:nvSpPr>
-          <p:cNvPr name="TextBox 3" id="3"/>
-          <p:cNvSpPr txBox="true"/>
+            <a:r>
+              <a:rPr lang="en-US" sz="4200" b="1" spc="134">
+                <a:solidFill>
+                  <a:srgbClr val="000000"/>
+                </a:solidFill>
+                <a:latin typeface="Roboto Bold" panose="02000000000000000000"/>
+                <a:ea typeface="Roboto Bold" panose="02000000000000000000"/>
+                <a:cs typeface="Roboto Bold" panose="02000000000000000000"/>
+                <a:sym typeface="Roboto Bold" panose="02000000000000000000"/>
+              </a:rPr>
+              <a:t>SYSTEM FLOW</a:t>
+            </a:r>
+            <a:endParaRPr lang="en-US" sz="4200" b="1" spc="134">
+              <a:solidFill>
+                <a:srgbClr val="000000"/>
+              </a:solidFill>
+              <a:latin typeface="Roboto Bold" panose="02000000000000000000"/>
+              <a:ea typeface="Roboto Bold" panose="02000000000000000000"/>
+              <a:cs typeface="Roboto Bold" panose="02000000000000000000"/>
+              <a:sym typeface="Roboto Bold" panose="02000000000000000000"/>
+            </a:endParaRPr>
+          </a:p>
+        </p:txBody>
+      </p:sp>
+      <p:sp>
+        <p:nvSpPr>
+          <p:cNvPr id="74" name="TextBox 74"/>
+          <p:cNvSpPr txBox="1"/>
           <p:nvPr/>
         </p:nvSpPr>
         <p:spPr>
-          <a:xfrm rot="0">
-            <a:off x="-434667" y="314327"/>
-            <a:ext cx="19157333" cy="1285871"/>
+          <a:xfrm>
+            <a:off x="1267140" y="5423960"/>
+            <a:ext cx="2237269" cy="441960"/>
           </a:xfrm>
           <a:prstGeom prst="rect">
             <a:avLst/>
           </a:prstGeom>
         </p:spPr>
         <p:txBody>
-          <a:bodyPr anchor="t" rtlCol="false" tIns="0" lIns="0" bIns="0" rIns="0">
+          <a:bodyPr lIns="0" tIns="0" rIns="0" bIns="0" rtlCol="0" anchor="t">
             <a:spAutoFit/>
           </a:bodyPr>
           <a:lstStyle/>
           <a:p>
             <a:pPr algn="ctr">
               <a:lnSpc>
-                <a:spcPts val="10500"/>
+                <a:spcPts val="3510"/>
               </a:lnSpc>
-              <a:spcBef>
-                <a:spcPct val="0"/>
-              </a:spcBef>
             </a:pPr>
             <a:r>
-              <a:rPr lang="en-US" b="true" sz="7500">
-                <a:solidFill>
-                  <a:srgbClr val="171C24"/>
-                </a:solidFill>
-                <a:latin typeface="TT Hoves Bold"/>
-                <a:ea typeface="TT Hoves Bold"/>
-                <a:cs typeface="TT Hoves Bold"/>
-                <a:sym typeface="TT Hoves Bold"/>
-              </a:rPr>
-              <a:t>Future Work</a:t>
-            </a:r>
-            <a:r>
-              <a:rPr lang="en-US" b="true" sz="7500">
-                <a:solidFill>
-                  <a:srgbClr val="171C24"/>
-                </a:solidFill>
-                <a:latin typeface="TT Hoves Bold"/>
-                <a:ea typeface="TT Hoves Bold"/>
-                <a:cs typeface="TT Hoves Bold"/>
-                <a:sym typeface="TT Hoves Bold"/>
-              </a:rPr>
-              <a:t> (The Knapsack Problem)</a:t>
-            </a:r>
+              <a:rPr lang="en-US" sz="2700">
+                <a:solidFill>
+                  <a:srgbClr val="000000">
+                    <a:alpha val="80000"/>
+                  </a:srgbClr>
+                </a:solidFill>
+                <a:latin typeface="Roboto" panose="02000000000000000000"/>
+                <a:ea typeface="Roboto" panose="02000000000000000000"/>
+                <a:cs typeface="Roboto" panose="02000000000000000000"/>
+                <a:sym typeface="Roboto" panose="02000000000000000000"/>
+              </a:rPr>
+              <a:t>User</a:t>
+            </a:r>
+            <a:endParaRPr lang="en-US" sz="2700">
+              <a:solidFill>
+                <a:srgbClr val="000000">
+                  <a:alpha val="80000"/>
+                </a:srgbClr>
+              </a:solidFill>
+              <a:latin typeface="Roboto" panose="02000000000000000000"/>
+              <a:ea typeface="Roboto" panose="02000000000000000000"/>
+              <a:cs typeface="Roboto" panose="02000000000000000000"/>
+              <a:sym typeface="Roboto" panose="02000000000000000000"/>
+            </a:endParaRPr>
+          </a:p>
+        </p:txBody>
+      </p:sp>
+      <p:sp>
+        <p:nvSpPr>
+          <p:cNvPr id="75" name="TextBox 75"/>
+          <p:cNvSpPr txBox="1"/>
+          <p:nvPr/>
+        </p:nvSpPr>
+        <p:spPr>
+          <a:xfrm>
+            <a:off x="3934224" y="5423960"/>
+            <a:ext cx="2237269" cy="441960"/>
+          </a:xfrm>
+          <a:prstGeom prst="rect">
+            <a:avLst/>
+          </a:prstGeom>
+        </p:spPr>
+        <p:txBody>
+          <a:bodyPr lIns="0" tIns="0" rIns="0" bIns="0" rtlCol="0" anchor="t">
+            <a:spAutoFit/>
+          </a:bodyPr>
+          <a:lstStyle/>
+          <a:p>
+            <a:pPr algn="ctr">
+              <a:lnSpc>
+                <a:spcPts val="3510"/>
+              </a:lnSpc>
+            </a:pPr>
+            <a:r>
+              <a:rPr lang="en-US" sz="2700">
+                <a:solidFill>
+                  <a:srgbClr val="000000">
+                    <a:alpha val="80000"/>
+                  </a:srgbClr>
+                </a:solidFill>
+                <a:latin typeface="Roboto" panose="02000000000000000000"/>
+                <a:ea typeface="Roboto" panose="02000000000000000000"/>
+                <a:cs typeface="Roboto" panose="02000000000000000000"/>
+                <a:sym typeface="Roboto" panose="02000000000000000000"/>
+              </a:rPr>
+              <a:t>TspSolver.java</a:t>
+            </a:r>
+            <a:endParaRPr lang="en-US" sz="2700">
+              <a:solidFill>
+                <a:srgbClr val="000000">
+                  <a:alpha val="80000"/>
+                </a:srgbClr>
+              </a:solidFill>
+              <a:latin typeface="Roboto" panose="02000000000000000000"/>
+              <a:ea typeface="Roboto" panose="02000000000000000000"/>
+              <a:cs typeface="Roboto" panose="02000000000000000000"/>
+              <a:sym typeface="Roboto" panose="02000000000000000000"/>
+            </a:endParaRPr>
+          </a:p>
+        </p:txBody>
+      </p:sp>
+      <p:sp>
+        <p:nvSpPr>
+          <p:cNvPr id="76" name="TextBox 76"/>
+          <p:cNvSpPr txBox="1"/>
+          <p:nvPr/>
+        </p:nvSpPr>
+        <p:spPr>
+          <a:xfrm>
+            <a:off x="2582668" y="3524562"/>
+            <a:ext cx="2237269" cy="441960"/>
+          </a:xfrm>
+          <a:prstGeom prst="rect">
+            <a:avLst/>
+          </a:prstGeom>
+        </p:spPr>
+        <p:txBody>
+          <a:bodyPr lIns="0" tIns="0" rIns="0" bIns="0" rtlCol="0" anchor="t">
+            <a:spAutoFit/>
+          </a:bodyPr>
+          <a:lstStyle/>
+          <a:p>
+            <a:pPr algn="ctr">
+              <a:lnSpc>
+                <a:spcPts val="3510"/>
+              </a:lnSpc>
+            </a:pPr>
+            <a:r>
+              <a:rPr lang="en-US" sz="2700">
+                <a:solidFill>
+                  <a:srgbClr val="000000">
+                    <a:alpha val="80000"/>
+                  </a:srgbClr>
+                </a:solidFill>
+                <a:latin typeface="Roboto" panose="02000000000000000000"/>
+                <a:ea typeface="Roboto" panose="02000000000000000000"/>
+                <a:cs typeface="Roboto" panose="02000000000000000000"/>
+                <a:sym typeface="Roboto" panose="02000000000000000000"/>
+              </a:rPr>
+              <a:t>Input</a:t>
+            </a:r>
+            <a:endParaRPr lang="en-US" sz="2700">
+              <a:solidFill>
+                <a:srgbClr val="000000">
+                  <a:alpha val="80000"/>
+                </a:srgbClr>
+              </a:solidFill>
+              <a:latin typeface="Roboto" panose="02000000000000000000"/>
+              <a:ea typeface="Roboto" panose="02000000000000000000"/>
+              <a:cs typeface="Roboto" panose="02000000000000000000"/>
+              <a:sym typeface="Roboto" panose="02000000000000000000"/>
+            </a:endParaRPr>
+          </a:p>
+        </p:txBody>
+      </p:sp>
+      <p:sp>
+        <p:nvSpPr>
+          <p:cNvPr id="77" name="TextBox 77"/>
+          <p:cNvSpPr txBox="1"/>
+          <p:nvPr/>
+        </p:nvSpPr>
+        <p:spPr>
+          <a:xfrm>
+            <a:off x="6603322" y="5423960"/>
+            <a:ext cx="2237269" cy="441960"/>
+          </a:xfrm>
+          <a:prstGeom prst="rect">
+            <a:avLst/>
+          </a:prstGeom>
+        </p:spPr>
+        <p:txBody>
+          <a:bodyPr lIns="0" tIns="0" rIns="0" bIns="0" rtlCol="0" anchor="t">
+            <a:spAutoFit/>
+          </a:bodyPr>
+          <a:lstStyle/>
+          <a:p>
+            <a:pPr algn="ctr">
+              <a:lnSpc>
+                <a:spcPts val="3510"/>
+              </a:lnSpc>
+            </a:pPr>
+            <a:r>
+              <a:rPr lang="en-US" sz="2700">
+                <a:solidFill>
+                  <a:srgbClr val="000000">
+                    <a:alpha val="80000"/>
+                  </a:srgbClr>
+                </a:solidFill>
+                <a:latin typeface="Roboto" panose="02000000000000000000"/>
+                <a:ea typeface="Roboto" panose="02000000000000000000"/>
+                <a:cs typeface="Roboto" panose="02000000000000000000"/>
+                <a:sym typeface="Roboto" panose="02000000000000000000"/>
+              </a:rPr>
+              <a:t>Input text</a:t>
+            </a:r>
+            <a:endParaRPr lang="en-US" sz="2700">
+              <a:solidFill>
+                <a:srgbClr val="000000">
+                  <a:alpha val="80000"/>
+                </a:srgbClr>
+              </a:solidFill>
+              <a:latin typeface="Roboto" panose="02000000000000000000"/>
+              <a:ea typeface="Roboto" panose="02000000000000000000"/>
+              <a:cs typeface="Roboto" panose="02000000000000000000"/>
+              <a:sym typeface="Roboto" panose="02000000000000000000"/>
+            </a:endParaRPr>
+          </a:p>
+        </p:txBody>
+      </p:sp>
+      <p:sp>
+        <p:nvSpPr>
+          <p:cNvPr id="78" name="TextBox 78"/>
+          <p:cNvSpPr txBox="1"/>
+          <p:nvPr/>
+        </p:nvSpPr>
+        <p:spPr>
+          <a:xfrm>
+            <a:off x="5226918" y="3581530"/>
+            <a:ext cx="2237269" cy="441960"/>
+          </a:xfrm>
+          <a:prstGeom prst="rect">
+            <a:avLst/>
+          </a:prstGeom>
+        </p:spPr>
+        <p:txBody>
+          <a:bodyPr lIns="0" tIns="0" rIns="0" bIns="0" rtlCol="0" anchor="t">
+            <a:spAutoFit/>
+          </a:bodyPr>
+          <a:lstStyle/>
+          <a:p>
+            <a:pPr algn="ctr">
+              <a:lnSpc>
+                <a:spcPts val="3510"/>
+              </a:lnSpc>
+            </a:pPr>
+            <a:r>
+              <a:rPr lang="en-US" sz="2700">
+                <a:solidFill>
+                  <a:srgbClr val="000000">
+                    <a:alpha val="80000"/>
+                  </a:srgbClr>
+                </a:solidFill>
+                <a:latin typeface="Roboto" panose="02000000000000000000"/>
+                <a:ea typeface="Roboto" panose="02000000000000000000"/>
+                <a:cs typeface="Roboto" panose="02000000000000000000"/>
+                <a:sym typeface="Roboto" panose="02000000000000000000"/>
+              </a:rPr>
+              <a:t>Write</a:t>
+            </a:r>
+            <a:endParaRPr lang="en-US" sz="2700">
+              <a:solidFill>
+                <a:srgbClr val="000000">
+                  <a:alpha val="80000"/>
+                </a:srgbClr>
+              </a:solidFill>
+              <a:latin typeface="Roboto" panose="02000000000000000000"/>
+              <a:ea typeface="Roboto" panose="02000000000000000000"/>
+              <a:cs typeface="Roboto" panose="02000000000000000000"/>
+              <a:sym typeface="Roboto" panose="02000000000000000000"/>
+            </a:endParaRPr>
+          </a:p>
+        </p:txBody>
+      </p:sp>
+      <p:sp>
+        <p:nvSpPr>
+          <p:cNvPr id="79" name="TextBox 79"/>
+          <p:cNvSpPr txBox="1"/>
+          <p:nvPr/>
+        </p:nvSpPr>
+        <p:spPr>
+          <a:xfrm>
+            <a:off x="12081409" y="5437930"/>
+            <a:ext cx="2237269" cy="441960"/>
+          </a:xfrm>
+          <a:prstGeom prst="rect">
+            <a:avLst/>
+          </a:prstGeom>
+        </p:spPr>
+        <p:txBody>
+          <a:bodyPr lIns="0" tIns="0" rIns="0" bIns="0" rtlCol="0" anchor="t">
+            <a:spAutoFit/>
+          </a:bodyPr>
+          <a:lstStyle/>
+          <a:p>
+            <a:pPr algn="ctr">
+              <a:lnSpc>
+                <a:spcPts val="3510"/>
+              </a:lnSpc>
+            </a:pPr>
+            <a:r>
+              <a:rPr lang="en-US" sz="2700">
+                <a:solidFill>
+                  <a:srgbClr val="000000">
+                    <a:alpha val="80000"/>
+                  </a:srgbClr>
+                </a:solidFill>
+                <a:latin typeface="Roboto" panose="02000000000000000000"/>
+                <a:ea typeface="Roboto" panose="02000000000000000000"/>
+                <a:cs typeface="Roboto" panose="02000000000000000000"/>
+                <a:sym typeface="Roboto" panose="02000000000000000000"/>
+              </a:rPr>
+              <a:t>CSV file</a:t>
+            </a:r>
+            <a:endParaRPr lang="en-US" sz="2700">
+              <a:solidFill>
+                <a:srgbClr val="000000">
+                  <a:alpha val="80000"/>
+                </a:srgbClr>
+              </a:solidFill>
+              <a:latin typeface="Roboto" panose="02000000000000000000"/>
+              <a:ea typeface="Roboto" panose="02000000000000000000"/>
+              <a:cs typeface="Roboto" panose="02000000000000000000"/>
+              <a:sym typeface="Roboto" panose="02000000000000000000"/>
+            </a:endParaRPr>
+          </a:p>
+        </p:txBody>
+      </p:sp>
+      <p:sp>
+        <p:nvSpPr>
+          <p:cNvPr id="80" name="TextBox 80"/>
+          <p:cNvSpPr txBox="1"/>
+          <p:nvPr/>
+        </p:nvSpPr>
+        <p:spPr>
+          <a:xfrm>
+            <a:off x="7915995" y="3598731"/>
+            <a:ext cx="2237269" cy="441960"/>
+          </a:xfrm>
+          <a:prstGeom prst="rect">
+            <a:avLst/>
+          </a:prstGeom>
+        </p:spPr>
+        <p:txBody>
+          <a:bodyPr lIns="0" tIns="0" rIns="0" bIns="0" rtlCol="0" anchor="t">
+            <a:spAutoFit/>
+          </a:bodyPr>
+          <a:lstStyle/>
+          <a:p>
+            <a:pPr algn="ctr">
+              <a:lnSpc>
+                <a:spcPts val="3510"/>
+              </a:lnSpc>
+            </a:pPr>
+            <a:r>
+              <a:rPr lang="en-US" sz="2700">
+                <a:solidFill>
+                  <a:srgbClr val="000000">
+                    <a:alpha val="80000"/>
+                  </a:srgbClr>
+                </a:solidFill>
+                <a:latin typeface="Roboto" panose="02000000000000000000"/>
+                <a:ea typeface="Roboto" panose="02000000000000000000"/>
+                <a:cs typeface="Roboto" panose="02000000000000000000"/>
+                <a:sym typeface="Roboto" panose="02000000000000000000"/>
+              </a:rPr>
+              <a:t>Pass</a:t>
+            </a:r>
+            <a:endParaRPr lang="en-US" sz="2700">
+              <a:solidFill>
+                <a:srgbClr val="000000">
+                  <a:alpha val="80000"/>
+                </a:srgbClr>
+              </a:solidFill>
+              <a:latin typeface="Roboto" panose="02000000000000000000"/>
+              <a:ea typeface="Roboto" panose="02000000000000000000"/>
+              <a:cs typeface="Roboto" panose="02000000000000000000"/>
+              <a:sym typeface="Roboto" panose="02000000000000000000"/>
+            </a:endParaRPr>
+          </a:p>
+        </p:txBody>
+      </p:sp>
+      <p:sp>
+        <p:nvSpPr>
+          <p:cNvPr id="81" name="TextBox 81"/>
+          <p:cNvSpPr txBox="1"/>
+          <p:nvPr/>
+        </p:nvSpPr>
+        <p:spPr>
+          <a:xfrm>
+            <a:off x="9599809" y="5576360"/>
+            <a:ext cx="2237269" cy="880110"/>
+          </a:xfrm>
+          <a:prstGeom prst="rect">
+            <a:avLst/>
+          </a:prstGeom>
+        </p:spPr>
+        <p:txBody>
+          <a:bodyPr lIns="0" tIns="0" rIns="0" bIns="0" rtlCol="0" anchor="t">
+            <a:spAutoFit/>
+          </a:bodyPr>
+          <a:lstStyle/>
+          <a:p>
+            <a:pPr algn="ctr">
+              <a:lnSpc>
+                <a:spcPts val="3510"/>
+              </a:lnSpc>
+            </a:pPr>
+            <a:r>
+              <a:rPr lang="en-US" sz="2700">
+                <a:solidFill>
+                  <a:srgbClr val="000000">
+                    <a:alpha val="80000"/>
+                  </a:srgbClr>
+                </a:solidFill>
+                <a:latin typeface="Roboto" panose="02000000000000000000"/>
+                <a:ea typeface="Roboto" panose="02000000000000000000"/>
+                <a:cs typeface="Roboto" panose="02000000000000000000"/>
+                <a:sym typeface="Roboto" panose="02000000000000000000"/>
+              </a:rPr>
+              <a:t>Main.c</a:t>
+            </a:r>
+            <a:endParaRPr lang="en-US" sz="2700">
+              <a:solidFill>
+                <a:srgbClr val="000000">
+                  <a:alpha val="80000"/>
+                </a:srgbClr>
+              </a:solidFill>
+              <a:latin typeface="Roboto" panose="02000000000000000000"/>
+              <a:ea typeface="Roboto" panose="02000000000000000000"/>
+              <a:cs typeface="Roboto" panose="02000000000000000000"/>
+              <a:sym typeface="Roboto" panose="02000000000000000000"/>
+            </a:endParaRPr>
+          </a:p>
+          <a:p>
+            <a:pPr algn="ctr">
+              <a:lnSpc>
+                <a:spcPts val="3510"/>
+              </a:lnSpc>
+            </a:pPr>
+            <a:r>
+              <a:rPr lang="en-US" sz="2700">
+                <a:solidFill>
+                  <a:srgbClr val="000000">
+                    <a:alpha val="80000"/>
+                  </a:srgbClr>
+                </a:solidFill>
+                <a:latin typeface="Roboto" panose="02000000000000000000"/>
+                <a:ea typeface="Roboto" panose="02000000000000000000"/>
+                <a:cs typeface="Roboto" panose="02000000000000000000"/>
+                <a:sym typeface="Roboto" panose="02000000000000000000"/>
+              </a:rPr>
+              <a:t>and backend</a:t>
+            </a:r>
+            <a:endParaRPr lang="en-US" sz="2700">
+              <a:solidFill>
+                <a:srgbClr val="000000">
+                  <a:alpha val="80000"/>
+                </a:srgbClr>
+              </a:solidFill>
+              <a:latin typeface="Roboto" panose="02000000000000000000"/>
+              <a:ea typeface="Roboto" panose="02000000000000000000"/>
+              <a:cs typeface="Roboto" panose="02000000000000000000"/>
+              <a:sym typeface="Roboto" panose="02000000000000000000"/>
+            </a:endParaRPr>
+          </a:p>
+        </p:txBody>
+      </p:sp>
+      <p:sp>
+        <p:nvSpPr>
+          <p:cNvPr id="82" name="TextBox 82"/>
+          <p:cNvSpPr txBox="1"/>
+          <p:nvPr/>
+        </p:nvSpPr>
+        <p:spPr>
+          <a:xfrm>
+            <a:off x="10530945" y="3524562"/>
+            <a:ext cx="2237269" cy="441960"/>
+          </a:xfrm>
+          <a:prstGeom prst="rect">
+            <a:avLst/>
+          </a:prstGeom>
+        </p:spPr>
+        <p:txBody>
+          <a:bodyPr lIns="0" tIns="0" rIns="0" bIns="0" rtlCol="0" anchor="t">
+            <a:spAutoFit/>
+          </a:bodyPr>
+          <a:lstStyle/>
+          <a:p>
+            <a:pPr algn="ctr">
+              <a:lnSpc>
+                <a:spcPts val="3510"/>
+              </a:lnSpc>
+            </a:pPr>
+            <a:r>
+              <a:rPr lang="en-US" sz="2700">
+                <a:solidFill>
+                  <a:srgbClr val="000000">
+                    <a:alpha val="80000"/>
+                  </a:srgbClr>
+                </a:solidFill>
+                <a:latin typeface="Roboto" panose="02000000000000000000"/>
+                <a:ea typeface="Roboto" panose="02000000000000000000"/>
+                <a:cs typeface="Roboto" panose="02000000000000000000"/>
+                <a:sym typeface="Roboto" panose="02000000000000000000"/>
+              </a:rPr>
+              <a:t>Pass</a:t>
+            </a:r>
+            <a:endParaRPr lang="en-US" sz="2700">
+              <a:solidFill>
+                <a:srgbClr val="000000">
+                  <a:alpha val="80000"/>
+                </a:srgbClr>
+              </a:solidFill>
+              <a:latin typeface="Roboto" panose="02000000000000000000"/>
+              <a:ea typeface="Roboto" panose="02000000000000000000"/>
+              <a:cs typeface="Roboto" panose="02000000000000000000"/>
+              <a:sym typeface="Roboto" panose="02000000000000000000"/>
+            </a:endParaRPr>
+          </a:p>
+        </p:txBody>
+      </p:sp>
+      <p:sp>
+        <p:nvSpPr>
+          <p:cNvPr id="83" name="TextBox 83"/>
+          <p:cNvSpPr txBox="1"/>
+          <p:nvPr/>
+        </p:nvSpPr>
+        <p:spPr>
+          <a:xfrm>
+            <a:off x="14785606" y="5423960"/>
+            <a:ext cx="2237269" cy="1756410"/>
+          </a:xfrm>
+          <a:prstGeom prst="rect">
+            <a:avLst/>
+          </a:prstGeom>
+        </p:spPr>
+        <p:txBody>
+          <a:bodyPr lIns="0" tIns="0" rIns="0" bIns="0" rtlCol="0" anchor="t">
+            <a:spAutoFit/>
+          </a:bodyPr>
+          <a:lstStyle/>
+          <a:p>
+            <a:pPr algn="ctr">
+              <a:lnSpc>
+                <a:spcPts val="3510"/>
+              </a:lnSpc>
+            </a:pPr>
+            <a:r>
+              <a:rPr lang="en-US" sz="2700">
+                <a:solidFill>
+                  <a:srgbClr val="000000">
+                    <a:alpha val="80000"/>
+                  </a:srgbClr>
+                </a:solidFill>
+                <a:latin typeface="Roboto" panose="02000000000000000000"/>
+                <a:ea typeface="Roboto" panose="02000000000000000000"/>
+                <a:cs typeface="Roboto" panose="02000000000000000000"/>
+                <a:sym typeface="Roboto" panose="02000000000000000000"/>
+              </a:rPr>
+              <a:t>TspSolver.java</a:t>
+            </a:r>
+            <a:endParaRPr lang="en-US" sz="2700">
+              <a:solidFill>
+                <a:srgbClr val="000000">
+                  <a:alpha val="80000"/>
+                </a:srgbClr>
+              </a:solidFill>
+              <a:latin typeface="Roboto" panose="02000000000000000000"/>
+              <a:ea typeface="Roboto" panose="02000000000000000000"/>
+              <a:cs typeface="Roboto" panose="02000000000000000000"/>
+              <a:sym typeface="Roboto" panose="02000000000000000000"/>
+            </a:endParaRPr>
+          </a:p>
+          <a:p>
+            <a:pPr algn="ctr">
+              <a:lnSpc>
+                <a:spcPts val="3510"/>
+              </a:lnSpc>
+            </a:pPr>
+            <a:r>
+              <a:rPr lang="en-US" sz="2700">
+                <a:solidFill>
+                  <a:srgbClr val="000000">
+                    <a:alpha val="80000"/>
+                  </a:srgbClr>
+                </a:solidFill>
+                <a:latin typeface="Roboto" panose="02000000000000000000"/>
+                <a:ea typeface="Roboto" panose="02000000000000000000"/>
+                <a:cs typeface="Roboto" panose="02000000000000000000"/>
+                <a:sym typeface="Roboto" panose="02000000000000000000"/>
+              </a:rPr>
+              <a:t>and display the visualisation</a:t>
+            </a:r>
+            <a:endParaRPr lang="en-US" sz="2700">
+              <a:solidFill>
+                <a:srgbClr val="000000">
+                  <a:alpha val="80000"/>
+                </a:srgbClr>
+              </a:solidFill>
+              <a:latin typeface="Roboto" panose="02000000000000000000"/>
+              <a:ea typeface="Roboto" panose="02000000000000000000"/>
+              <a:cs typeface="Roboto" panose="02000000000000000000"/>
+              <a:sym typeface="Roboto" panose="02000000000000000000"/>
+            </a:endParaRPr>
           </a:p>
         </p:txBody>
       </p:sp>
@@ -6171,7 +9862,10 @@
       </a:bgFillStyleLst>
     </a:fmtScheme>
   </a:themeElements>
-  <a:objectDefaults/>
-  <a:extraClrSchemeLst/>
+  <a:extLst>
+    <a:ext uri="{05A4C25C-085E-4340-85A3-A5531E510DB2}">
+      <thm15:themeFamily xmlns:thm15="http://schemas.microsoft.com/office/thememl/2012/main" name="Office Theme" id="{62F939B6-93AF-4DB8-9C6B-D6C7DFDC589F}" vid="{4A3C46E8-61CC-4603-A589-7422A47A8E4A}"/>
+    </a:ext>
+  </a:extLst>
 </a:theme>
 </file>